--- a/MTOP_presentation.pptx
+++ b/MTOP_presentation.pptx
@@ -1114,18 +1114,18 @@
           <a:lstStyle/>
           <a:p>
             <a:r>
-              <a:t>PRESENTER: Tiebert   |   Target ~25 s</a:t>
+              <a:t>PRESENTER: Tiebert   |   Target ~30 s</a:t>
             </a:r>
           </a:p>
           <a:p/>
           <a:p>
             <a:r>
-              <a:t>Finally, transparency on GenAI. We used it as a language aid to proofread our own text, for post-processing and plotting scripts, for a couple of supporting theory figures, and for initial background reading.</a:t>
-            </a:r>
-          </a:p>
-          <a:p>
-            <a:r>
-              <a:t>Everything that matters we did ourselves: the MATLAB implementation, the finite-difference verification of every sensitivity, and the fine-mesh re-analysis that cross-checks the MTOP designs. Every number in this talk we reproduced and understand.</a:t>
+              <a:t>To close, a brief outlook. Our headline numbers are for a 2D beam, where a plain coarse model already came within 0.6 percent, so the 2D benefit was modest. MTOP pays off most where the equilibrium solve genuinely dominates the cost: in 3D, with much larger systems, and where the design has fine features a coarse model cannot resolve, so keeping the fine density description is worth it.</a:t>
+            </a:r>
+          </a:p>
+          <a:p>
+            <a:r>
+              <a:t>Three open issues from this study: density filtering needs a better convergence criterion than the design-change tolerance; the filtering, assembly and optimizer steps still scale with the fine mesh and cap the speedup below the 40 times of the solve itself; and with MMA the optimizer subproblem, not the FE solve, becomes the bottleneck.</a:t>
             </a:r>
           </a:p>
           <a:p>
@@ -7460,7 +7460,7 @@
                   <a:srgbClr val="2F4D5D"/>
                 </a:solidFill>
               </a:rPr>
-              <a:t>We used GenAI for:</a:t>
+              <a:t>Where MTOP pays off most</a:t>
             </a:r>
           </a:p>
           <a:p>
@@ -7478,7 +7478,7 @@
                   <a:srgbClr val="2F4D5D"/>
                 </a:solidFill>
               </a:rPr>
-              <a:t>Proofreading and rephrasing text we wrote ourselves</a:t>
+              <a:t>3D problems: the equilibrium solve dominates far more, so the speedup is larger</a:t>
             </a:r>
           </a:p>
           <a:p>
@@ -7496,7 +7496,7 @@
                   <a:srgbClr val="2F4D5D"/>
                 </a:solidFill>
               </a:rPr>
-              <a:t>Post-processing and plotting scripts</a:t>
+              <a:t>Smaller filter radii and finer features, which a plain coarse model cannot resolve</a:t>
             </a:r>
           </a:p>
           <a:p>
@@ -7514,7 +7514,46 @@
                   <a:srgbClr val="2F4D5D"/>
                 </a:solidFill>
               </a:rPr>
-              <a:t>Supporting theory figures (e.g. the MMA sketch)</a:t>
+              <a:t>Cases that need the fine design description, not only the overall load path</a:t>
+            </a:r>
+          </a:p>
+        </p:txBody>
+      </p:sp>
+      <p:sp>
+        <p:nvSpPr>
+          <p:cNvPr id="3" name="Content Placeholder 2"/>
+          <p:cNvSpPr>
+            <a:spLocks noGrp="1"/>
+          </p:cNvSpPr>
+          <p:nvPr>
+            <p:ph idx="13" sz="quarter"/>
+          </p:nvPr>
+        </p:nvSpPr>
+        <p:spPr>
+          <a:xfrm>
+            <a:off x="6256000" y="1410000"/>
+            <a:ext cx="5360000" cy="3500000"/>
+          </a:xfrm>
+        </p:spPr>
+        <p:txBody>
+          <a:bodyPr wrap="square" anchor="ctr"/>
+          <a:lstStyle/>
+          <a:p>
+            <a:pPr>
+              <a:spcBef>
+                <a:spcPts val="200"/>
+              </a:spcBef>
+              <a:spcAft>
+                <a:spcPts val="800"/>
+              </a:spcAft>
+            </a:pPr>
+            <a:r>
+              <a:rPr sz="2000" b="1">
+                <a:solidFill>
+                  <a:srgbClr val="2F4D5D"/>
+                </a:solidFill>
+              </a:rPr>
+              <a:t>Open issues and limitations</a:t>
             </a:r>
           </a:p>
           <a:p>
@@ -7532,46 +7571,7 @@
                   <a:srgbClr val="2F4D5D"/>
                 </a:solidFill>
               </a:rPr>
-              <a:t>Background reading, checked against course material</a:t>
-            </a:r>
-          </a:p>
-        </p:txBody>
-      </p:sp>
-      <p:sp>
-        <p:nvSpPr>
-          <p:cNvPr id="3" name="Content Placeholder 2"/>
-          <p:cNvSpPr>
-            <a:spLocks noGrp="1"/>
-          </p:cNvSpPr>
-          <p:nvPr>
-            <p:ph idx="13" sz="quarter"/>
-          </p:nvPr>
-        </p:nvSpPr>
-        <p:spPr>
-          <a:xfrm>
-            <a:off x="6256000" y="1410000"/>
-            <a:ext cx="5360000" cy="3500000"/>
-          </a:xfrm>
-        </p:spPr>
-        <p:txBody>
-          <a:bodyPr wrap="square" anchor="ctr"/>
-          <a:lstStyle/>
-          <a:p>
-            <a:pPr>
-              <a:spcBef>
-                <a:spcPts val="200"/>
-              </a:spcBef>
-              <a:spcAft>
-                <a:spcPts val="800"/>
-              </a:spcAft>
-            </a:pPr>
-            <a:r>
-              <a:rPr sz="2000" b="1">
-                <a:solidFill>
-                  <a:srgbClr val="2F4D5D"/>
-                </a:solidFill>
-              </a:rPr>
-              <a:t>We stayed in control by:</a:t>
+              <a:t>Density filtering needs a convergence criterion beyond the design-change tolerance</a:t>
             </a:r>
           </a:p>
           <a:p>
@@ -7589,7 +7589,7 @@
                   <a:srgbClr val="2F4D5D"/>
                 </a:solidFill>
               </a:rPr>
-              <a:t>Implementing every result ourselves in MATLAB</a:t>
+              <a:t>Filtering, assembly and the optimizer still scale with the fine mesh and cap the speedup</a:t>
             </a:r>
           </a:p>
           <a:p>
@@ -7607,43 +7607,7 @@
                   <a:srgbClr val="2F4D5D"/>
                 </a:solidFill>
               </a:rPr>
-              <a:t>Verifying all sensitivities with finite differences</a:t>
-            </a:r>
-          </a:p>
-          <a:p>
-            <a:pPr lvl="1">
-              <a:spcBef>
-                <a:spcPts val="200"/>
-              </a:spcBef>
-              <a:spcAft>
-                <a:spcPts val="800"/>
-              </a:spcAft>
-            </a:pPr>
-            <a:r>
-              <a:rPr sz="1700" b="0">
-                <a:solidFill>
-                  <a:srgbClr val="2F4D5D"/>
-                </a:solidFill>
-              </a:rPr>
-              <a:t>Cross-checking MTOP designs by fine-mesh re-analysis</a:t>
-            </a:r>
-          </a:p>
-          <a:p>
-            <a:pPr lvl="1">
-              <a:spcBef>
-                <a:spcPts val="200"/>
-              </a:spcBef>
-              <a:spcAft>
-                <a:spcPts val="800"/>
-              </a:spcAft>
-            </a:pPr>
-            <a:r>
-              <a:rPr sz="1700" b="0">
-                <a:solidFill>
-                  <a:srgbClr val="2F4D5D"/>
-                </a:solidFill>
-              </a:rPr>
-              <a:t>Reproducing and understanding every number</a:t>
+              <a:t>With MMA the optimizer subproblem, not the FE solve, is the bottleneck</a:t>
             </a:r>
           </a:p>
         </p:txBody>
@@ -7665,7 +7629,7 @@
           <a:p>
             <a:r>
               <a:rPr sz="3200"/>
-              <a:t>Use of GenAI and validation</a:t>
+              <a:t>Future work and outlook</a:t>
             </a:r>
           </a:p>
         </p:txBody>

--- a/MTOP_presentation.pptx
+++ b/MTOP_presentation.pptx
@@ -26,6 +26,7 @@
     <p:sldId id="267" r:id="rId20"/>
     <p:sldId id="268" r:id="rId21"/>
     <p:sldId id="269" r:id="rId22"/>
+    <p:sldId id="270" r:id="rId23"/>
   </p:sldIdLst>
   <p:sldSz cx="12192000" cy="6858000"/>
   <p:notesSz cx="6858000" cy="9144000"/>
@@ -694,7 +695,13 @@
           <a:lstStyle/>
           <a:p>
             <a:r>
-              <a:t>PRESENTER: Lukas   |   Target ~20 s</a:t>
+              <a:t>PRESENTER: Lukas   |   Target ~25 s</a:t>
+            </a:r>
+          </a:p>
+          <a:p/>
+          <a:p>
+            <a:r>
+              <a:t>[Pacing: the whole talk targets about 12 minutes, roughly 6 minutes per presenter. Speak at a measured pace and do not rush the figures; the per-slide targets below sum to about 12 minutes.]</a:t>
             </a:r>
           </a:p>
           <a:p/>
@@ -776,17 +783,17 @@
           <a:p/>
           <a:p>
             <a:r>
-              <a:t>Step 4 swaps the optimality-criteria update for MMA, the method of moving asymptotes. MMA on its own gives a design close to the OC result, and it does not by itself fix the density-filter convergence issue from the previous slide.</a:t>
-            </a:r>
-          </a:p>
-          <a:p>
-            <a:r>
-              <a:t>The real benefit comes with Heaviside projection, which pushes the gray material towards either solid or void. On the right are the three projected designs, for thresholds 0.3, 0.5 and 0.7: all near black-and-white, all the same load path.</a:t>
-            </a:r>
-          </a:p>
-          <a:p>
-            <a:r>
-              <a:t>The projected compliance is about 17 percent below the gray density-filtered design. The three thresholds differ by less than 0.7 percent; 0.5 is marginally the best.</a:t>
+              <a:t>Step 4 swaps the optimality-criteria update for MMA, the method of moving asymptotes. MMA on its own gives a design close to the OC result, and it does not by itself fix the density-filter convergence issue.</a:t>
+            </a:r>
+          </a:p>
+          <a:p>
+            <a:r>
+              <a:t>The real benefit comes with Heaviside projection, which pushes the gray material towards either solid or void. One implementation detail: we ramp the projection sharpness, beta, gradually - doubling it every fifty iterations from one up to sixteen - so the optimizer is never hit with a sharp threshold all at once. That continuation is what keeps the projected runs stable.</a:t>
+            </a:r>
+          </a:p>
+          <a:p>
+            <a:r>
+              <a:t>On the right are the three projected designs, for thresholds 0.3, 0.5 and 0.7: all near black-and-white, all the same load path. The projected compliance is about 17 percent below the gray density-filtered design, and the three thresholds differ by less than 0.7 percent, with 0.5 marginally the best.</a:t>
             </a:r>
           </a:p>
         </p:txBody>
@@ -856,7 +863,7 @@
           <a:lstStyle/>
           <a:p>
             <a:r>
-              <a:t>PRESENTER: Tiebert   |   Target ~50 s</a:t>
+              <a:t>PRESENTER: Tiebert   |   Target ~55 s</a:t>
             </a:r>
           </a:p>
           <a:p/>
@@ -867,12 +874,12 @@
           </a:p>
           <a:p>
             <a:r>
-              <a:t>For the classical OC run, the green block - the finite element solve - is 82 percent of the time. MTOP shrinks exactly that block: the coarse solve is about 40 times faster.</a:t>
-            </a:r>
-          </a:p>
-          <a:p>
-            <a:r>
-              <a:t>What it cannot shrink is the rest - the filtering, the assembly, the optimizer - which still act on the fine density mesh. That is why the total speedup is 21 and not 40. For the MMA runs the red optimizer block dominates, so there the equilibrium solve is no longer the bottleneck.</a:t>
+              <a:t>For the classical OC run, the green block - the finite element solve - is 82 percent of the time. MTOP shrinks exactly that block. To put numbers on it: the FE solve alone drops from about 215 seconds to about 5, a 40-fold gain, but the total only goes from 263 to 12, a 21-fold gain.</a:t>
+            </a:r>
+          </a:p>
+          <a:p>
+            <a:r>
+              <a:t>The difference is the rest of the work - filtering, assembly, the optimizer update - which still acts on the full density mesh and does not shrink. For the MMA runs the red optimizer block dominates, so there the equilibrium solve is no longer the bottleneck at all.</a:t>
             </a:r>
           </a:p>
         </p:txBody>
@@ -953,12 +960,12 @@
           </a:p>
           <a:p>
             <a:r>
-              <a:t>So for this 2D beam, with a fairly large filter, even a crude model already finds the load path. The difference is that this coarse design is locked to 120-by-40 resolution and is noticeably grayer.</a:t>
-            </a:r>
-          </a:p>
-          <a:p>
-            <a:r>
-              <a:t>MTOP's real value is that it keeps the full 600-by-200 design description while only paying for the coarse solve.</a:t>
+              <a:t>So for this 2D beam, with a fairly large filter, even a crude model already finds the load path. But the comparison is not entirely fair to that coarse model: it is also grayer, with more intermediate material, so part of its apparently low compliance is just material that SIMP has not fully penalized.</a:t>
+            </a:r>
+          </a:p>
+          <a:p>
+            <a:r>
+              <a:t>MTOP's real value is that it keeps the full 600-by-200 design description, and a genuinely black-and-white one, while only paying for the coarse solve.</a:t>
             </a:r>
           </a:p>
         </p:txBody>
@@ -1028,7 +1035,7 @@
           <a:lstStyle/>
           <a:p>
             <a:r>
-              <a:t>PRESENTER: Tiebert   |   Target ~40 s</a:t>
+              <a:t>PRESENTER: Tiebert   |   Target ~50 s</a:t>
             </a:r>
           </a:p>
           <a:p/>
@@ -1039,12 +1046,12 @@
           </a:p>
           <a:p>
             <a:r>
-              <a:t>The speedup comes from the cheaper coarse equilibrium solve, and is capped by the operations that still run on the fine mesh. OC with density filtering converges only in the compliance sense. And Heaviside projection gives the lowest, near-binary compliance, best at threshold 0.5.</a:t>
-            </a:r>
-          </a:p>
-          <a:p>
-            <a:r>
-              <a:t>The chart summarizes all nine runs - cost on the left, compliance on the right.</a:t>
+              <a:t>The speedup comes from the cheaper coarse equilibrium solve, and is capped by the operations that still run on the fine mesh. OC with density filtering converges only in the compliance sense. And Heaviside projection gives the lowest, near-binary compliance, best at threshold 0.5. The chart on the right summarizes all nine runs - cost on the left, compliance on the right.</a:t>
+            </a:r>
+          </a:p>
+          <a:p>
+            <a:r>
+              <a:t>If we had to compress it to one sentence: MTOP buys the speed of a coarse analysis without giving up the resolution of a fine design.</a:t>
             </a:r>
           </a:p>
         </p:txBody>
@@ -1114,13 +1121,94 @@
           <a:lstStyle/>
           <a:p>
             <a:r>
-              <a:t>PRESENTER: Tiebert   |   Target ~30 s</a:t>
+              <a:t>PRESENTER: Tiebert   |   Target ~25 s</a:t>
             </a:r>
           </a:p>
           <a:p/>
           <a:p>
             <a:r>
-              <a:t>To close, a brief outlook. Our headline numbers are for a 2D beam, where a plain coarse model already came within 0.6 percent, so the 2D benefit was modest. MTOP pays off most where the equilibrium solve genuinely dominates the cost: in 3D, with much larger systems, and where the design has fine features a coarse model cannot resolve, so keeping the fine density description is worth it.</a:t>
+              <a:t>A brief word on GenAI. We used ChatGPT as a support tool: to language-edit text we had written ourselves, for post-processing and plotting scripts, and for one supporting theory figure, the MMA sketch.</a:t>
+            </a:r>
+          </a:p>
+          <a:p>
+            <a:r>
+              <a:t>We did not use it for the method or the results. The MTOP implementation is ours, every sensitivity was verified independently with finite differences, and every number in this talk we reproduced and understand. The full transparency table is in the report.</a:t>
+            </a:r>
+          </a:p>
+        </p:txBody>
+      </p:sp>
+      <p:sp>
+        <p:nvSpPr>
+          <p:cNvPr id="4" name="Slide Number Placeholder 3"/>
+          <p:cNvSpPr>
+            <a:spLocks noGrp="1"/>
+          </p:cNvSpPr>
+          <p:nvPr>
+            <p:ph type="sldNum" idx="5" sz="quarter"/>
+          </p:nvPr>
+        </p:nvSpPr>
+        <p:spPr/>
+      </p:sp>
+    </p:spTree>
+  </p:cSld>
+  <p:clrMapOvr>
+    <a:masterClrMapping/>
+  </p:clrMapOvr>
+</p:notes>
+</file>
+
+<file path=ppt/notesSlides/notesSlide15.xml><?xml version="1.0" encoding="utf-8"?>
+<p:notes xmlns:a="http://schemas.openxmlformats.org/drawingml/2006/main" xmlns:p="http://schemas.openxmlformats.org/presentationml/2006/main" xmlns:r="http://schemas.openxmlformats.org/officeDocument/2006/relationships">
+  <p:cSld>
+    <p:spTree>
+      <p:nvGrpSpPr>
+        <p:cNvPr id="1" name=""/>
+        <p:cNvGrpSpPr/>
+        <p:nvPr/>
+      </p:nvGrpSpPr>
+      <p:grpSpPr>
+        <a:xfrm>
+          <a:off x="0" y="0"/>
+          <a:ext cx="0" cy="0"/>
+          <a:chOff x="0" y="0"/>
+          <a:chExt cx="0" cy="0"/>
+        </a:xfrm>
+      </p:grpSpPr>
+      <p:sp>
+        <p:nvSpPr>
+          <p:cNvPr id="2" name="Slide Image Placeholder 1"/>
+          <p:cNvSpPr>
+            <a:spLocks noGrp="1"/>
+          </p:cNvSpPr>
+          <p:nvPr>
+            <p:ph type="sldImg" idx="2"/>
+          </p:nvPr>
+        </p:nvSpPr>
+        <p:spPr/>
+      </p:sp>
+      <p:sp>
+        <p:nvSpPr>
+          <p:cNvPr id="3" name="Notes Placeholder 2"/>
+          <p:cNvSpPr>
+            <a:spLocks noGrp="1"/>
+          </p:cNvSpPr>
+          <p:nvPr>
+            <p:ph type="body" idx="3" sz="quarter"/>
+          </p:nvPr>
+        </p:nvSpPr>
+        <p:spPr/>
+        <p:txBody>
+          <a:bodyPr/>
+          <a:lstStyle/>
+          <a:p>
+            <a:r>
+              <a:t>PRESENTER: Tiebert   |   Target ~40 s</a:t>
+            </a:r>
+          </a:p>
+          <a:p/>
+          <a:p>
+            <a:r>
+              <a:t>To close, a brief outlook. Our headline numbers are for a 2D beam, where a plain coarse model already came within 0.6 percent, so the 2D benefit was modest. MTOP pays off most where the equilibrium solve genuinely dominates the cost: in 3D, with much larger systems, and where the design has fine features a coarse model cannot resolve, so keeping the fine density description is worth it. In 3D in particular the speedup we measured here would only grow, since the solve is an even larger share of the cost.</a:t>
             </a:r>
           </a:p>
           <a:p>
@@ -1206,7 +1294,7 @@
           <a:p/>
           <a:p>
             <a:r>
-              <a:t>Topology optimization distributes a fixed amount of material so the structure is as stiff as possible. The cost is dominated by repeatedly solving the finite element system K u = f.</a:t>
+              <a:t>Topology optimization distributes a fixed amount of material so the structure is as stiff as possible. The cost is dominated by repeatedly solving the finite element system K u = f: every optimization iteration needs a fresh solve, and a run takes on the order of a hundred iterations, so that solve cost is paid over and over.</a:t>
             </a:r>
           </a:p>
           <a:p>
@@ -1286,7 +1374,7 @@
           <a:lstStyle/>
           <a:p>
             <a:r>
-              <a:t>PRESENTER: Lukas   |   Target ~40 s</a:t>
+              <a:t>PRESENTER: Lukas   |   Target ~45 s</a:t>
             </a:r>
           </a:p>
           <a:p/>
@@ -1297,7 +1385,7 @@
           </a:p>
           <a:p>
             <a:r>
-              <a:t>The optimization targets a volume fraction of one half, SIMP penalization three, and a cone filter of radius 24 density cells. Important: these settings are identical for every experiment, so any difference we see is due to MTOP, not the parameters.</a:t>
+              <a:t>The optimization targets a volume fraction of one half, SIMP penalization three, and a cone filter of radius 24 density cells. Important: these settings are identical for every experiment, so any difference we see is genuinely due to MTOP, not to a change of parameters. That is what makes the comparison a fair one.</a:t>
             </a:r>
           </a:p>
         </p:txBody>
@@ -1367,7 +1455,7 @@
           <a:lstStyle/>
           <a:p>
             <a:r>
-              <a:t>PRESENTER: Lukas   |   Target ~70 s</a:t>
+              <a:t>PRESENTER: Lukas   |   Target ~75 s</a:t>
             </a:r>
           </a:p>
           <a:p/>
@@ -1378,12 +1466,12 @@
           </a:p>
           <a:p>
             <a:r>
-              <a:t>In MTOP we keep the 600 by 200 design resolution, but we analyze on a coarse 120 by 40 mesh, with 5 by 5 density cells inside each finite element - that is the zoom on the right.</a:t>
-            </a:r>
-          </a:p>
-          <a:p>
-            <a:r>
-              <a:t>Each element's stiffness is integrated with one midpoint sample per density cell, so 25 small stiffness templates, which are precomputed once per run.</a:t>
+              <a:t>In MTOP we keep the 600 by 200 design resolution, but we analyze on a coarse 120 by 40 mesh, with 5 by 5 density cells inside each finite element - that is the zoom on the right. Each element's stiffness is integrated with one midpoint sample per density cell, so 25 small stiffness templates, which are precomputed once per run.</a:t>
+            </a:r>
+          </a:p>
+          <a:p>
+            <a:r>
+              <a:t>One point worth stressing: the displacement field is still only piecewise-bilinear on the coarse mesh. The fine density mesh refines how we describe the material, not how we resolve the displacements - that is the approximation MTOP makes, and it is exactly why we always re-check the final design on the fine mesh.</a:t>
             </a:r>
           </a:p>
           <a:p>
@@ -1458,7 +1546,7 @@
           <a:lstStyle/>
           <a:p>
             <a:r>
-              <a:t>PRESENTER: Lukas   |   Target ~50 s</a:t>
+              <a:t>PRESENTER: Lukas   |   Target ~55 s</a:t>
             </a:r>
           </a:p>
           <a:p/>
@@ -1469,7 +1557,12 @@
           </a:p>
           <a:p>
             <a:r>
-              <a:t>We ran the seven experiments in the table: the optimality-criteria runs for assignment steps 1 to 3, then MMA for step 4 with sensitivity filtering, density filtering, and Heaviside projection at three thresholds. Every MTOP run has a classical counterpart for comparison.</a:t>
+              <a:t>On the optimizer: OC is a simple, fast update tailored to this kind of problem; MMA is a general-purpose gradient optimizer. We need MMA in step 4 because the Heaviside projection makes the problem too non-linear for the OC heuristic.</a:t>
+            </a:r>
+          </a:p>
+          <a:p>
+            <a:r>
+              <a:t>We ran the seven experiments in the table: optimality criteria for steps 1 to 3, then MMA for step 4 with sensitivity filtering, density filtering, and Heaviside projection at three thresholds. Every MTOP run has a classical counterpart for comparison.</a:t>
             </a:r>
           </a:p>
         </p:txBody>
@@ -1539,7 +1632,7 @@
           <a:lstStyle/>
           <a:p>
             <a:r>
-              <a:t>PRESENTER: Lukas   |   Target ~40 s</a:t>
+              <a:t>PRESENTER: Lukas   |   Target ~45 s</a:t>
             </a:r>
           </a:p>
           <a:p/>
@@ -1550,7 +1643,7 @@
           </a:p>
           <a:p>
             <a:r>
-              <a:t>The strongest is the Taylor remainder test, the right-hand panel: it should decay quadratically with the step size, and the fitted slope is essentially 2.00 for all three chains, with errors down to ten to the minus six. So the analytical gradients are correct.</a:t>
+              <a:t>The strongest is the Taylor remainder test, the right-hand panel: it should decay quadratically with the step size, and the fitted slope is essentially 2.00 for all three chains, with errors down to ten to the minus six. The component-wise check also pins any indexing or chain-rule error to a single variable, which is how we caught bugs during development. So the analytical gradients are correct.</a:t>
             </a:r>
           </a:p>
         </p:txBody>
@@ -1620,7 +1713,7 @@
           <a:lstStyle/>
           <a:p>
             <a:r>
-              <a:t>PRESENTER: Lukas   |   Target ~45 s</a:t>
+              <a:t>PRESENTER: Lukas   |   Target ~50 s</a:t>
             </a:r>
           </a:p>
           <a:p/>
@@ -1631,7 +1724,7 @@
           </a:p>
           <a:p>
             <a:r>
-              <a:t>The two layouts are the same truss - a top chord, a bottom chord, a triangulated web. The difference plot is almost empty, just small boundary shifts, an RMS of three thousandths. Re-evaluated on the same fine mesh the compliances differ by 0.045 percent.</a:t>
+              <a:t>The two layouts are the same truss. Physically: a top chord in compression near the load, a bottom chord in tension near the support, and a triangulated web carrying the shear toward the support. The difference plot is almost empty, just small boundary shifts, an RMS of three thousandths. Re-evaluated on the same fine mesh the compliances differ by 0.045 percent.</a:t>
             </a:r>
           </a:p>
           <a:p>
@@ -1706,7 +1799,7 @@
           <a:lstStyle/>
           <a:p>
             <a:r>
-              <a:t>PRESENTER: Tiebert   (takes over from Lukas)   |   Target ~40 s</a:t>
+              <a:t>PRESENTER: Tiebert   (takes over from Lukas)   |   Target ~45 s</a:t>
             </a:r>
           </a:p>
           <a:p/>
@@ -1717,12 +1810,12 @@
           </a:p>
           <a:p>
             <a:r>
-              <a:t>Both runs take essentially the same number of iterations, 94 and 95, so the optimization path is unchanged. But the classical run takes 263 seconds and the MTOP run takes 12 - a factor of 21. You can see the orange curve squeezed against the time axis.</a:t>
-            </a:r>
-          </a:p>
-          <a:p>
-            <a:r>
-              <a:t>Same design, same iteration count, 21 times faster.</a:t>
+              <a:t>It is worth stressing the iteration counts, 94 and 95: MTOP is not converging differently or cutting corners, it follows the same optimization path. But the classical run takes 263 seconds and the MTOP run takes 12 - a factor of 21. You can see the orange curve squeezed against the time axis.</a:t>
+            </a:r>
+          </a:p>
+          <a:p>
+            <a:r>
+              <a:t>Same design, same iteration count, each iteration simply cheaper: 21 times faster overall.</a:t>
             </a:r>
           </a:p>
         </p:txBody>
@@ -1803,12 +1896,12 @@
           </a:p>
           <a:p>
             <a:r>
-              <a:t>But the speedup drops from 21 to about 5. The reason: the density filter adds a chain-rule convolution and a volume check that still run on the full 600 by 200 density mesh, so they do not shrink with the analysis mesh.</a:t>
-            </a:r>
-          </a:p>
-          <a:p>
-            <a:r>
-              <a:t>One more observation: with a density filter the OC update never quite meets the design-change tolerance - it oscillates at the boundary - so we stop it on a compliance plateau instead.</a:t>
+              <a:t>But the speedup drops from 21 to about 5. The density filter adds a chain-rule convolution and a volume check that still run on the full 600 by 200 density mesh, so they do not shrink with the analysis mesh.</a:t>
+            </a:r>
+          </a:p>
+          <a:p>
+            <a:r>
+              <a:t>There is also a convergence subtlety. With a density filter the OC update never quite meets the design-change tolerance. The reason: OC rescales each variable on its own, while the filter spreads every change over a neighbourhood, so the two fight at the member boundaries. The compliance settles, but the design keeps oscillating, so we stop on a compliance plateau instead.</a:t>
             </a:r>
           </a:p>
         </p:txBody>
@@ -7439,11 +7532,11 @@
         <p:spPr>
           <a:xfrm>
             <a:off x="576000" y="1410000"/>
-            <a:ext cx="5360000" cy="3500000"/>
-          </a:xfrm>
-        </p:spPr>
-        <p:txBody>
-          <a:bodyPr wrap="square" anchor="ctr"/>
+            <a:ext cx="5360000" cy="4740000"/>
+          </a:xfrm>
+        </p:spPr>
+        <p:txBody>
+          <a:bodyPr wrap="square" anchor="t"/>
           <a:lstStyle/>
           <a:p>
             <a:pPr>
@@ -7455,12 +7548,12 @@
               </a:spcAft>
             </a:pPr>
             <a:r>
-              <a:rPr sz="2000" b="1">
+              <a:rPr sz="2200" b="1">
                 <a:solidFill>
                   <a:srgbClr val="2F4D5D"/>
                 </a:solidFill>
               </a:rPr>
-              <a:t>Where MTOP pays off most</a:t>
+              <a:t>We used ChatGPT for</a:t>
             </a:r>
           </a:p>
           <a:p>
@@ -7473,12 +7566,12 @@
               </a:spcAft>
             </a:pPr>
             <a:r>
-              <a:rPr sz="1700" b="0">
+              <a:rPr sz="1900" b="0">
                 <a:solidFill>
                   <a:srgbClr val="2F4D5D"/>
                 </a:solidFill>
               </a:rPr>
-              <a:t>3D problems: the equilibrium solve dominates far more, so the speedup is larger</a:t>
+              <a:t>Language editing of text we wrote ourselves</a:t>
             </a:r>
           </a:p>
           <a:p>
@@ -7491,12 +7584,12 @@
               </a:spcAft>
             </a:pPr>
             <a:r>
-              <a:rPr sz="1700" b="0">
+              <a:rPr sz="1900" b="0">
                 <a:solidFill>
                   <a:srgbClr val="2F4D5D"/>
                 </a:solidFill>
               </a:rPr>
-              <a:t>Smaller filter radii and finer features, which a plain coarse model cannot resolve</a:t>
+              <a:t>Post-processing and plotting scripts</a:t>
             </a:r>
           </a:p>
           <a:p>
@@ -7509,12 +7602,12 @@
               </a:spcAft>
             </a:pPr>
             <a:r>
-              <a:rPr sz="1700" b="0">
+              <a:rPr sz="1900" b="0">
                 <a:solidFill>
                   <a:srgbClr val="2F4D5D"/>
                 </a:solidFill>
               </a:rPr>
-              <a:t>Cases that need the fine design description, not only the overall load path</a:t>
+              <a:t>One supporting theory figure (the MMA sketch)</a:t>
             </a:r>
           </a:p>
         </p:txBody>
@@ -7532,11 +7625,11 @@
         <p:spPr>
           <a:xfrm>
             <a:off x="6256000" y="1410000"/>
-            <a:ext cx="5360000" cy="3500000"/>
-          </a:xfrm>
-        </p:spPr>
-        <p:txBody>
-          <a:bodyPr wrap="square" anchor="ctr"/>
+            <a:ext cx="5360000" cy="4740000"/>
+          </a:xfrm>
+        </p:spPr>
+        <p:txBody>
+          <a:bodyPr wrap="square" anchor="t"/>
           <a:lstStyle/>
           <a:p>
             <a:pPr>
@@ -7548,12 +7641,12 @@
               </a:spcAft>
             </a:pPr>
             <a:r>
-              <a:rPr sz="2000" b="1">
+              <a:rPr sz="2200" b="1">
                 <a:solidFill>
                   <a:srgbClr val="2F4D5D"/>
                 </a:solidFill>
               </a:rPr>
-              <a:t>Open issues and limitations</a:t>
+              <a:t>We kept the work in our control</a:t>
             </a:r>
           </a:p>
           <a:p>
@@ -7566,12 +7659,12 @@
               </a:spcAft>
             </a:pPr>
             <a:r>
-              <a:rPr sz="1700" b="0">
+              <a:rPr sz="1900" b="0">
                 <a:solidFill>
                   <a:srgbClr val="2F4D5D"/>
                 </a:solidFill>
               </a:rPr>
-              <a:t>Density filtering needs a convergence criterion beyond the design-change tolerance</a:t>
+              <a:t>MTOP method and MATLAB solver implemented by us</a:t>
             </a:r>
           </a:p>
           <a:p>
@@ -7584,12 +7677,12 @@
               </a:spcAft>
             </a:pPr>
             <a:r>
-              <a:rPr sz="1700" b="0">
+              <a:rPr sz="1900" b="0">
                 <a:solidFill>
                   <a:srgbClr val="2F4D5D"/>
                 </a:solidFill>
               </a:rPr>
-              <a:t>Filtering, assembly and the optimizer still scale with the fine mesh and cap the speedup</a:t>
+              <a:t>All sensitivities verified with finite differences</a:t>
             </a:r>
           </a:p>
           <a:p>
@@ -7602,12 +7695,12 @@
               </a:spcAft>
             </a:pPr>
             <a:r>
-              <a:rPr sz="1700" b="0">
+              <a:rPr sz="1900" b="0">
                 <a:solidFill>
                   <a:srgbClr val="2F4D5D"/>
                 </a:solidFill>
               </a:rPr>
-              <a:t>With MMA the optimizer subproblem, not the FE solve, is the bottleneck</a:t>
+              <a:t>Every result reproduced and understood ourselves</a:t>
             </a:r>
           </a:p>
         </p:txBody>
@@ -7629,7 +7722,7 @@
           <a:p>
             <a:r>
               <a:rPr sz="3200"/>
-              <a:t>Future work and outlook</a:t>
+              <a:t>Use of GenAI</a:t>
             </a:r>
           </a:p>
         </p:txBody>
@@ -7642,8 +7735,8 @@
         </p:nvSpPr>
         <p:spPr>
           <a:xfrm>
-            <a:off x="576000" y="5110000"/>
-            <a:ext cx="11040000" cy="680000"/>
+            <a:off x="6033600" y="6210000"/>
+            <a:ext cx="4993200" cy="648000"/>
           </a:xfrm>
           <a:prstGeom prst="rect">
             <a:avLst/>
@@ -7656,14 +7749,14 @@
           </a:bodyPr>
           <a:lstStyle/>
           <a:p>
-            <a:pPr algn="ctr"/>
-            <a:r>
-              <a:rPr sz="2600" b="1">
-                <a:solidFill>
-                  <a:srgbClr val="1D8DB0"/>
+            <a:pPr algn="r"/>
+            <a:r>
+              <a:rPr sz="1000" b="0">
+                <a:solidFill>
+                  <a:srgbClr val="FFFFFF"/>
                 </a:solidFill>
               </a:rPr>
-              <a:t>Thank you for your attention. Questions?</a:t>
+              <a:t>Structural Optimization (B-KUL-H0T88A)</a:t>
             </a:r>
           </a:p>
         </p:txBody>
@@ -7676,8 +7769,8 @@
         </p:nvSpPr>
         <p:spPr>
           <a:xfrm>
-            <a:off x="6033600" y="6210000"/>
-            <a:ext cx="4993200" cy="648000"/>
+            <a:off x="576000" y="6210000"/>
+            <a:ext cx="648000" cy="648000"/>
           </a:xfrm>
           <a:prstGeom prst="rect">
             <a:avLst/>
@@ -7690,28 +7783,254 @@
           </a:bodyPr>
           <a:lstStyle/>
           <a:p>
-            <a:pPr algn="r"/>
+            <a:pPr algn="l"/>
             <a:r>
               <a:rPr sz="1000" b="0">
                 <a:solidFill>
                   <a:srgbClr val="FFFFFF"/>
                 </a:solidFill>
               </a:rPr>
-              <a:t>Structural Optimization (B-KUL-H0T88A)</a:t>
-            </a:r>
-          </a:p>
-        </p:txBody>
-      </p:sp>
-      <p:sp>
-        <p:nvSpPr>
-          <p:cNvPr id="7" name="TextBox 6"/>
+              <a:t>14</a:t>
+            </a:r>
+          </a:p>
+        </p:txBody>
+      </p:sp>
+    </p:spTree>
+  </p:cSld>
+  <p:clrMapOvr>
+    <a:masterClrMapping/>
+  </p:clrMapOvr>
+</p:sld>
+</file>
+
+<file path=ppt/slides/slide15.xml><?xml version="1.0" encoding="utf-8"?>
+<p:sld xmlns:a="http://schemas.openxmlformats.org/drawingml/2006/main" xmlns:p="http://schemas.openxmlformats.org/presentationml/2006/main" xmlns:r="http://schemas.openxmlformats.org/officeDocument/2006/relationships">
+  <p:cSld>
+    <p:spTree>
+      <p:nvGrpSpPr>
+        <p:cNvPr id="1" name=""/>
+        <p:cNvGrpSpPr/>
+        <p:nvPr/>
+      </p:nvGrpSpPr>
+      <p:grpSpPr/>
+      <p:sp>
+        <p:nvSpPr>
+          <p:cNvPr id="2" name="Content Placeholder 1"/>
+          <p:cNvSpPr>
+            <a:spLocks noGrp="1"/>
+          </p:cNvSpPr>
+          <p:nvPr>
+            <p:ph idx="1"/>
+          </p:nvPr>
+        </p:nvSpPr>
+        <p:spPr>
+          <a:xfrm>
+            <a:off x="576000" y="1410000"/>
+            <a:ext cx="5360000" cy="3500000"/>
+          </a:xfrm>
+        </p:spPr>
+        <p:txBody>
+          <a:bodyPr wrap="square" anchor="t"/>
+          <a:lstStyle/>
+          <a:p>
+            <a:pPr>
+              <a:spcBef>
+                <a:spcPts val="200"/>
+              </a:spcBef>
+              <a:spcAft>
+                <a:spcPts val="800"/>
+              </a:spcAft>
+            </a:pPr>
+            <a:r>
+              <a:rPr sz="2000" b="1">
+                <a:solidFill>
+                  <a:srgbClr val="2F4D5D"/>
+                </a:solidFill>
+              </a:rPr>
+              <a:t>Where MTOP pays off most</a:t>
+            </a:r>
+          </a:p>
+          <a:p>
+            <a:pPr lvl="1">
+              <a:spcBef>
+                <a:spcPts val="200"/>
+              </a:spcBef>
+              <a:spcAft>
+                <a:spcPts val="800"/>
+              </a:spcAft>
+            </a:pPr>
+            <a:r>
+              <a:rPr sz="1700" b="0">
+                <a:solidFill>
+                  <a:srgbClr val="2F4D5D"/>
+                </a:solidFill>
+              </a:rPr>
+              <a:t>3D problems: the equilibrium solve dominates far more, so the speedup is larger</a:t>
+            </a:r>
+          </a:p>
+          <a:p>
+            <a:pPr lvl="1">
+              <a:spcBef>
+                <a:spcPts val="200"/>
+              </a:spcBef>
+              <a:spcAft>
+                <a:spcPts val="800"/>
+              </a:spcAft>
+            </a:pPr>
+            <a:r>
+              <a:rPr sz="1700" b="0">
+                <a:solidFill>
+                  <a:srgbClr val="2F4D5D"/>
+                </a:solidFill>
+              </a:rPr>
+              <a:t>Smaller filter radii and finer features, which a plain coarse model cannot resolve</a:t>
+            </a:r>
+          </a:p>
+          <a:p>
+            <a:pPr lvl="1">
+              <a:spcBef>
+                <a:spcPts val="200"/>
+              </a:spcBef>
+              <a:spcAft>
+                <a:spcPts val="800"/>
+              </a:spcAft>
+            </a:pPr>
+            <a:r>
+              <a:rPr sz="1700" b="0">
+                <a:solidFill>
+                  <a:srgbClr val="2F4D5D"/>
+                </a:solidFill>
+              </a:rPr>
+              <a:t>Cases that need the fine design description, not only the overall load path</a:t>
+            </a:r>
+          </a:p>
+        </p:txBody>
+      </p:sp>
+      <p:sp>
+        <p:nvSpPr>
+          <p:cNvPr id="3" name="Content Placeholder 2"/>
+          <p:cNvSpPr>
+            <a:spLocks noGrp="1"/>
+          </p:cNvSpPr>
+          <p:nvPr>
+            <p:ph idx="13" sz="quarter"/>
+          </p:nvPr>
+        </p:nvSpPr>
+        <p:spPr>
+          <a:xfrm>
+            <a:off x="6256000" y="1410000"/>
+            <a:ext cx="5360000" cy="3500000"/>
+          </a:xfrm>
+        </p:spPr>
+        <p:txBody>
+          <a:bodyPr wrap="square" anchor="t"/>
+          <a:lstStyle/>
+          <a:p>
+            <a:pPr>
+              <a:spcBef>
+                <a:spcPts val="200"/>
+              </a:spcBef>
+              <a:spcAft>
+                <a:spcPts val="800"/>
+              </a:spcAft>
+            </a:pPr>
+            <a:r>
+              <a:rPr sz="2000" b="1">
+                <a:solidFill>
+                  <a:srgbClr val="2F4D5D"/>
+                </a:solidFill>
+              </a:rPr>
+              <a:t>Open issues and limitations</a:t>
+            </a:r>
+          </a:p>
+          <a:p>
+            <a:pPr lvl="1">
+              <a:spcBef>
+                <a:spcPts val="200"/>
+              </a:spcBef>
+              <a:spcAft>
+                <a:spcPts val="800"/>
+              </a:spcAft>
+            </a:pPr>
+            <a:r>
+              <a:rPr sz="1700" b="0">
+                <a:solidFill>
+                  <a:srgbClr val="2F4D5D"/>
+                </a:solidFill>
+              </a:rPr>
+              <a:t>Density filtering needs a convergence criterion beyond the design-change tolerance</a:t>
+            </a:r>
+          </a:p>
+          <a:p>
+            <a:pPr lvl="1">
+              <a:spcBef>
+                <a:spcPts val="200"/>
+              </a:spcBef>
+              <a:spcAft>
+                <a:spcPts val="800"/>
+              </a:spcAft>
+            </a:pPr>
+            <a:r>
+              <a:rPr sz="1700" b="0">
+                <a:solidFill>
+                  <a:srgbClr val="2F4D5D"/>
+                </a:solidFill>
+              </a:rPr>
+              <a:t>Filtering, assembly and the optimizer still scale with the fine mesh and cap the speedup</a:t>
+            </a:r>
+          </a:p>
+          <a:p>
+            <a:pPr lvl="1">
+              <a:spcBef>
+                <a:spcPts val="200"/>
+              </a:spcBef>
+              <a:spcAft>
+                <a:spcPts val="800"/>
+              </a:spcAft>
+            </a:pPr>
+            <a:r>
+              <a:rPr sz="1700" b="0">
+                <a:solidFill>
+                  <a:srgbClr val="2F4D5D"/>
+                </a:solidFill>
+              </a:rPr>
+              <a:t>With MMA the optimizer subproblem, not the FE solve, is the bottleneck</a:t>
+            </a:r>
+          </a:p>
+        </p:txBody>
+      </p:sp>
+      <p:sp>
+        <p:nvSpPr>
+          <p:cNvPr id="4" name="Title 3"/>
+          <p:cNvSpPr>
+            <a:spLocks noGrp="1"/>
+          </p:cNvSpPr>
+          <p:nvPr>
+            <p:ph type="title"/>
+          </p:nvPr>
+        </p:nvSpPr>
+        <p:spPr/>
+        <p:txBody>
+          <a:bodyPr/>
+          <a:lstStyle/>
+          <a:p>
+            <a:r>
+              <a:rPr sz="3200"/>
+              <a:t>Future work and outlook</a:t>
+            </a:r>
+          </a:p>
+        </p:txBody>
+      </p:sp>
+      <p:sp>
+        <p:nvSpPr>
+          <p:cNvPr id="5" name="TextBox 4"/>
           <p:cNvSpPr txBox="1"/>
           <p:nvPr/>
         </p:nvSpPr>
         <p:spPr>
           <a:xfrm>
-            <a:off x="576000" y="6210000"/>
-            <a:ext cx="648000" cy="648000"/>
+            <a:off x="576000" y="5110000"/>
+            <a:ext cx="11040000" cy="680000"/>
           </a:xfrm>
           <a:prstGeom prst="rect">
             <a:avLst/>
@@ -7724,6 +8043,74 @@
           </a:bodyPr>
           <a:lstStyle/>
           <a:p>
+            <a:pPr algn="ctr"/>
+            <a:r>
+              <a:rPr sz="2600" b="1">
+                <a:solidFill>
+                  <a:srgbClr val="1D8DB0"/>
+                </a:solidFill>
+              </a:rPr>
+              <a:t>Thank you for your attention. Questions?</a:t>
+            </a:r>
+          </a:p>
+        </p:txBody>
+      </p:sp>
+      <p:sp>
+        <p:nvSpPr>
+          <p:cNvPr id="6" name="TextBox 5"/>
+          <p:cNvSpPr txBox="1"/>
+          <p:nvPr/>
+        </p:nvSpPr>
+        <p:spPr>
+          <a:xfrm>
+            <a:off x="6033600" y="6210000"/>
+            <a:ext cx="4993200" cy="648000"/>
+          </a:xfrm>
+          <a:prstGeom prst="rect">
+            <a:avLst/>
+          </a:prstGeom>
+          <a:noFill/>
+        </p:spPr>
+        <p:txBody>
+          <a:bodyPr wrap="square" anchor="ctr" lIns="36000" rIns="36000" tIns="18000" bIns="18000">
+            <a:spAutoFit/>
+          </a:bodyPr>
+          <a:lstStyle/>
+          <a:p>
+            <a:pPr algn="r"/>
+            <a:r>
+              <a:rPr sz="1000" b="0">
+                <a:solidFill>
+                  <a:srgbClr val="FFFFFF"/>
+                </a:solidFill>
+              </a:rPr>
+              <a:t>Structural Optimization (B-KUL-H0T88A)</a:t>
+            </a:r>
+          </a:p>
+        </p:txBody>
+      </p:sp>
+      <p:sp>
+        <p:nvSpPr>
+          <p:cNvPr id="7" name="TextBox 6"/>
+          <p:cNvSpPr txBox="1"/>
+          <p:nvPr/>
+        </p:nvSpPr>
+        <p:spPr>
+          <a:xfrm>
+            <a:off x="576000" y="6210000"/>
+            <a:ext cx="648000" cy="648000"/>
+          </a:xfrm>
+          <a:prstGeom prst="rect">
+            <a:avLst/>
+          </a:prstGeom>
+          <a:noFill/>
+        </p:spPr>
+        <p:txBody>
+          <a:bodyPr wrap="square" anchor="ctr" lIns="36000" rIns="36000" tIns="18000" bIns="18000">
+            <a:spAutoFit/>
+          </a:bodyPr>
+          <a:lstStyle/>
+          <a:p>
             <a:pPr algn="l"/>
             <a:r>
               <a:rPr sz="1000" b="0">
@@ -7731,7 +8118,7 @@
                   <a:srgbClr val="FFFFFF"/>
                 </a:solidFill>
               </a:rPr>
-              <a:t>14</a:t>
+              <a:t>15</a:t>
             </a:r>
           </a:p>
         </p:txBody>

--- a/MTOP_presentation.pptx
+++ b/MTOP_presentation.pptx
@@ -6,27 +6,35 @@
     <p:sldMasterId id="2147483694" r:id="rId2"/>
   </p:sldMasterIdLst>
   <p:notesMasterIdLst>
-    <p:notesMasterId r:id="rId7"/>
+    <p:notesMasterId r:id="rId26"/>
   </p:notesMasterIdLst>
   <p:handoutMasterIdLst>
-    <p:handoutMasterId r:id="rId8"/>
+    <p:handoutMasterId r:id="rId27"/>
   </p:handoutMasterIdLst>
   <p:sldIdLst>
-    <p:sldId id="256" r:id="rId6"/>
-    <p:sldId id="257" r:id="rId5"/>
-    <p:sldId id="258" r:id="rId4"/>
-    <p:sldId id="259" r:id="rId3"/>
-    <p:sldId id="260" r:id="rId13"/>
-    <p:sldId id="261" r:id="rId14"/>
-    <p:sldId id="262" r:id="rId15"/>
-    <p:sldId id="263" r:id="rId16"/>
-    <p:sldId id="264" r:id="rId17"/>
-    <p:sldId id="265" r:id="rId18"/>
-    <p:sldId id="266" r:id="rId19"/>
-    <p:sldId id="267" r:id="rId20"/>
-    <p:sldId id="268" r:id="rId21"/>
-    <p:sldId id="269" r:id="rId22"/>
-    <p:sldId id="270" r:id="rId23"/>
+    <p:sldId id="256" r:id="rId3"/>
+    <p:sldId id="257" r:id="rId4"/>
+    <p:sldId id="258" r:id="rId5"/>
+    <p:sldId id="259" r:id="rId6"/>
+    <p:sldId id="260" r:id="rId7"/>
+    <p:sldId id="261" r:id="rId8"/>
+    <p:sldId id="262" r:id="rId9"/>
+    <p:sldId id="263" r:id="rId10"/>
+    <p:sldId id="264" r:id="rId11"/>
+    <p:sldId id="265" r:id="rId12"/>
+    <p:sldId id="266" r:id="rId13"/>
+    <p:sldId id="267" r:id="rId14"/>
+    <p:sldId id="268" r:id="rId15"/>
+    <p:sldId id="269" r:id="rId16"/>
+    <p:sldId id="270" r:id="rId17"/>
+    <p:sldId id="271" r:id="rId18"/>
+    <p:sldId id="272" r:id="rId19"/>
+    <p:sldId id="273" r:id="rId20"/>
+    <p:sldId id="274" r:id="rId21"/>
+    <p:sldId id="275" r:id="rId22"/>
+    <p:sldId id="276" r:id="rId23"/>
+    <p:sldId id="277" r:id="rId24"/>
+    <p:sldId id="278" r:id="rId25"/>
   </p:sldIdLst>
   <p:sldSz cx="12192000" cy="6858000"/>
   <p:notesSz cx="6858000" cy="9144000"/>
@@ -218,7 +226,7 @@
           <a:p>
             <a:fld id="{8F591CCF-F6FD-734B-854A-5BC033593B1E}" type="datetimeFigureOut">
               <a:rPr lang="nl-NL" smtClean="0"/>
-              <a:t>29-11-2024</a:t>
+              <a:t>20-5-2026</a:t>
             </a:fld>
             <a:endParaRPr lang="nl-NL"/>
           </a:p>
@@ -284,7 +292,7 @@
           <a:p>
             <a:fld id="{E152A6D4-CD3D-5148-8B70-A84796F20135}" type="slidenum">
               <a:rPr lang="nl-NL" smtClean="0"/>
-              <a:t>‹nr.›</a:t>
+              <a:t>‹#›</a:t>
             </a:fld>
             <a:endParaRPr lang="nl-NL"/>
           </a:p>
@@ -383,7 +391,7 @@
           <a:p>
             <a:fld id="{23C66214-DB21-4647-B5DA-0D17CA592867}" type="datetimeFigureOut">
               <a:rPr lang="nl-NL" smtClean="0"/>
-              <a:t>29-11-2024</a:t>
+              <a:t>20-5-2026</a:t>
             </a:fld>
             <a:endParaRPr lang="nl-NL"/>
           </a:p>
@@ -541,7 +549,7 @@
           <a:p>
             <a:fld id="{8954E32A-327F-AF4B-8E1F-209FBF93D26D}" type="slidenum">
               <a:rPr lang="nl-NL" smtClean="0"/>
-              <a:t>‹nr.›</a:t>
+              <a:t>‹#›</a:t>
             </a:fld>
             <a:endParaRPr lang="nl-NL"/>
           </a:p>
@@ -651,7 +659,7 @@
 </file>
 
 <file path=ppt/notesSlides/notesSlide1.xml><?xml version="1.0" encoding="utf-8"?>
-<p:notes xmlns:a="http://schemas.openxmlformats.org/drawingml/2006/main" xmlns:p="http://schemas.openxmlformats.org/presentationml/2006/main" xmlns:r="http://schemas.openxmlformats.org/officeDocument/2006/relationships">
+<p:notes xmlns:a="http://schemas.openxmlformats.org/drawingml/2006/main" xmlns:r="http://schemas.openxmlformats.org/officeDocument/2006/relationships" xmlns:p="http://schemas.openxmlformats.org/presentationml/2006/main">
   <p:cSld>
     <p:spTree>
       <p:nvGrpSpPr>
@@ -671,55 +679,59 @@
         <p:nvSpPr>
           <p:cNvPr id="2" name="Slide Image Placeholder 1"/>
           <p:cNvSpPr>
+            <a:spLocks noGrp="1" noRot="1" noChangeAspect="1"/>
+          </p:cNvSpPr>
+          <p:nvPr>
+            <p:ph type="sldImg" idx="2"/>
+          </p:nvPr>
+        </p:nvSpPr>
+        <p:spPr/>
+      </p:sp>
+      <p:sp>
+        <p:nvSpPr>
+          <p:cNvPr id="3" name="Notes Placeholder 2"/>
+          <p:cNvSpPr>
             <a:spLocks noGrp="1"/>
           </p:cNvSpPr>
           <p:nvPr>
-            <p:ph type="sldImg" idx="2"/>
+            <p:ph type="body" sz="quarter" idx="3"/>
           </p:nvPr>
         </p:nvSpPr>
         <p:spPr/>
-      </p:sp>
-      <p:sp>
-        <p:nvSpPr>
-          <p:cNvPr id="3" name="Notes Placeholder 2"/>
+        <p:txBody>
+          <a:bodyPr/>
+          <a:lstStyle/>
+          <a:p>
+            <a:r>
+              <a:t>PRESENTER: Lukas   |   Target ~25 s</a:t>
+            </a:r>
+          </a:p>
+          <a:p>
+            <a:endParaRPr/>
+          </a:p>
+          <a:p>
+            <a:r>
+              <a:t>[Pacing: the whole talk targets about 12 minutes, roughly 6 minutes per presenter. Speak at a measured pace and do not rush the figures; the per-slide targets below sum to about 12 minutes.]</a:t>
+            </a:r>
+          </a:p>
+          <a:p>
+            <a:endParaRPr/>
+          </a:p>
+          <a:p>
+            <a:r>
+              <a:t>Greeting. Our examination assignment is on multiresolution topology optimization, MTOP. In topology optimization the question is where to put material to make a structure as stiff as possible; here the question is whether we can answer that question faster. We assessed MTOP on the half MBB beam and compared it head-to-head with the classical approach. The image is our optimized beam.</a:t>
+            </a:r>
+          </a:p>
+        </p:txBody>
+      </p:sp>
+      <p:sp>
+        <p:nvSpPr>
+          <p:cNvPr id="4" name="Slide Number Placeholder 3"/>
           <p:cNvSpPr>
             <a:spLocks noGrp="1"/>
           </p:cNvSpPr>
           <p:nvPr>
-            <p:ph type="body" idx="3" sz="quarter"/>
-          </p:nvPr>
-        </p:nvSpPr>
-        <p:spPr/>
-        <p:txBody>
-          <a:bodyPr/>
-          <a:lstStyle/>
-          <a:p>
-            <a:r>
-              <a:t>PRESENTER: Lukas   |   Target ~25 s</a:t>
-            </a:r>
-          </a:p>
-          <a:p/>
-          <a:p>
-            <a:r>
-              <a:t>[Pacing: the whole talk targets about 12 minutes, roughly 6 minutes per presenter. Speak at a measured pace and do not rush the figures; the per-slide targets below sum to about 12 minutes.]</a:t>
-            </a:r>
-          </a:p>
-          <a:p/>
-          <a:p>
-            <a:r>
-              <a:t>Greeting. Our examination assignment is on multiresolution topology optimization, MTOP. In topology optimization the question is where to put material to make a structure as stiff as possible; here the question is whether we can answer that question faster. We assessed MTOP on the half MBB beam and compared it head-to-head with the classical approach. The image is our optimized beam.</a:t>
-            </a:r>
-          </a:p>
-        </p:txBody>
-      </p:sp>
-      <p:sp>
-        <p:nvSpPr>
-          <p:cNvPr id="4" name="Slide Number Placeholder 3"/>
-          <p:cNvSpPr>
-            <a:spLocks noGrp="1"/>
-          </p:cNvSpPr>
-          <p:nvPr>
-            <p:ph type="sldNum" idx="5" sz="quarter"/>
+            <p:ph type="sldNum" sz="quarter" idx="5"/>
           </p:nvPr>
         </p:nvSpPr>
         <p:spPr/>
@@ -733,7 +745,7 @@
 </file>
 
 <file path=ppt/notesSlides/notesSlide10.xml><?xml version="1.0" encoding="utf-8"?>
-<p:notes xmlns:a="http://schemas.openxmlformats.org/drawingml/2006/main" xmlns:p="http://schemas.openxmlformats.org/presentationml/2006/main" xmlns:r="http://schemas.openxmlformats.org/officeDocument/2006/relationships">
+<p:notes xmlns:a="http://schemas.openxmlformats.org/drawingml/2006/main" xmlns:r="http://schemas.openxmlformats.org/officeDocument/2006/relationships" xmlns:p="http://schemas.openxmlformats.org/presentationml/2006/main">
   <p:cSld>
     <p:spTree>
       <p:nvGrpSpPr>
@@ -753,59 +765,61 @@
         <p:nvSpPr>
           <p:cNvPr id="2" name="Slide Image Placeholder 1"/>
           <p:cNvSpPr>
+            <a:spLocks noGrp="1" noRot="1" noChangeAspect="1"/>
+          </p:cNvSpPr>
+          <p:nvPr>
+            <p:ph type="sldImg" idx="2"/>
+          </p:nvPr>
+        </p:nvSpPr>
+        <p:spPr/>
+      </p:sp>
+      <p:sp>
+        <p:nvSpPr>
+          <p:cNvPr id="3" name="Notes Placeholder 2"/>
+          <p:cNvSpPr>
             <a:spLocks noGrp="1"/>
           </p:cNvSpPr>
           <p:nvPr>
-            <p:ph type="sldImg" idx="2"/>
+            <p:ph type="body" sz="quarter" idx="3"/>
           </p:nvPr>
         </p:nvSpPr>
         <p:spPr/>
-      </p:sp>
-      <p:sp>
-        <p:nvSpPr>
-          <p:cNvPr id="3" name="Notes Placeholder 2"/>
+        <p:txBody>
+          <a:bodyPr/>
+          <a:lstStyle/>
+          <a:p>
+            <a:r>
+              <a:t>PRESENTER: Tiebert   |   Target ~65 s</a:t>
+            </a:r>
+          </a:p>
+          <a:p>
+            <a:endParaRPr/>
+          </a:p>
+          <a:p>
+            <a:r>
+              <a:t>Step 4 swaps the optimality-criteria update for MMA, the method of moving asymptotes. MMA on its own gives a design close to the OC result, and it does not by itself fix the density-filter convergence issue.</a:t>
+            </a:r>
+          </a:p>
+          <a:p>
+            <a:r>
+              <a:t>The real benefit comes with Heaviside projection, which pushes the gray material towards either solid or void. One implementation detail: we ramp the projection sharpness, beta, gradually - doubling it every fifty iterations from one up to sixteen - so the optimizer is never hit with a sharp threshold all at once. That continuation is what keeps the projected runs stable.</a:t>
+            </a:r>
+          </a:p>
+          <a:p>
+            <a:r>
+              <a:t>On the right are the three projected designs, for thresholds 0.3, 0.5 and 0.7: all near black-and-white, all the same load path. The projected compliance is about 17 percent below the gray density-filtered design, and the three thresholds differ by less than 0.7 percent, with 0.5 marginally the best.</a:t>
+            </a:r>
+          </a:p>
+        </p:txBody>
+      </p:sp>
+      <p:sp>
+        <p:nvSpPr>
+          <p:cNvPr id="4" name="Slide Number Placeholder 3"/>
           <p:cNvSpPr>
             <a:spLocks noGrp="1"/>
           </p:cNvSpPr>
           <p:nvPr>
-            <p:ph type="body" idx="3" sz="quarter"/>
-          </p:nvPr>
-        </p:nvSpPr>
-        <p:spPr/>
-        <p:txBody>
-          <a:bodyPr/>
-          <a:lstStyle/>
-          <a:p>
-            <a:r>
-              <a:t>PRESENTER: Tiebert   |   Target ~65 s</a:t>
-            </a:r>
-          </a:p>
-          <a:p/>
-          <a:p>
-            <a:r>
-              <a:t>Step 4 swaps the optimality-criteria update for MMA, the method of moving asymptotes. MMA on its own gives a design close to the OC result, and it does not by itself fix the density-filter convergence issue.</a:t>
-            </a:r>
-          </a:p>
-          <a:p>
-            <a:r>
-              <a:t>The real benefit comes with Heaviside projection, which pushes the gray material towards either solid or void. One implementation detail: we ramp the projection sharpness, beta, gradually - doubling it every fifty iterations from one up to sixteen - so the optimizer is never hit with a sharp threshold all at once. That continuation is what keeps the projected runs stable.</a:t>
-            </a:r>
-          </a:p>
-          <a:p>
-            <a:r>
-              <a:t>On the right are the three projected designs, for thresholds 0.3, 0.5 and 0.7: all near black-and-white, all the same load path. The projected compliance is about 17 percent below the gray density-filtered design, and the three thresholds differ by less than 0.7 percent, with 0.5 marginally the best.</a:t>
-            </a:r>
-          </a:p>
-        </p:txBody>
-      </p:sp>
-      <p:sp>
-        <p:nvSpPr>
-          <p:cNvPr id="4" name="Slide Number Placeholder 3"/>
-          <p:cNvSpPr>
-            <a:spLocks noGrp="1"/>
-          </p:cNvSpPr>
-          <p:nvPr>
-            <p:ph type="sldNum" idx="5" sz="quarter"/>
+            <p:ph type="sldNum" sz="quarter" idx="5"/>
           </p:nvPr>
         </p:nvSpPr>
         <p:spPr/>
@@ -819,7 +833,7 @@
 </file>
 
 <file path=ppt/notesSlides/notesSlide11.xml><?xml version="1.0" encoding="utf-8"?>
-<p:notes xmlns:a="http://schemas.openxmlformats.org/drawingml/2006/main" xmlns:p="http://schemas.openxmlformats.org/presentationml/2006/main" xmlns:r="http://schemas.openxmlformats.org/officeDocument/2006/relationships">
+<p:notes xmlns:a="http://schemas.openxmlformats.org/drawingml/2006/main" xmlns:r="http://schemas.openxmlformats.org/officeDocument/2006/relationships" xmlns:p="http://schemas.openxmlformats.org/presentationml/2006/main">
   <p:cSld>
     <p:spTree>
       <p:nvGrpSpPr>
@@ -839,59 +853,61 @@
         <p:nvSpPr>
           <p:cNvPr id="2" name="Slide Image Placeholder 1"/>
           <p:cNvSpPr>
+            <a:spLocks noGrp="1" noRot="1" noChangeAspect="1"/>
+          </p:cNvSpPr>
+          <p:nvPr>
+            <p:ph type="sldImg" idx="2"/>
+          </p:nvPr>
+        </p:nvSpPr>
+        <p:spPr/>
+      </p:sp>
+      <p:sp>
+        <p:nvSpPr>
+          <p:cNvPr id="3" name="Notes Placeholder 2"/>
+          <p:cNvSpPr>
             <a:spLocks noGrp="1"/>
           </p:cNvSpPr>
           <p:nvPr>
-            <p:ph type="sldImg" idx="2"/>
+            <p:ph type="body" sz="quarter" idx="3"/>
           </p:nvPr>
         </p:nvSpPr>
         <p:spPr/>
-      </p:sp>
-      <p:sp>
-        <p:nvSpPr>
-          <p:cNvPr id="3" name="Notes Placeholder 2"/>
+        <p:txBody>
+          <a:bodyPr/>
+          <a:lstStyle/>
+          <a:p>
+            <a:r>
+              <a:t>PRESENTER: Tiebert   |   Target ~55 s</a:t>
+            </a:r>
+          </a:p>
+          <a:p>
+            <a:endParaRPr/>
+          </a:p>
+          <a:p>
+            <a:r>
+              <a:t>So where does the speedup actually come from? This chart breaks each run into algorithmic phases.</a:t>
+            </a:r>
+          </a:p>
+          <a:p>
+            <a:r>
+              <a:t>For the classical OC run, the green block - the finite element solve - is 82 percent of the time. MTOP shrinks exactly that block. To put numbers on it: the FE solve alone drops from about 215 seconds to about 5, a 40-fold gain, but the total only goes from 263 to 12, a 21-fold gain.</a:t>
+            </a:r>
+          </a:p>
+          <a:p>
+            <a:r>
+              <a:t>The difference is the rest of the work - filtering, assembly, the optimizer update - which still acts on the full density mesh and does not shrink. For the MMA runs the red optimizer block dominates, so there the equilibrium solve is no longer the bottleneck at all.</a:t>
+            </a:r>
+          </a:p>
+        </p:txBody>
+      </p:sp>
+      <p:sp>
+        <p:nvSpPr>
+          <p:cNvPr id="4" name="Slide Number Placeholder 3"/>
           <p:cNvSpPr>
             <a:spLocks noGrp="1"/>
           </p:cNvSpPr>
           <p:nvPr>
-            <p:ph type="body" idx="3" sz="quarter"/>
-          </p:nvPr>
-        </p:nvSpPr>
-        <p:spPr/>
-        <p:txBody>
-          <a:bodyPr/>
-          <a:lstStyle/>
-          <a:p>
-            <a:r>
-              <a:t>PRESENTER: Tiebert   |   Target ~55 s</a:t>
-            </a:r>
-          </a:p>
-          <a:p/>
-          <a:p>
-            <a:r>
-              <a:t>So where does the speedup actually come from? This chart breaks each run into algorithmic phases.</a:t>
-            </a:r>
-          </a:p>
-          <a:p>
-            <a:r>
-              <a:t>For the classical OC run, the green block - the finite element solve - is 82 percent of the time. MTOP shrinks exactly that block. To put numbers on it: the FE solve alone drops from about 215 seconds to about 5, a 40-fold gain, but the total only goes from 263 to 12, a 21-fold gain.</a:t>
-            </a:r>
-          </a:p>
-          <a:p>
-            <a:r>
-              <a:t>The difference is the rest of the work - filtering, assembly, the optimizer update - which still acts on the full density mesh and does not shrink. For the MMA runs the red optimizer block dominates, so there the equilibrium solve is no longer the bottleneck at all.</a:t>
-            </a:r>
-          </a:p>
-        </p:txBody>
-      </p:sp>
-      <p:sp>
-        <p:nvSpPr>
-          <p:cNvPr id="4" name="Slide Number Placeholder 3"/>
-          <p:cNvSpPr>
-            <a:spLocks noGrp="1"/>
-          </p:cNvSpPr>
-          <p:nvPr>
-            <p:ph type="sldNum" idx="5" sz="quarter"/>
+            <p:ph type="sldNum" sz="quarter" idx="5"/>
           </p:nvPr>
         </p:nvSpPr>
         <p:spPr/>
@@ -905,7 +921,7 @@
 </file>
 
 <file path=ppt/notesSlides/notesSlide12.xml><?xml version="1.0" encoding="utf-8"?>
-<p:notes xmlns:a="http://schemas.openxmlformats.org/drawingml/2006/main" xmlns:p="http://schemas.openxmlformats.org/presentationml/2006/main" xmlns:r="http://schemas.openxmlformats.org/officeDocument/2006/relationships">
+<p:notes xmlns:a="http://schemas.openxmlformats.org/drawingml/2006/main" xmlns:r="http://schemas.openxmlformats.org/officeDocument/2006/relationships" xmlns:p="http://schemas.openxmlformats.org/presentationml/2006/main">
   <p:cSld>
     <p:spTree>
       <p:nvGrpSpPr>
@@ -925,59 +941,61 @@
         <p:nvSpPr>
           <p:cNvPr id="2" name="Slide Image Placeholder 1"/>
           <p:cNvSpPr>
+            <a:spLocks noGrp="1" noRot="1" noChangeAspect="1"/>
+          </p:cNvSpPr>
+          <p:nvPr>
+            <p:ph type="sldImg" idx="2"/>
+          </p:nvPr>
+        </p:nvSpPr>
+        <p:spPr/>
+      </p:sp>
+      <p:sp>
+        <p:nvSpPr>
+          <p:cNvPr id="3" name="Notes Placeholder 2"/>
+          <p:cNvSpPr>
             <a:spLocks noGrp="1"/>
           </p:cNvSpPr>
           <p:nvPr>
-            <p:ph type="sldImg" idx="2"/>
+            <p:ph type="body" sz="quarter" idx="3"/>
           </p:nvPr>
         </p:nvSpPr>
         <p:spPr/>
-      </p:sp>
-      <p:sp>
-        <p:nvSpPr>
-          <p:cNvPr id="3" name="Notes Placeholder 2"/>
+        <p:txBody>
+          <a:bodyPr/>
+          <a:lstStyle/>
+          <a:p>
+            <a:r>
+              <a:t>PRESENTER: Tiebert   |   Target ~50 s</a:t>
+            </a:r>
+          </a:p>
+          <a:p>
+            <a:endParaRPr/>
+          </a:p>
+          <a:p>
+            <a:r>
+              <a:t>One honest qualification. We also ran a plain coarse model, 120 by 40 for both the analysis and the design. Re-analyzed on the fine mesh, it lands within 0.6 percent of the full design.</a:t>
+            </a:r>
+          </a:p>
+          <a:p>
+            <a:r>
+              <a:t>So for this 2D beam, with a fairly large filter, even a crude model already finds the load path. But the comparison is not entirely fair to that coarse model: it is also grayer, with more intermediate material, so part of its apparently low compliance is just material that SIMP has not fully penalized.</a:t>
+            </a:r>
+          </a:p>
+          <a:p>
+            <a:r>
+              <a:t>MTOP's real value is that it keeps the full 600-by-200 design description, and a genuinely black-and-white one, while only paying for the coarse solve.</a:t>
+            </a:r>
+          </a:p>
+        </p:txBody>
+      </p:sp>
+      <p:sp>
+        <p:nvSpPr>
+          <p:cNvPr id="4" name="Slide Number Placeholder 3"/>
           <p:cNvSpPr>
             <a:spLocks noGrp="1"/>
           </p:cNvSpPr>
           <p:nvPr>
-            <p:ph type="body" idx="3" sz="quarter"/>
-          </p:nvPr>
-        </p:nvSpPr>
-        <p:spPr/>
-        <p:txBody>
-          <a:bodyPr/>
-          <a:lstStyle/>
-          <a:p>
-            <a:r>
-              <a:t>PRESENTER: Tiebert   |   Target ~50 s</a:t>
-            </a:r>
-          </a:p>
-          <a:p/>
-          <a:p>
-            <a:r>
-              <a:t>One honest qualification. We also ran a plain coarse model, 120 by 40 for both the analysis and the design. Re-analyzed on the fine mesh, it lands within 0.6 percent of the full design.</a:t>
-            </a:r>
-          </a:p>
-          <a:p>
-            <a:r>
-              <a:t>So for this 2D beam, with a fairly large filter, even a crude model already finds the load path. But the comparison is not entirely fair to that coarse model: it is also grayer, with more intermediate material, so part of its apparently low compliance is just material that SIMP has not fully penalized.</a:t>
-            </a:r>
-          </a:p>
-          <a:p>
-            <a:r>
-              <a:t>MTOP's real value is that it keeps the full 600-by-200 design description, and a genuinely black-and-white one, while only paying for the coarse solve.</a:t>
-            </a:r>
-          </a:p>
-        </p:txBody>
-      </p:sp>
-      <p:sp>
-        <p:nvSpPr>
-          <p:cNvPr id="4" name="Slide Number Placeholder 3"/>
-          <p:cNvSpPr>
-            <a:spLocks noGrp="1"/>
-          </p:cNvSpPr>
-          <p:nvPr>
-            <p:ph type="sldNum" idx="5" sz="quarter"/>
+            <p:ph type="sldNum" sz="quarter" idx="5"/>
           </p:nvPr>
         </p:nvSpPr>
         <p:spPr/>
@@ -991,7 +1009,7 @@
 </file>
 
 <file path=ppt/notesSlides/notesSlide13.xml><?xml version="1.0" encoding="utf-8"?>
-<p:notes xmlns:a="http://schemas.openxmlformats.org/drawingml/2006/main" xmlns:p="http://schemas.openxmlformats.org/presentationml/2006/main" xmlns:r="http://schemas.openxmlformats.org/officeDocument/2006/relationships">
+<p:notes xmlns:a="http://schemas.openxmlformats.org/drawingml/2006/main" xmlns:r="http://schemas.openxmlformats.org/officeDocument/2006/relationships" xmlns:p="http://schemas.openxmlformats.org/presentationml/2006/main">
   <p:cSld>
     <p:spTree>
       <p:nvGrpSpPr>
@@ -1011,59 +1029,61 @@
         <p:nvSpPr>
           <p:cNvPr id="2" name="Slide Image Placeholder 1"/>
           <p:cNvSpPr>
+            <a:spLocks noGrp="1" noRot="1" noChangeAspect="1"/>
+          </p:cNvSpPr>
+          <p:nvPr>
+            <p:ph type="sldImg" idx="2"/>
+          </p:nvPr>
+        </p:nvSpPr>
+        <p:spPr/>
+      </p:sp>
+      <p:sp>
+        <p:nvSpPr>
+          <p:cNvPr id="3" name="Notes Placeholder 2"/>
+          <p:cNvSpPr>
             <a:spLocks noGrp="1"/>
           </p:cNvSpPr>
           <p:nvPr>
-            <p:ph type="sldImg" idx="2"/>
+            <p:ph type="body" sz="quarter" idx="3"/>
           </p:nvPr>
         </p:nvSpPr>
         <p:spPr/>
-      </p:sp>
-      <p:sp>
-        <p:nvSpPr>
-          <p:cNvPr id="3" name="Notes Placeholder 2"/>
+        <p:txBody>
+          <a:bodyPr/>
+          <a:lstStyle/>
+          <a:p>
+            <a:r>
+              <a:t>PRESENTER: Tiebert   |   Target ~50 s</a:t>
+            </a:r>
+          </a:p>
+          <a:p>
+            <a:endParaRPr/>
+          </a:p>
+          <a:p>
+            <a:r>
+              <a:t>To conclude. MTOP reproduces the classical MBB design to within 0.05 percent compliance. It is 21 times faster with sensitivity filtering and 5 times faster with density filtering.</a:t>
+            </a:r>
+          </a:p>
+          <a:p>
+            <a:r>
+              <a:t>The speedup comes from the cheaper coarse equilibrium solve, and is capped by the operations that still run on the fine mesh. OC with density filtering converges only in the compliance sense. And Heaviside projection gives the lowest, near-binary compliance, best at threshold 0.5. The chart on the right summarizes all nine runs - cost on the left, compliance on the right.</a:t>
+            </a:r>
+          </a:p>
+          <a:p>
+            <a:r>
+              <a:t>If we had to compress it to one sentence: MTOP buys the speed of a coarse analysis without giving up the resolution of a fine design.</a:t>
+            </a:r>
+          </a:p>
+        </p:txBody>
+      </p:sp>
+      <p:sp>
+        <p:nvSpPr>
+          <p:cNvPr id="4" name="Slide Number Placeholder 3"/>
           <p:cNvSpPr>
             <a:spLocks noGrp="1"/>
           </p:cNvSpPr>
           <p:nvPr>
-            <p:ph type="body" idx="3" sz="quarter"/>
-          </p:nvPr>
-        </p:nvSpPr>
-        <p:spPr/>
-        <p:txBody>
-          <a:bodyPr/>
-          <a:lstStyle/>
-          <a:p>
-            <a:r>
-              <a:t>PRESENTER: Tiebert   |   Target ~50 s</a:t>
-            </a:r>
-          </a:p>
-          <a:p/>
-          <a:p>
-            <a:r>
-              <a:t>To conclude. MTOP reproduces the classical MBB design to within 0.05 percent compliance. It is 21 times faster with sensitivity filtering and 5 times faster with density filtering.</a:t>
-            </a:r>
-          </a:p>
-          <a:p>
-            <a:r>
-              <a:t>The speedup comes from the cheaper coarse equilibrium solve, and is capped by the operations that still run on the fine mesh. OC with density filtering converges only in the compliance sense. And Heaviside projection gives the lowest, near-binary compliance, best at threshold 0.5. The chart on the right summarizes all nine runs - cost on the left, compliance on the right.</a:t>
-            </a:r>
-          </a:p>
-          <a:p>
-            <a:r>
-              <a:t>If we had to compress it to one sentence: MTOP buys the speed of a coarse analysis without giving up the resolution of a fine design.</a:t>
-            </a:r>
-          </a:p>
-        </p:txBody>
-      </p:sp>
-      <p:sp>
-        <p:nvSpPr>
-          <p:cNvPr id="4" name="Slide Number Placeholder 3"/>
-          <p:cNvSpPr>
-            <a:spLocks noGrp="1"/>
-          </p:cNvSpPr>
-          <p:nvPr>
-            <p:ph type="sldNum" idx="5" sz="quarter"/>
+            <p:ph type="sldNum" sz="quarter" idx="5"/>
           </p:nvPr>
         </p:nvSpPr>
         <p:spPr/>
@@ -1077,7 +1097,7 @@
 </file>
 
 <file path=ppt/notesSlides/notesSlide14.xml><?xml version="1.0" encoding="utf-8"?>
-<p:notes xmlns:a="http://schemas.openxmlformats.org/drawingml/2006/main" xmlns:p="http://schemas.openxmlformats.org/presentationml/2006/main" xmlns:r="http://schemas.openxmlformats.org/officeDocument/2006/relationships">
+<p:notes xmlns:a="http://schemas.openxmlformats.org/drawingml/2006/main" xmlns:r="http://schemas.openxmlformats.org/officeDocument/2006/relationships" xmlns:p="http://schemas.openxmlformats.org/presentationml/2006/main">
   <p:cSld>
     <p:spTree>
       <p:nvGrpSpPr>
@@ -1097,54 +1117,56 @@
         <p:nvSpPr>
           <p:cNvPr id="2" name="Slide Image Placeholder 1"/>
           <p:cNvSpPr>
+            <a:spLocks noGrp="1" noRot="1" noChangeAspect="1"/>
+          </p:cNvSpPr>
+          <p:nvPr>
+            <p:ph type="sldImg" idx="2"/>
+          </p:nvPr>
+        </p:nvSpPr>
+        <p:spPr/>
+      </p:sp>
+      <p:sp>
+        <p:nvSpPr>
+          <p:cNvPr id="3" name="Notes Placeholder 2"/>
+          <p:cNvSpPr>
             <a:spLocks noGrp="1"/>
           </p:cNvSpPr>
           <p:nvPr>
-            <p:ph type="sldImg" idx="2"/>
+            <p:ph type="body" sz="quarter" idx="3"/>
           </p:nvPr>
         </p:nvSpPr>
         <p:spPr/>
-      </p:sp>
-      <p:sp>
-        <p:nvSpPr>
-          <p:cNvPr id="3" name="Notes Placeholder 2"/>
+        <p:txBody>
+          <a:bodyPr/>
+          <a:lstStyle/>
+          <a:p>
+            <a:r>
+              <a:t>PRESENTER: Tiebert   |   Target ~25 s</a:t>
+            </a:r>
+          </a:p>
+          <a:p>
+            <a:endParaRPr/>
+          </a:p>
+          <a:p>
+            <a:r>
+              <a:t>A brief word on GenAI. We used ChatGPT as a support tool: to language-edit text we had written ourselves, for post-processing and plotting scripts, and for one supporting theory figure, the MMA sketch.</a:t>
+            </a:r>
+          </a:p>
+          <a:p>
+            <a:r>
+              <a:t>We did not use it for the method or the results. The MTOP implementation is ours, every sensitivity was verified independently with finite differences, and every number in this talk we reproduced and understand. The full transparency table is in the report.</a:t>
+            </a:r>
+          </a:p>
+        </p:txBody>
+      </p:sp>
+      <p:sp>
+        <p:nvSpPr>
+          <p:cNvPr id="4" name="Slide Number Placeholder 3"/>
           <p:cNvSpPr>
             <a:spLocks noGrp="1"/>
           </p:cNvSpPr>
           <p:nvPr>
-            <p:ph type="body" idx="3" sz="quarter"/>
-          </p:nvPr>
-        </p:nvSpPr>
-        <p:spPr/>
-        <p:txBody>
-          <a:bodyPr/>
-          <a:lstStyle/>
-          <a:p>
-            <a:r>
-              <a:t>PRESENTER: Tiebert   |   Target ~25 s</a:t>
-            </a:r>
-          </a:p>
-          <a:p/>
-          <a:p>
-            <a:r>
-              <a:t>A brief word on GenAI. We used ChatGPT as a support tool: to language-edit text we had written ourselves, for post-processing and plotting scripts, and for one supporting theory figure, the MMA sketch.</a:t>
-            </a:r>
-          </a:p>
-          <a:p>
-            <a:r>
-              <a:t>We did not use it for the method or the results. The MTOP implementation is ours, every sensitivity was verified independently with finite differences, and every number in this talk we reproduced and understand. The full transparency table is in the report.</a:t>
-            </a:r>
-          </a:p>
-        </p:txBody>
-      </p:sp>
-      <p:sp>
-        <p:nvSpPr>
-          <p:cNvPr id="4" name="Slide Number Placeholder 3"/>
-          <p:cNvSpPr>
-            <a:spLocks noGrp="1"/>
-          </p:cNvSpPr>
-          <p:nvPr>
-            <p:ph type="sldNum" idx="5" sz="quarter"/>
+            <p:ph type="sldNum" sz="quarter" idx="5"/>
           </p:nvPr>
         </p:nvSpPr>
         <p:spPr/>
@@ -1158,7 +1180,7 @@
 </file>
 
 <file path=ppt/notesSlides/notesSlide15.xml><?xml version="1.0" encoding="utf-8"?>
-<p:notes xmlns:a="http://schemas.openxmlformats.org/drawingml/2006/main" xmlns:p="http://schemas.openxmlformats.org/presentationml/2006/main" xmlns:r="http://schemas.openxmlformats.org/officeDocument/2006/relationships">
+<p:notes xmlns:a="http://schemas.openxmlformats.org/drawingml/2006/main" xmlns:r="http://schemas.openxmlformats.org/officeDocument/2006/relationships" xmlns:p="http://schemas.openxmlformats.org/presentationml/2006/main">
   <p:cSld>
     <p:spTree>
       <p:nvGrpSpPr>
@@ -1178,59 +1200,61 @@
         <p:nvSpPr>
           <p:cNvPr id="2" name="Slide Image Placeholder 1"/>
           <p:cNvSpPr>
+            <a:spLocks noGrp="1" noRot="1" noChangeAspect="1"/>
+          </p:cNvSpPr>
+          <p:nvPr>
+            <p:ph type="sldImg" idx="2"/>
+          </p:nvPr>
+        </p:nvSpPr>
+        <p:spPr/>
+      </p:sp>
+      <p:sp>
+        <p:nvSpPr>
+          <p:cNvPr id="3" name="Notes Placeholder 2"/>
+          <p:cNvSpPr>
             <a:spLocks noGrp="1"/>
           </p:cNvSpPr>
           <p:nvPr>
-            <p:ph type="sldImg" idx="2"/>
+            <p:ph type="body" sz="quarter" idx="3"/>
           </p:nvPr>
         </p:nvSpPr>
         <p:spPr/>
-      </p:sp>
-      <p:sp>
-        <p:nvSpPr>
-          <p:cNvPr id="3" name="Notes Placeholder 2"/>
+        <p:txBody>
+          <a:bodyPr/>
+          <a:lstStyle/>
+          <a:p>
+            <a:r>
+              <a:t>PRESENTER: Tiebert   |   Target ~40 s</a:t>
+            </a:r>
+          </a:p>
+          <a:p>
+            <a:endParaRPr/>
+          </a:p>
+          <a:p>
+            <a:r>
+              <a:t>To close, a brief outlook. Our headline numbers are for a 2D beam, where a plain coarse model already came within 0.6 percent, so the 2D benefit was modest. MTOP pays off most where the equilibrium solve genuinely dominates the cost: in 3D, with much larger systems, and where the design has fine features a coarse model cannot resolve, so keeping the fine density description is worth it. In 3D in particular the speedup we measured here would only grow, since the solve is an even larger share of the cost.</a:t>
+            </a:r>
+          </a:p>
+          <a:p>
+            <a:r>
+              <a:t>Three open issues from this study: density filtering needs a better convergence criterion than the design-change tolerance; the filtering, assembly and optimizer steps still scale with the fine mesh and cap the speedup below the 40 times of the solve itself; and with MMA the optimizer subproblem, not the FE solve, becomes the bottleneck.</a:t>
+            </a:r>
+          </a:p>
+          <a:p>
+            <a:r>
+              <a:t>Thank you - we are happy to take questions.</a:t>
+            </a:r>
+          </a:p>
+        </p:txBody>
+      </p:sp>
+      <p:sp>
+        <p:nvSpPr>
+          <p:cNvPr id="4" name="Slide Number Placeholder 3"/>
           <p:cNvSpPr>
             <a:spLocks noGrp="1"/>
           </p:cNvSpPr>
           <p:nvPr>
-            <p:ph type="body" idx="3" sz="quarter"/>
-          </p:nvPr>
-        </p:nvSpPr>
-        <p:spPr/>
-        <p:txBody>
-          <a:bodyPr/>
-          <a:lstStyle/>
-          <a:p>
-            <a:r>
-              <a:t>PRESENTER: Tiebert   |   Target ~40 s</a:t>
-            </a:r>
-          </a:p>
-          <a:p/>
-          <a:p>
-            <a:r>
-              <a:t>To close, a brief outlook. Our headline numbers are for a 2D beam, where a plain coarse model already came within 0.6 percent, so the 2D benefit was modest. MTOP pays off most where the equilibrium solve genuinely dominates the cost: in 3D, with much larger systems, and where the design has fine features a coarse model cannot resolve, so keeping the fine density description is worth it. In 3D in particular the speedup we measured here would only grow, since the solve is an even larger share of the cost.</a:t>
-            </a:r>
-          </a:p>
-          <a:p>
-            <a:r>
-              <a:t>Three open issues from this study: density filtering needs a better convergence criterion than the design-change tolerance; the filtering, assembly and optimizer steps still scale with the fine mesh and cap the speedup below the 40 times of the solve itself; and with MMA the optimizer subproblem, not the FE solve, becomes the bottleneck.</a:t>
-            </a:r>
-          </a:p>
-          <a:p>
-            <a:r>
-              <a:t>Thank you - we are happy to take questions.</a:t>
-            </a:r>
-          </a:p>
-        </p:txBody>
-      </p:sp>
-      <p:sp>
-        <p:nvSpPr>
-          <p:cNvPr id="4" name="Slide Number Placeholder 3"/>
-          <p:cNvSpPr>
-            <a:spLocks noGrp="1"/>
-          </p:cNvSpPr>
-          <p:nvPr>
-            <p:ph type="sldNum" idx="5" sz="quarter"/>
+            <p:ph type="sldNum" sz="quarter" idx="5"/>
           </p:nvPr>
         </p:nvSpPr>
         <p:spPr/>
@@ -1243,8 +1267,8 @@
 </p:notes>
 </file>
 
-<file path=ppt/notesSlides/notesSlide2.xml><?xml version="1.0" encoding="utf-8"?>
-<p:notes xmlns:a="http://schemas.openxmlformats.org/drawingml/2006/main" xmlns:p="http://schemas.openxmlformats.org/presentationml/2006/main" xmlns:r="http://schemas.openxmlformats.org/officeDocument/2006/relationships">
+<file path=ppt/notesSlides/notesSlide16.xml><?xml version="1.0" encoding="utf-8"?>
+<p:notes xmlns:a="http://schemas.openxmlformats.org/drawingml/2006/main" xmlns:r="http://schemas.openxmlformats.org/officeDocument/2006/relationships" xmlns:p="http://schemas.openxmlformats.org/presentationml/2006/main">
   <p:cSld>
     <p:spTree>
       <p:nvGrpSpPr>
@@ -1264,59 +1288,43 @@
         <p:nvSpPr>
           <p:cNvPr id="2" name="Slide Image Placeholder 1"/>
           <p:cNvSpPr>
+            <a:spLocks noGrp="1" noRot="1" noChangeAspect="1"/>
+          </p:cNvSpPr>
+          <p:nvPr>
+            <p:ph type="sldImg" idx="2"/>
+          </p:nvPr>
+        </p:nvSpPr>
+        <p:spPr/>
+      </p:sp>
+      <p:sp>
+        <p:nvSpPr>
+          <p:cNvPr id="3" name="Notes Placeholder 2"/>
+          <p:cNvSpPr>
             <a:spLocks noGrp="1"/>
           </p:cNvSpPr>
           <p:nvPr>
-            <p:ph type="sldImg" idx="2"/>
+            <p:ph type="body" sz="quarter" idx="3"/>
           </p:nvPr>
         </p:nvSpPr>
         <p:spPr/>
-      </p:sp>
-      <p:sp>
-        <p:nvSpPr>
-          <p:cNvPr id="3" name="Notes Placeholder 2"/>
+        <p:txBody>
+          <a:bodyPr/>
+          <a:lstStyle/>
+          <a:p>
+            <a:r>
+              <a:t>Backup slide. Use for questions on the optimization formulation, SIMP penalization, or the two filters.</a:t>
+            </a:r>
+          </a:p>
+        </p:txBody>
+      </p:sp>
+      <p:sp>
+        <p:nvSpPr>
+          <p:cNvPr id="4" name="Slide Number Placeholder 3"/>
           <p:cNvSpPr>
             <a:spLocks noGrp="1"/>
           </p:cNvSpPr>
           <p:nvPr>
-            <p:ph type="body" idx="3" sz="quarter"/>
-          </p:nvPr>
-        </p:nvSpPr>
-        <p:spPr/>
-        <p:txBody>
-          <a:bodyPr/>
-          <a:lstStyle/>
-          <a:p>
-            <a:r>
-              <a:t>PRESENTER: Lukas   |   Target ~50 s</a:t>
-            </a:r>
-          </a:p>
-          <a:p/>
-          <a:p>
-            <a:r>
-              <a:t>Topology optimization distributes a fixed amount of material so the structure is as stiff as possible. The cost is dominated by repeatedly solving the finite element system K u = f: every optimization iteration needs a fresh solve, and a run takes on the order of a hundred iterations, so that solve cost is paid over and over.</a:t>
-            </a:r>
-          </a:p>
-          <a:p>
-            <a:r>
-              <a:t>MTOP, introduced by Nguyen and co-workers in 2010, splits the problem: the design is still described on a fine mesh, but the equilibrium equations are solved on a coarse mesh, which should be much cheaper.</a:t>
-            </a:r>
-          </a:p>
-          <a:p>
-            <a:r>
-              <a:t>The catch: the original paper never reported computation times. So our research question is exactly that - how large is the speedup, and does the optimized design stay the same?</a:t>
-            </a:r>
-          </a:p>
-        </p:txBody>
-      </p:sp>
-      <p:sp>
-        <p:nvSpPr>
-          <p:cNvPr id="4" name="Slide Number Placeholder 3"/>
-          <p:cNvSpPr>
-            <a:spLocks noGrp="1"/>
-          </p:cNvSpPr>
-          <p:nvPr>
-            <p:ph type="sldNum" idx="5" sz="quarter"/>
+            <p:ph type="sldNum" sz="quarter" idx="5"/>
           </p:nvPr>
         </p:nvSpPr>
         <p:spPr/>
@@ -1329,8 +1337,8 @@
 </p:notes>
 </file>
 
-<file path=ppt/notesSlides/notesSlide3.xml><?xml version="1.0" encoding="utf-8"?>
-<p:notes xmlns:a="http://schemas.openxmlformats.org/drawingml/2006/main" xmlns:p="http://schemas.openxmlformats.org/presentationml/2006/main" xmlns:r="http://schemas.openxmlformats.org/officeDocument/2006/relationships">
+<file path=ppt/notesSlides/notesSlide17.xml><?xml version="1.0" encoding="utf-8"?>
+<p:notes xmlns:a="http://schemas.openxmlformats.org/drawingml/2006/main" xmlns:r="http://schemas.openxmlformats.org/officeDocument/2006/relationships" xmlns:p="http://schemas.openxmlformats.org/presentationml/2006/main">
   <p:cSld>
     <p:spTree>
       <p:nvGrpSpPr>
@@ -1350,54 +1358,43 @@
         <p:nvSpPr>
           <p:cNvPr id="2" name="Slide Image Placeholder 1"/>
           <p:cNvSpPr>
+            <a:spLocks noGrp="1" noRot="1" noChangeAspect="1"/>
+          </p:cNvSpPr>
+          <p:nvPr>
+            <p:ph type="sldImg" idx="2"/>
+          </p:nvPr>
+        </p:nvSpPr>
+        <p:spPr/>
+      </p:sp>
+      <p:sp>
+        <p:nvSpPr>
+          <p:cNvPr id="3" name="Notes Placeholder 2"/>
+          <p:cNvSpPr>
             <a:spLocks noGrp="1"/>
           </p:cNvSpPr>
           <p:nvPr>
-            <p:ph type="sldImg" idx="2"/>
+            <p:ph type="body" sz="quarter" idx="3"/>
           </p:nvPr>
         </p:nvSpPr>
         <p:spPr/>
-      </p:sp>
-      <p:sp>
-        <p:nvSpPr>
-          <p:cNvPr id="3" name="Notes Placeholder 2"/>
+        <p:txBody>
+          <a:bodyPr/>
+          <a:lstStyle/>
+          <a:p>
+            <a:r>
+              <a:t>Backup slide. Use for questions on the MTOP element, the 25 sub-cell templates, midpoint quadrature, and the per-cell sensitivity.</a:t>
+            </a:r>
+          </a:p>
+        </p:txBody>
+      </p:sp>
+      <p:sp>
+        <p:nvSpPr>
+          <p:cNvPr id="4" name="Slide Number Placeholder 3"/>
           <p:cNvSpPr>
             <a:spLocks noGrp="1"/>
           </p:cNvSpPr>
           <p:nvPr>
-            <p:ph type="body" idx="3" sz="quarter"/>
-          </p:nvPr>
-        </p:nvSpPr>
-        <p:spPr/>
-        <p:txBody>
-          <a:bodyPr/>
-          <a:lstStyle/>
-          <a:p>
-            <a:r>
-              <a:t>PRESENTER: Lukas   |   Target ~45 s</a:t>
-            </a:r>
-          </a:p>
-          <a:p/>
-          <a:p>
-            <a:r>
-              <a:t>Our test structure is the half MBB beam from the Chapter 9 lecture code. A unit point load at the top-left corner, a symmetry condition on the left edge, and a roller at the bottom-right. Plane stress, bilinear quad elements.</a:t>
-            </a:r>
-          </a:p>
-          <a:p>
-            <a:r>
-              <a:t>The optimization targets a volume fraction of one half, SIMP penalization three, and a cone filter of radius 24 density cells. Important: these settings are identical for every experiment, so any difference we see is genuinely due to MTOP, not to a change of parameters. That is what makes the comparison a fair one.</a:t>
-            </a:r>
-          </a:p>
-        </p:txBody>
-      </p:sp>
-      <p:sp>
-        <p:nvSpPr>
-          <p:cNvPr id="4" name="Slide Number Placeholder 3"/>
-          <p:cNvSpPr>
-            <a:spLocks noGrp="1"/>
-          </p:cNvSpPr>
-          <p:nvPr>
-            <p:ph type="sldNum" idx="5" sz="quarter"/>
+            <p:ph type="sldNum" sz="quarter" idx="5"/>
           </p:nvPr>
         </p:nvSpPr>
         <p:spPr/>
@@ -1410,8 +1407,8 @@
 </p:notes>
 </file>
 
-<file path=ppt/notesSlides/notesSlide4.xml><?xml version="1.0" encoding="utf-8"?>
-<p:notes xmlns:a="http://schemas.openxmlformats.org/drawingml/2006/main" xmlns:p="http://schemas.openxmlformats.org/presentationml/2006/main" xmlns:r="http://schemas.openxmlformats.org/officeDocument/2006/relationships">
+<file path=ppt/notesSlides/notesSlide18.xml><?xml version="1.0" encoding="utf-8"?>
+<p:notes xmlns:a="http://schemas.openxmlformats.org/drawingml/2006/main" xmlns:r="http://schemas.openxmlformats.org/officeDocument/2006/relationships" xmlns:p="http://schemas.openxmlformats.org/presentationml/2006/main">
   <p:cSld>
     <p:spTree>
       <p:nvGrpSpPr>
@@ -1431,64 +1428,43 @@
         <p:nvSpPr>
           <p:cNvPr id="2" name="Slide Image Placeholder 1"/>
           <p:cNvSpPr>
+            <a:spLocks noGrp="1" noRot="1" noChangeAspect="1"/>
+          </p:cNvSpPr>
+          <p:nvPr>
+            <p:ph type="sldImg" idx="2"/>
+          </p:nvPr>
+        </p:nvSpPr>
+        <p:spPr/>
+      </p:sp>
+      <p:sp>
+        <p:nvSpPr>
+          <p:cNvPr id="3" name="Notes Placeholder 2"/>
+          <p:cNvSpPr>
             <a:spLocks noGrp="1"/>
           </p:cNvSpPr>
           <p:nvPr>
-            <p:ph type="sldImg" idx="2"/>
+            <p:ph type="body" sz="quarter" idx="3"/>
           </p:nvPr>
         </p:nvSpPr>
         <p:spPr/>
-      </p:sp>
-      <p:sp>
-        <p:nvSpPr>
-          <p:cNvPr id="3" name="Notes Placeholder 2"/>
+        <p:txBody>
+          <a:bodyPr/>
+          <a:lstStyle/>
+          <a:p>
+            <a:r>
+              <a:t>Backup slide. Use for questions on how the sensitivities were verified and how accurate they are.</a:t>
+            </a:r>
+          </a:p>
+        </p:txBody>
+      </p:sp>
+      <p:sp>
+        <p:nvSpPr>
+          <p:cNvPr id="4" name="Slide Number Placeholder 3"/>
           <p:cNvSpPr>
             <a:spLocks noGrp="1"/>
           </p:cNvSpPr>
           <p:nvPr>
-            <p:ph type="body" idx="3" sz="quarter"/>
-          </p:nvPr>
-        </p:nvSpPr>
-        <p:spPr/>
-        <p:txBody>
-          <a:bodyPr/>
-          <a:lstStyle/>
-          <a:p>
-            <a:r>
-              <a:t>PRESENTER: Lukas   |   Target ~75 s</a:t>
-            </a:r>
-          </a:p>
-          <a:p/>
-          <a:p>
-            <a:r>
-              <a:t>This is the heart of MTOP. In the classical approach the analysis mesh and the design mesh are the same, 600 by 200.</a:t>
-            </a:r>
-          </a:p>
-          <a:p>
-            <a:r>
-              <a:t>In MTOP we keep the 600 by 200 design resolution, but we analyze on a coarse 120 by 40 mesh, with 5 by 5 density cells inside each finite element - that is the zoom on the right. Each element's stiffness is integrated with one midpoint sample per density cell, so 25 small stiffness templates, which are precomputed once per run.</a:t>
-            </a:r>
-          </a:p>
-          <a:p>
-            <a:r>
-              <a:t>One point worth stressing: the displacement field is still only piecewise-bilinear on the coarse mesh. The fine density mesh refines how we describe the material, not how we resolve the displacements - that is the approximation MTOP makes, and it is exactly why we always re-check the final design on the fine mesh.</a:t>
-            </a:r>
-          </a:p>
-          <a:p>
-            <a:r>
-              <a:t>The payoff is the number of equations: the free degrees of freedom drop from about 241,000 to about 9,900. That factor is the speedup we are chasing.</a:t>
-            </a:r>
-          </a:p>
-        </p:txBody>
-      </p:sp>
-      <p:sp>
-        <p:nvSpPr>
-          <p:cNvPr id="4" name="Slide Number Placeholder 3"/>
-          <p:cNvSpPr>
-            <a:spLocks noGrp="1"/>
-          </p:cNvSpPr>
-          <p:nvPr>
-            <p:ph type="sldNum" idx="5" sz="quarter"/>
+            <p:ph type="sldNum" sz="quarter" idx="5"/>
           </p:nvPr>
         </p:nvSpPr>
         <p:spPr/>
@@ -1501,8 +1477,8 @@
 </p:notes>
 </file>
 
-<file path=ppt/notesSlides/notesSlide5.xml><?xml version="1.0" encoding="utf-8"?>
-<p:notes xmlns:a="http://schemas.openxmlformats.org/drawingml/2006/main" xmlns:p="http://schemas.openxmlformats.org/presentationml/2006/main" xmlns:r="http://schemas.openxmlformats.org/officeDocument/2006/relationships">
+<file path=ppt/notesSlides/notesSlide19.xml><?xml version="1.0" encoding="utf-8"?>
+<p:notes xmlns:a="http://schemas.openxmlformats.org/drawingml/2006/main" xmlns:r="http://schemas.openxmlformats.org/officeDocument/2006/relationships" xmlns:p="http://schemas.openxmlformats.org/presentationml/2006/main">
   <p:cSld>
     <p:spTree>
       <p:nvGrpSpPr>
@@ -1522,59 +1498,43 @@
         <p:nvSpPr>
           <p:cNvPr id="2" name="Slide Image Placeholder 1"/>
           <p:cNvSpPr>
+            <a:spLocks noGrp="1" noRot="1" noChangeAspect="1"/>
+          </p:cNvSpPr>
+          <p:nvPr>
+            <p:ph type="sldImg" idx="2"/>
+          </p:nvPr>
+        </p:nvSpPr>
+        <p:spPr/>
+      </p:sp>
+      <p:sp>
+        <p:nvSpPr>
+          <p:cNvPr id="3" name="Notes Placeholder 2"/>
+          <p:cNvSpPr>
             <a:spLocks noGrp="1"/>
           </p:cNvSpPr>
           <p:nvPr>
-            <p:ph type="sldImg" idx="2"/>
+            <p:ph type="body" sz="quarter" idx="3"/>
           </p:nvPr>
         </p:nvSpPr>
         <p:spPr/>
-      </p:sp>
-      <p:sp>
-        <p:nvSpPr>
-          <p:cNvPr id="3" name="Notes Placeholder 2"/>
+        <p:txBody>
+          <a:bodyPr/>
+          <a:lstStyle/>
+          <a:p>
+            <a:r>
+              <a:t>Backup slide. The full results table for any question on a specific run, its compliance, cost, or stopping criterion.</a:t>
+            </a:r>
+          </a:p>
+        </p:txBody>
+      </p:sp>
+      <p:sp>
+        <p:nvSpPr>
+          <p:cNvPr id="4" name="Slide Number Placeholder 3"/>
           <p:cNvSpPr>
             <a:spLocks noGrp="1"/>
           </p:cNvSpPr>
           <p:nvPr>
-            <p:ph type="body" idx="3" sz="quarter"/>
-          </p:nvPr>
-        </p:nvSpPr>
-        <p:spPr/>
-        <p:txBody>
-          <a:bodyPr/>
-          <a:lstStyle/>
-          <a:p>
-            <a:r>
-              <a:t>PRESENTER: Lukas   |   Target ~55 s</a:t>
-            </a:r>
-          </a:p>
-          <a:p/>
-          <a:p>
-            <a:r>
-              <a:t>Quickly, the optimization problem. The design variables are the cell densities, the objective is to minimize compliance, and the constraint is the volume fraction of one half. SIMP with penalization three, and a cone filter of radius 24, used either as a sensitivity filter or a density filter.</a:t>
-            </a:r>
-          </a:p>
-          <a:p>
-            <a:r>
-              <a:t>On the optimizer: OC is a simple, fast update tailored to this kind of problem; MMA is a general-purpose gradient optimizer. We need MMA in step 4 because the Heaviside projection makes the problem too non-linear for the OC heuristic.</a:t>
-            </a:r>
-          </a:p>
-          <a:p>
-            <a:r>
-              <a:t>We ran the seven experiments in the table: optimality criteria for steps 1 to 3, then MMA for step 4 with sensitivity filtering, density filtering, and Heaviside projection at three thresholds. Every MTOP run has a classical counterpart for comparison.</a:t>
-            </a:r>
-          </a:p>
-        </p:txBody>
-      </p:sp>
-      <p:sp>
-        <p:nvSpPr>
-          <p:cNvPr id="4" name="Slide Number Placeholder 3"/>
-          <p:cNvSpPr>
-            <a:spLocks noGrp="1"/>
-          </p:cNvSpPr>
-          <p:nvPr>
-            <p:ph type="sldNum" idx="5" sz="quarter"/>
+            <p:ph type="sldNum" sz="quarter" idx="5"/>
           </p:nvPr>
         </p:nvSpPr>
         <p:spPr/>
@@ -1587,8 +1547,8 @@
 </p:notes>
 </file>
 
-<file path=ppt/notesSlides/notesSlide6.xml><?xml version="1.0" encoding="utf-8"?>
-<p:notes xmlns:a="http://schemas.openxmlformats.org/drawingml/2006/main" xmlns:p="http://schemas.openxmlformats.org/presentationml/2006/main" xmlns:r="http://schemas.openxmlformats.org/officeDocument/2006/relationships">
+<file path=ppt/notesSlides/notesSlide2.xml><?xml version="1.0" encoding="utf-8"?>
+<p:notes xmlns:a="http://schemas.openxmlformats.org/drawingml/2006/main" xmlns:r="http://schemas.openxmlformats.org/officeDocument/2006/relationships" xmlns:p="http://schemas.openxmlformats.org/presentationml/2006/main">
   <p:cSld>
     <p:spTree>
       <p:nvGrpSpPr>
@@ -1608,54 +1568,61 @@
         <p:nvSpPr>
           <p:cNvPr id="2" name="Slide Image Placeholder 1"/>
           <p:cNvSpPr>
+            <a:spLocks noGrp="1" noRot="1" noChangeAspect="1"/>
+          </p:cNvSpPr>
+          <p:nvPr>
+            <p:ph type="sldImg" idx="2"/>
+          </p:nvPr>
+        </p:nvSpPr>
+        <p:spPr/>
+      </p:sp>
+      <p:sp>
+        <p:nvSpPr>
+          <p:cNvPr id="3" name="Notes Placeholder 2"/>
+          <p:cNvSpPr>
             <a:spLocks noGrp="1"/>
           </p:cNvSpPr>
           <p:nvPr>
-            <p:ph type="sldImg" idx="2"/>
+            <p:ph type="body" sz="quarter" idx="3"/>
           </p:nvPr>
         </p:nvSpPr>
         <p:spPr/>
-      </p:sp>
-      <p:sp>
-        <p:nvSpPr>
-          <p:cNvPr id="3" name="Notes Placeholder 2"/>
+        <p:txBody>
+          <a:bodyPr/>
+          <a:lstStyle/>
+          <a:p>
+            <a:r>
+              <a:t>PRESENTER: Lukas   |   Target ~50 s</a:t>
+            </a:r>
+          </a:p>
+          <a:p>
+            <a:endParaRPr/>
+          </a:p>
+          <a:p>
+            <a:r>
+              <a:t>Topology optimization distributes a fixed amount of material so the structure is as stiff as possible. The cost is dominated by repeatedly solving the finite element system K u = f: every optimization iteration needs a fresh solve, and a run takes on the order of a hundred iterations, so that solve cost is paid over and over.</a:t>
+            </a:r>
+          </a:p>
+          <a:p>
+            <a:r>
+              <a:t>MTOP, introduced by Nguyen and co-workers in 2010, splits the problem: the design is still described on a fine mesh, but the equilibrium equations are solved on a coarse mesh, which should be much cheaper.</a:t>
+            </a:r>
+          </a:p>
+          <a:p>
+            <a:r>
+              <a:t>The catch: the original paper never reported computation times. So our research question is exactly that - how large is the speedup, and does the optimized design stay the same?</a:t>
+            </a:r>
+          </a:p>
+        </p:txBody>
+      </p:sp>
+      <p:sp>
+        <p:nvSpPr>
+          <p:cNvPr id="4" name="Slide Number Placeholder 3"/>
           <p:cNvSpPr>
             <a:spLocks noGrp="1"/>
           </p:cNvSpPr>
           <p:nvPr>
-            <p:ph type="body" idx="3" sz="quarter"/>
-          </p:nvPr>
-        </p:nvSpPr>
-        <p:spPr/>
-        <p:txBody>
-          <a:bodyPr/>
-          <a:lstStyle/>
-          <a:p>
-            <a:r>
-              <a:t>PRESENTER: Lukas   |   Target ~45 s</a:t>
-            </a:r>
-          </a:p>
-          <a:p/>
-          <a:p>
-            <a:r>
-              <a:t>Before trusting any result we verified the sensitivities - the gradients the optimizer relies on. We checked three derivative chains: the classical SIMP gradient, the MTOP per-cell gradient, and the full Heaviside chain, each with three finite-difference strategies.</a:t>
-            </a:r>
-          </a:p>
-          <a:p>
-            <a:r>
-              <a:t>The strongest is the Taylor remainder test, the right-hand panel: it should decay quadratically with the step size, and the fitted slope is essentially 2.00 for all three chains, with errors down to ten to the minus six. The component-wise check also pins any indexing or chain-rule error to a single variable, which is how we caught bugs during development. So the analytical gradients are correct.</a:t>
-            </a:r>
-          </a:p>
-        </p:txBody>
-      </p:sp>
-      <p:sp>
-        <p:nvSpPr>
-          <p:cNvPr id="4" name="Slide Number Placeholder 3"/>
-          <p:cNvSpPr>
-            <a:spLocks noGrp="1"/>
-          </p:cNvSpPr>
-          <p:nvPr>
-            <p:ph type="sldNum" idx="5" sz="quarter"/>
+            <p:ph type="sldNum" sz="quarter" idx="5"/>
           </p:nvPr>
         </p:nvSpPr>
         <p:spPr/>
@@ -1668,8 +1635,8 @@
 </p:notes>
 </file>
 
-<file path=ppt/notesSlides/notesSlide7.xml><?xml version="1.0" encoding="utf-8"?>
-<p:notes xmlns:a="http://schemas.openxmlformats.org/drawingml/2006/main" xmlns:p="http://schemas.openxmlformats.org/presentationml/2006/main" xmlns:r="http://schemas.openxmlformats.org/officeDocument/2006/relationships">
+<file path=ppt/notesSlides/notesSlide20.xml><?xml version="1.0" encoding="utf-8"?>
+<p:notes xmlns:a="http://schemas.openxmlformats.org/drawingml/2006/main" xmlns:r="http://schemas.openxmlformats.org/officeDocument/2006/relationships" xmlns:p="http://schemas.openxmlformats.org/presentationml/2006/main">
   <p:cSld>
     <p:spTree>
       <p:nvGrpSpPr>
@@ -1689,59 +1656,43 @@
         <p:nvSpPr>
           <p:cNvPr id="2" name="Slide Image Placeholder 1"/>
           <p:cNvSpPr>
+            <a:spLocks noGrp="1" noRot="1" noChangeAspect="1"/>
+          </p:cNvSpPr>
+          <p:nvPr>
+            <p:ph type="sldImg" idx="2"/>
+          </p:nvPr>
+        </p:nvSpPr>
+        <p:spPr/>
+      </p:sp>
+      <p:sp>
+        <p:nvSpPr>
+          <p:cNvPr id="3" name="Notes Placeholder 2"/>
+          <p:cNvSpPr>
             <a:spLocks noGrp="1"/>
           </p:cNvSpPr>
           <p:nvPr>
-            <p:ph type="sldImg" idx="2"/>
+            <p:ph type="body" sz="quarter" idx="3"/>
           </p:nvPr>
         </p:nvSpPr>
         <p:spPr/>
-      </p:sp>
-      <p:sp>
-        <p:nvSpPr>
-          <p:cNvPr id="3" name="Notes Placeholder 2"/>
+        <p:txBody>
+          <a:bodyPr/>
+          <a:lstStyle/>
+          <a:p>
+            <a:r>
+              <a:t>Backup slide. Use for questions on why native and fine-mesh compliance differ, and on the coarse-resolution baseline.</a:t>
+            </a:r>
+          </a:p>
+        </p:txBody>
+      </p:sp>
+      <p:sp>
+        <p:nvSpPr>
+          <p:cNvPr id="4" name="Slide Number Placeholder 3"/>
           <p:cNvSpPr>
             <a:spLocks noGrp="1"/>
           </p:cNvSpPr>
           <p:nvPr>
-            <p:ph type="body" idx="3" sz="quarter"/>
-          </p:nvPr>
-        </p:nvSpPr>
-        <p:spPr/>
-        <p:txBody>
-          <a:bodyPr/>
-          <a:lstStyle/>
-          <a:p>
-            <a:r>
-              <a:t>PRESENTER: Lukas   |   Target ~50 s</a:t>
-            </a:r>
-          </a:p>
-          <a:p/>
-          <a:p>
-            <a:r>
-              <a:t>Now the results. Steps 1 and 2: optimality criteria with sensitivity filtering. On the right, the classical design on top, the MTOP design in the middle, and their difference at the bottom.</a:t>
-            </a:r>
-          </a:p>
-          <a:p>
-            <a:r>
-              <a:t>The two layouts are the same truss. Physically: a top chord in compression near the load, a bottom chord in tension near the support, and a triangulated web carrying the shear toward the support. The difference plot is almost empty, just small boundary shifts, an RMS of three thousandths. Re-evaluated on the same fine mesh the compliances differ by 0.045 percent.</a:t>
-            </a:r>
-          </a:p>
-          <a:p>
-            <a:r>
-              <a:t>So MTOP does not change the design. I will hand over to Tiebert for how much faster it is.</a:t>
-            </a:r>
-          </a:p>
-        </p:txBody>
-      </p:sp>
-      <p:sp>
-        <p:nvSpPr>
-          <p:cNvPr id="4" name="Slide Number Placeholder 3"/>
-          <p:cNvSpPr>
-            <a:spLocks noGrp="1"/>
-          </p:cNvSpPr>
-          <p:nvPr>
-            <p:ph type="sldNum" idx="5" sz="quarter"/>
+            <p:ph type="sldNum" sz="quarter" idx="5"/>
           </p:nvPr>
         </p:nvSpPr>
         <p:spPr/>
@@ -1754,8 +1705,8 @@
 </p:notes>
 </file>
 
-<file path=ppt/notesSlides/notesSlide8.xml><?xml version="1.0" encoding="utf-8"?>
-<p:notes xmlns:a="http://schemas.openxmlformats.org/drawingml/2006/main" xmlns:p="http://schemas.openxmlformats.org/presentationml/2006/main" xmlns:r="http://schemas.openxmlformats.org/officeDocument/2006/relationships">
+<file path=ppt/notesSlides/notesSlide21.xml><?xml version="1.0" encoding="utf-8"?>
+<p:notes xmlns:a="http://schemas.openxmlformats.org/drawingml/2006/main" xmlns:r="http://schemas.openxmlformats.org/officeDocument/2006/relationships" xmlns:p="http://schemas.openxmlformats.org/presentationml/2006/main">
   <p:cSld>
     <p:spTree>
       <p:nvGrpSpPr>
@@ -1775,59 +1726,43 @@
         <p:nvSpPr>
           <p:cNvPr id="2" name="Slide Image Placeholder 1"/>
           <p:cNvSpPr>
+            <a:spLocks noGrp="1" noRot="1" noChangeAspect="1"/>
+          </p:cNvSpPr>
+          <p:nvPr>
+            <p:ph type="sldImg" idx="2"/>
+          </p:nvPr>
+        </p:nvSpPr>
+        <p:spPr/>
+      </p:sp>
+      <p:sp>
+        <p:nvSpPr>
+          <p:cNvPr id="3" name="Notes Placeholder 2"/>
+          <p:cNvSpPr>
             <a:spLocks noGrp="1"/>
           </p:cNvSpPr>
           <p:nvPr>
-            <p:ph type="sldImg" idx="2"/>
+            <p:ph type="body" sz="quarter" idx="3"/>
           </p:nvPr>
         </p:nvSpPr>
         <p:spPr/>
-      </p:sp>
-      <p:sp>
-        <p:nvSpPr>
-          <p:cNvPr id="3" name="Notes Placeholder 2"/>
+        <p:txBody>
+          <a:bodyPr/>
+          <a:lstStyle/>
+          <a:p>
+            <a:r>
+              <a:t>Backup slide. Use for questions on the OC update rule, the Lagrange-multiplier bisection, or how MMA works.</a:t>
+            </a:r>
+          </a:p>
+        </p:txBody>
+      </p:sp>
+      <p:sp>
+        <p:nvSpPr>
+          <p:cNvPr id="4" name="Slide Number Placeholder 3"/>
           <p:cNvSpPr>
             <a:spLocks noGrp="1"/>
           </p:cNvSpPr>
           <p:nvPr>
-            <p:ph type="body" idx="3" sz="quarter"/>
-          </p:nvPr>
-        </p:nvSpPr>
-        <p:spPr/>
-        <p:txBody>
-          <a:bodyPr/>
-          <a:lstStyle/>
-          <a:p>
-            <a:r>
-              <a:t>PRESENTER: Tiebert   (takes over from Lukas)   |   Target ~45 s</a:t>
-            </a:r>
-          </a:p>
-          <a:p/>
-          <a:p>
-            <a:r>
-              <a:t>Thanks. So the designs are identical, but the timing is not. This plot is compliance against wall-clock time - classical in blue, MTOP in orange.</a:t>
-            </a:r>
-          </a:p>
-          <a:p>
-            <a:r>
-              <a:t>It is worth stressing the iteration counts, 94 and 95: MTOP is not converging differently or cutting corners, it follows the same optimization path. But the classical run takes 263 seconds and the MTOP run takes 12 - a factor of 21. You can see the orange curve squeezed against the time axis.</a:t>
-            </a:r>
-          </a:p>
-          <a:p>
-            <a:r>
-              <a:t>Same design, same iteration count, each iteration simply cheaper: 21 times faster overall.</a:t>
-            </a:r>
-          </a:p>
-        </p:txBody>
-      </p:sp>
-      <p:sp>
-        <p:nvSpPr>
-          <p:cNvPr id="4" name="Slide Number Placeholder 3"/>
-          <p:cNvSpPr>
-            <a:spLocks noGrp="1"/>
-          </p:cNvSpPr>
-          <p:nvPr>
-            <p:ph type="sldNum" idx="5" sz="quarter"/>
+            <p:ph type="sldNum" sz="quarter" idx="5"/>
           </p:nvPr>
         </p:nvSpPr>
         <p:spPr/>
@@ -1840,8 +1775,8 @@
 </p:notes>
 </file>
 
-<file path=ppt/notesSlides/notesSlide9.xml><?xml version="1.0" encoding="utf-8"?>
-<p:notes xmlns:a="http://schemas.openxmlformats.org/drawingml/2006/main" xmlns:p="http://schemas.openxmlformats.org/presentationml/2006/main" xmlns:r="http://schemas.openxmlformats.org/officeDocument/2006/relationships">
+<file path=ppt/notesSlides/notesSlide22.xml><?xml version="1.0" encoding="utf-8"?>
+<p:notes xmlns:a="http://schemas.openxmlformats.org/drawingml/2006/main" xmlns:r="http://schemas.openxmlformats.org/officeDocument/2006/relationships" xmlns:p="http://schemas.openxmlformats.org/presentationml/2006/main">
   <p:cSld>
     <p:spTree>
       <p:nvGrpSpPr>
@@ -1861,9 +1796,79 @@
         <p:nvSpPr>
           <p:cNvPr id="2" name="Slide Image Placeholder 1"/>
           <p:cNvSpPr>
+            <a:spLocks noGrp="1" noRot="1" noChangeAspect="1"/>
+          </p:cNvSpPr>
+          <p:nvPr>
+            <p:ph type="sldImg" idx="2"/>
+          </p:nvPr>
+        </p:nvSpPr>
+        <p:spPr/>
+      </p:sp>
+      <p:sp>
+        <p:nvSpPr>
+          <p:cNvPr id="3" name="Notes Placeholder 2"/>
+          <p:cNvSpPr>
             <a:spLocks noGrp="1"/>
           </p:cNvSpPr>
           <p:nvPr>
+            <p:ph type="body" sz="quarter" idx="3"/>
+          </p:nvPr>
+        </p:nvSpPr>
+        <p:spPr/>
+        <p:txBody>
+          <a:bodyPr/>
+          <a:lstStyle/>
+          <a:p>
+            <a:r>
+              <a:t>Backup slide. Use for questions on the Heaviside projection, the threshold eta, and the beta-continuation strategy. The figure shows compliance, volume and beta versus iteration for eta = 0.5.</a:t>
+            </a:r>
+          </a:p>
+        </p:txBody>
+      </p:sp>
+      <p:sp>
+        <p:nvSpPr>
+          <p:cNvPr id="4" name="Slide Number Placeholder 3"/>
+          <p:cNvSpPr>
+            <a:spLocks noGrp="1"/>
+          </p:cNvSpPr>
+          <p:nvPr>
+            <p:ph type="sldNum" sz="quarter" idx="5"/>
+          </p:nvPr>
+        </p:nvSpPr>
+        <p:spPr/>
+      </p:sp>
+    </p:spTree>
+  </p:cSld>
+  <p:clrMapOvr>
+    <a:masterClrMapping/>
+  </p:clrMapOvr>
+</p:notes>
+</file>
+
+<file path=ppt/notesSlides/notesSlide3.xml><?xml version="1.0" encoding="utf-8"?>
+<p:notes xmlns:a="http://schemas.openxmlformats.org/drawingml/2006/main" xmlns:r="http://schemas.openxmlformats.org/officeDocument/2006/relationships" xmlns:p="http://schemas.openxmlformats.org/presentationml/2006/main">
+  <p:cSld>
+    <p:spTree>
+      <p:nvGrpSpPr>
+        <p:cNvPr id="1" name=""/>
+        <p:cNvGrpSpPr/>
+        <p:nvPr/>
+      </p:nvGrpSpPr>
+      <p:grpSpPr>
+        <a:xfrm>
+          <a:off x="0" y="0"/>
+          <a:ext cx="0" cy="0"/>
+          <a:chOff x="0" y="0"/>
+          <a:chExt cx="0" cy="0"/>
+        </a:xfrm>
+      </p:grpSpPr>
+      <p:sp>
+        <p:nvSpPr>
+          <p:cNvPr id="2" name="Slide Image Placeholder 1"/>
+          <p:cNvSpPr>
+            <a:spLocks noGrp="1" noRot="1" noChangeAspect="1"/>
+          </p:cNvSpPr>
+          <p:nvPr>
             <p:ph type="sldImg" idx="2"/>
           </p:nvPr>
         </p:nvSpPr>
@@ -1876,7 +1881,7 @@
             <a:spLocks noGrp="1"/>
           </p:cNvSpPr>
           <p:nvPr>
-            <p:ph type="body" idx="3" sz="quarter"/>
+            <p:ph type="body" sz="quarter" idx="3"/>
           </p:nvPr>
         </p:nvSpPr>
         <p:spPr/>
@@ -1885,10 +1890,535 @@
           <a:lstStyle/>
           <a:p>
             <a:r>
+              <a:t>PRESENTER: Lukas   |   Target ~45 s</a:t>
+            </a:r>
+          </a:p>
+          <a:p>
+            <a:endParaRPr/>
+          </a:p>
+          <a:p>
+            <a:r>
+              <a:t>Our test structure is the half MBB beam from the Chapter 9 lecture code. A unit point load at the top-left corner, a symmetry condition on the left edge, and a roller at the bottom-right. Plane stress, bilinear quad elements.</a:t>
+            </a:r>
+          </a:p>
+          <a:p>
+            <a:r>
+              <a:t>The optimization targets a volume fraction of one half, SIMP penalization three, and a cone filter of radius 24 density cells. Important: these settings are identical for every experiment, so any difference we see is genuinely due to MTOP, not to a change of parameters. That is what makes the comparison a fair one.</a:t>
+            </a:r>
+          </a:p>
+        </p:txBody>
+      </p:sp>
+      <p:sp>
+        <p:nvSpPr>
+          <p:cNvPr id="4" name="Slide Number Placeholder 3"/>
+          <p:cNvSpPr>
+            <a:spLocks noGrp="1"/>
+          </p:cNvSpPr>
+          <p:nvPr>
+            <p:ph type="sldNum" sz="quarter" idx="5"/>
+          </p:nvPr>
+        </p:nvSpPr>
+        <p:spPr/>
+      </p:sp>
+    </p:spTree>
+  </p:cSld>
+  <p:clrMapOvr>
+    <a:masterClrMapping/>
+  </p:clrMapOvr>
+</p:notes>
+</file>
+
+<file path=ppt/notesSlides/notesSlide4.xml><?xml version="1.0" encoding="utf-8"?>
+<p:notes xmlns:a="http://schemas.openxmlformats.org/drawingml/2006/main" xmlns:r="http://schemas.openxmlformats.org/officeDocument/2006/relationships" xmlns:p="http://schemas.openxmlformats.org/presentationml/2006/main">
+  <p:cSld>
+    <p:spTree>
+      <p:nvGrpSpPr>
+        <p:cNvPr id="1" name=""/>
+        <p:cNvGrpSpPr/>
+        <p:nvPr/>
+      </p:nvGrpSpPr>
+      <p:grpSpPr>
+        <a:xfrm>
+          <a:off x="0" y="0"/>
+          <a:ext cx="0" cy="0"/>
+          <a:chOff x="0" y="0"/>
+          <a:chExt cx="0" cy="0"/>
+        </a:xfrm>
+      </p:grpSpPr>
+      <p:sp>
+        <p:nvSpPr>
+          <p:cNvPr id="2" name="Slide Image Placeholder 1"/>
+          <p:cNvSpPr>
+            <a:spLocks noGrp="1" noRot="1" noChangeAspect="1"/>
+          </p:cNvSpPr>
+          <p:nvPr>
+            <p:ph type="sldImg" idx="2"/>
+          </p:nvPr>
+        </p:nvSpPr>
+        <p:spPr/>
+      </p:sp>
+      <p:sp>
+        <p:nvSpPr>
+          <p:cNvPr id="3" name="Notes Placeholder 2"/>
+          <p:cNvSpPr>
+            <a:spLocks noGrp="1"/>
+          </p:cNvSpPr>
+          <p:nvPr>
+            <p:ph type="body" sz="quarter" idx="3"/>
+          </p:nvPr>
+        </p:nvSpPr>
+        <p:spPr/>
+        <p:txBody>
+          <a:bodyPr/>
+          <a:lstStyle/>
+          <a:p>
+            <a:r>
+              <a:t>PRESENTER: Lukas   |   Target ~75 s</a:t>
+            </a:r>
+          </a:p>
+          <a:p>
+            <a:endParaRPr/>
+          </a:p>
+          <a:p>
+            <a:r>
+              <a:t>This is the heart of MTOP. In the classical approach the analysis mesh and the design mesh are the same, 600 by 200.</a:t>
+            </a:r>
+          </a:p>
+          <a:p>
+            <a:r>
+              <a:t>In MTOP we keep the 600 by 200 design resolution, but we analyze on a coarse 120 by 40 mesh, with 5 by 5 density cells inside each finite element - that is the zoom on the right. Each element's stiffness is integrated with one midpoint sample per density cell, so 25 small stiffness templates, which are precomputed once per run.</a:t>
+            </a:r>
+          </a:p>
+          <a:p>
+            <a:r>
+              <a:t>One point worth stressing: the displacement field is still only piecewise-bilinear on the coarse mesh. The fine density mesh refines how we describe the material, not how we resolve the displacements - that is the approximation MTOP makes, and it is exactly why we always re-check the final design on the fine mesh.</a:t>
+            </a:r>
+          </a:p>
+          <a:p>
+            <a:r>
+              <a:t>The payoff is the number of equations: the free degrees of freedom drop from about 241,000 to about 9,900. That factor is the speedup we are chasing.</a:t>
+            </a:r>
+          </a:p>
+        </p:txBody>
+      </p:sp>
+      <p:sp>
+        <p:nvSpPr>
+          <p:cNvPr id="4" name="Slide Number Placeholder 3"/>
+          <p:cNvSpPr>
+            <a:spLocks noGrp="1"/>
+          </p:cNvSpPr>
+          <p:nvPr>
+            <p:ph type="sldNum" sz="quarter" idx="5"/>
+          </p:nvPr>
+        </p:nvSpPr>
+        <p:spPr/>
+      </p:sp>
+    </p:spTree>
+  </p:cSld>
+  <p:clrMapOvr>
+    <a:masterClrMapping/>
+  </p:clrMapOvr>
+</p:notes>
+</file>
+
+<file path=ppt/notesSlides/notesSlide5.xml><?xml version="1.0" encoding="utf-8"?>
+<p:notes xmlns:a="http://schemas.openxmlformats.org/drawingml/2006/main" xmlns:r="http://schemas.openxmlformats.org/officeDocument/2006/relationships" xmlns:p="http://schemas.openxmlformats.org/presentationml/2006/main">
+  <p:cSld>
+    <p:spTree>
+      <p:nvGrpSpPr>
+        <p:cNvPr id="1" name=""/>
+        <p:cNvGrpSpPr/>
+        <p:nvPr/>
+      </p:nvGrpSpPr>
+      <p:grpSpPr>
+        <a:xfrm>
+          <a:off x="0" y="0"/>
+          <a:ext cx="0" cy="0"/>
+          <a:chOff x="0" y="0"/>
+          <a:chExt cx="0" cy="0"/>
+        </a:xfrm>
+      </p:grpSpPr>
+      <p:sp>
+        <p:nvSpPr>
+          <p:cNvPr id="2" name="Slide Image Placeholder 1"/>
+          <p:cNvSpPr>
+            <a:spLocks noGrp="1" noRot="1" noChangeAspect="1"/>
+          </p:cNvSpPr>
+          <p:nvPr>
+            <p:ph type="sldImg" idx="2"/>
+          </p:nvPr>
+        </p:nvSpPr>
+        <p:spPr/>
+      </p:sp>
+      <p:sp>
+        <p:nvSpPr>
+          <p:cNvPr id="3" name="Notes Placeholder 2"/>
+          <p:cNvSpPr>
+            <a:spLocks noGrp="1"/>
+          </p:cNvSpPr>
+          <p:nvPr>
+            <p:ph type="body" sz="quarter" idx="3"/>
+          </p:nvPr>
+        </p:nvSpPr>
+        <p:spPr/>
+        <p:txBody>
+          <a:bodyPr/>
+          <a:lstStyle/>
+          <a:p>
+            <a:r>
+              <a:t>PRESENTER: Lukas   |   Target ~55 s</a:t>
+            </a:r>
+          </a:p>
+          <a:p>
+            <a:endParaRPr/>
+          </a:p>
+          <a:p>
+            <a:r>
+              <a:t>Quickly, the optimization problem. The design variables are the cell densities, the objective is to minimize compliance, and the constraint is the volume fraction of one half. SIMP with penalization three, and a cone filter of radius 24, used either as a sensitivity filter or a density filter.</a:t>
+            </a:r>
+          </a:p>
+          <a:p>
+            <a:r>
+              <a:t>On the optimizer: OC is a simple, fast update tailored to this kind of problem; MMA is a general-purpose gradient optimizer. We need MMA in step 4 because the Heaviside projection makes the problem too non-linear for the OC heuristic.</a:t>
+            </a:r>
+          </a:p>
+          <a:p>
+            <a:r>
+              <a:t>We ran the seven experiments in the table: optimality criteria for steps 1 to 3, then MMA for step 4 with sensitivity filtering, density filtering, and Heaviside projection at three thresholds. Every MTOP run has a classical counterpart for comparison.</a:t>
+            </a:r>
+          </a:p>
+        </p:txBody>
+      </p:sp>
+      <p:sp>
+        <p:nvSpPr>
+          <p:cNvPr id="4" name="Slide Number Placeholder 3"/>
+          <p:cNvSpPr>
+            <a:spLocks noGrp="1"/>
+          </p:cNvSpPr>
+          <p:nvPr>
+            <p:ph type="sldNum" sz="quarter" idx="5"/>
+          </p:nvPr>
+        </p:nvSpPr>
+        <p:spPr/>
+      </p:sp>
+    </p:spTree>
+  </p:cSld>
+  <p:clrMapOvr>
+    <a:masterClrMapping/>
+  </p:clrMapOvr>
+</p:notes>
+</file>
+
+<file path=ppt/notesSlides/notesSlide6.xml><?xml version="1.0" encoding="utf-8"?>
+<p:notes xmlns:a="http://schemas.openxmlformats.org/drawingml/2006/main" xmlns:r="http://schemas.openxmlformats.org/officeDocument/2006/relationships" xmlns:p="http://schemas.openxmlformats.org/presentationml/2006/main">
+  <p:cSld>
+    <p:spTree>
+      <p:nvGrpSpPr>
+        <p:cNvPr id="1" name=""/>
+        <p:cNvGrpSpPr/>
+        <p:nvPr/>
+      </p:nvGrpSpPr>
+      <p:grpSpPr>
+        <a:xfrm>
+          <a:off x="0" y="0"/>
+          <a:ext cx="0" cy="0"/>
+          <a:chOff x="0" y="0"/>
+          <a:chExt cx="0" cy="0"/>
+        </a:xfrm>
+      </p:grpSpPr>
+      <p:sp>
+        <p:nvSpPr>
+          <p:cNvPr id="2" name="Slide Image Placeholder 1"/>
+          <p:cNvSpPr>
+            <a:spLocks noGrp="1" noRot="1" noChangeAspect="1"/>
+          </p:cNvSpPr>
+          <p:nvPr>
+            <p:ph type="sldImg" idx="2"/>
+          </p:nvPr>
+        </p:nvSpPr>
+        <p:spPr/>
+      </p:sp>
+      <p:sp>
+        <p:nvSpPr>
+          <p:cNvPr id="3" name="Notes Placeholder 2"/>
+          <p:cNvSpPr>
+            <a:spLocks noGrp="1"/>
+          </p:cNvSpPr>
+          <p:nvPr>
+            <p:ph type="body" sz="quarter" idx="3"/>
+          </p:nvPr>
+        </p:nvSpPr>
+        <p:spPr/>
+        <p:txBody>
+          <a:bodyPr/>
+          <a:lstStyle/>
+          <a:p>
+            <a:r>
+              <a:t>PRESENTER: Lukas   |   Target ~45 s</a:t>
+            </a:r>
+          </a:p>
+          <a:p>
+            <a:endParaRPr/>
+          </a:p>
+          <a:p>
+            <a:r>
+              <a:t>Before trusting any result we verified the sensitivities - the gradients the optimizer relies on. We checked three derivative chains: the classical SIMP gradient, the MTOP per-cell gradient, and the full Heaviside chain, each with three finite-difference strategies.</a:t>
+            </a:r>
+          </a:p>
+          <a:p>
+            <a:r>
+              <a:t>The strongest is the Taylor remainder test, the right-hand panel: it should decay quadratically with the step size, and the fitted slope is essentially 2.00 for all three chains, with errors down to ten to the minus six. The component-wise check also pins any indexing or chain-rule error to a single variable, which is how we caught bugs during development. So the analytical gradients are correct.</a:t>
+            </a:r>
+          </a:p>
+        </p:txBody>
+      </p:sp>
+      <p:sp>
+        <p:nvSpPr>
+          <p:cNvPr id="4" name="Slide Number Placeholder 3"/>
+          <p:cNvSpPr>
+            <a:spLocks noGrp="1"/>
+          </p:cNvSpPr>
+          <p:nvPr>
+            <p:ph type="sldNum" sz="quarter" idx="5"/>
+          </p:nvPr>
+        </p:nvSpPr>
+        <p:spPr/>
+      </p:sp>
+    </p:spTree>
+  </p:cSld>
+  <p:clrMapOvr>
+    <a:masterClrMapping/>
+  </p:clrMapOvr>
+</p:notes>
+</file>
+
+<file path=ppt/notesSlides/notesSlide7.xml><?xml version="1.0" encoding="utf-8"?>
+<p:notes xmlns:a="http://schemas.openxmlformats.org/drawingml/2006/main" xmlns:r="http://schemas.openxmlformats.org/officeDocument/2006/relationships" xmlns:p="http://schemas.openxmlformats.org/presentationml/2006/main">
+  <p:cSld>
+    <p:spTree>
+      <p:nvGrpSpPr>
+        <p:cNvPr id="1" name=""/>
+        <p:cNvGrpSpPr/>
+        <p:nvPr/>
+      </p:nvGrpSpPr>
+      <p:grpSpPr>
+        <a:xfrm>
+          <a:off x="0" y="0"/>
+          <a:ext cx="0" cy="0"/>
+          <a:chOff x="0" y="0"/>
+          <a:chExt cx="0" cy="0"/>
+        </a:xfrm>
+      </p:grpSpPr>
+      <p:sp>
+        <p:nvSpPr>
+          <p:cNvPr id="2" name="Slide Image Placeholder 1"/>
+          <p:cNvSpPr>
+            <a:spLocks noGrp="1" noRot="1" noChangeAspect="1"/>
+          </p:cNvSpPr>
+          <p:nvPr>
+            <p:ph type="sldImg" idx="2"/>
+          </p:nvPr>
+        </p:nvSpPr>
+        <p:spPr/>
+      </p:sp>
+      <p:sp>
+        <p:nvSpPr>
+          <p:cNvPr id="3" name="Notes Placeholder 2"/>
+          <p:cNvSpPr>
+            <a:spLocks noGrp="1"/>
+          </p:cNvSpPr>
+          <p:nvPr>
+            <p:ph type="body" sz="quarter" idx="3"/>
+          </p:nvPr>
+        </p:nvSpPr>
+        <p:spPr/>
+        <p:txBody>
+          <a:bodyPr/>
+          <a:lstStyle/>
+          <a:p>
+            <a:r>
+              <a:t>PRESENTER: Lukas   |   Target ~50 s</a:t>
+            </a:r>
+          </a:p>
+          <a:p>
+            <a:endParaRPr/>
+          </a:p>
+          <a:p>
+            <a:r>
+              <a:t>Now the results. Steps 1 and 2: optimality criteria with sensitivity filtering. On the right, the classical design on top, the MTOP design in the middle, and their difference at the bottom.</a:t>
+            </a:r>
+          </a:p>
+          <a:p>
+            <a:r>
+              <a:t>The two layouts are the same truss. Physically: a top chord in compression near the load, a bottom chord in tension near the support, and a triangulated web carrying the shear toward the support. The difference plot is almost empty, just small boundary shifts, an RMS of three thousandths. Re-evaluated on the same fine mesh the compliances differ by 0.045 percent.</a:t>
+            </a:r>
+          </a:p>
+          <a:p>
+            <a:r>
+              <a:t>So MTOP does not change the design. I will hand over to Tiebert for how much faster it is.</a:t>
+            </a:r>
+          </a:p>
+        </p:txBody>
+      </p:sp>
+      <p:sp>
+        <p:nvSpPr>
+          <p:cNvPr id="4" name="Slide Number Placeholder 3"/>
+          <p:cNvSpPr>
+            <a:spLocks noGrp="1"/>
+          </p:cNvSpPr>
+          <p:nvPr>
+            <p:ph type="sldNum" sz="quarter" idx="5"/>
+          </p:nvPr>
+        </p:nvSpPr>
+        <p:spPr/>
+      </p:sp>
+    </p:spTree>
+  </p:cSld>
+  <p:clrMapOvr>
+    <a:masterClrMapping/>
+  </p:clrMapOvr>
+</p:notes>
+</file>
+
+<file path=ppt/notesSlides/notesSlide8.xml><?xml version="1.0" encoding="utf-8"?>
+<p:notes xmlns:a="http://schemas.openxmlformats.org/drawingml/2006/main" xmlns:r="http://schemas.openxmlformats.org/officeDocument/2006/relationships" xmlns:p="http://schemas.openxmlformats.org/presentationml/2006/main">
+  <p:cSld>
+    <p:spTree>
+      <p:nvGrpSpPr>
+        <p:cNvPr id="1" name=""/>
+        <p:cNvGrpSpPr/>
+        <p:nvPr/>
+      </p:nvGrpSpPr>
+      <p:grpSpPr>
+        <a:xfrm>
+          <a:off x="0" y="0"/>
+          <a:ext cx="0" cy="0"/>
+          <a:chOff x="0" y="0"/>
+          <a:chExt cx="0" cy="0"/>
+        </a:xfrm>
+      </p:grpSpPr>
+      <p:sp>
+        <p:nvSpPr>
+          <p:cNvPr id="2" name="Slide Image Placeholder 1"/>
+          <p:cNvSpPr>
+            <a:spLocks noGrp="1" noRot="1" noChangeAspect="1"/>
+          </p:cNvSpPr>
+          <p:nvPr>
+            <p:ph type="sldImg" idx="2"/>
+          </p:nvPr>
+        </p:nvSpPr>
+        <p:spPr/>
+      </p:sp>
+      <p:sp>
+        <p:nvSpPr>
+          <p:cNvPr id="3" name="Notes Placeholder 2"/>
+          <p:cNvSpPr>
+            <a:spLocks noGrp="1"/>
+          </p:cNvSpPr>
+          <p:nvPr>
+            <p:ph type="body" sz="quarter" idx="3"/>
+          </p:nvPr>
+        </p:nvSpPr>
+        <p:spPr/>
+        <p:txBody>
+          <a:bodyPr/>
+          <a:lstStyle/>
+          <a:p>
+            <a:r>
+              <a:t>PRESENTER: Tiebert   (takes over from Lukas)   |   Target ~45 s</a:t>
+            </a:r>
+          </a:p>
+          <a:p>
+            <a:endParaRPr/>
+          </a:p>
+          <a:p>
+            <a:r>
+              <a:t>Thanks. So the designs are identical, but the timing is not. This plot is compliance against wall-clock time - classical in blue, MTOP in orange.</a:t>
+            </a:r>
+          </a:p>
+          <a:p>
+            <a:r>
+              <a:t>It is worth stressing the iteration counts, 94 and 95: MTOP is not converging differently or cutting corners, it follows the same optimization path. But the classical run takes 263 seconds and the MTOP run takes 12 - a factor of 21. You can see the orange curve squeezed against the time axis.</a:t>
+            </a:r>
+          </a:p>
+          <a:p>
+            <a:r>
+              <a:t>Same design, same iteration count, each iteration simply cheaper: 21 times faster overall.</a:t>
+            </a:r>
+          </a:p>
+        </p:txBody>
+      </p:sp>
+      <p:sp>
+        <p:nvSpPr>
+          <p:cNvPr id="4" name="Slide Number Placeholder 3"/>
+          <p:cNvSpPr>
+            <a:spLocks noGrp="1"/>
+          </p:cNvSpPr>
+          <p:nvPr>
+            <p:ph type="sldNum" sz="quarter" idx="5"/>
+          </p:nvPr>
+        </p:nvSpPr>
+        <p:spPr/>
+      </p:sp>
+    </p:spTree>
+  </p:cSld>
+  <p:clrMapOvr>
+    <a:masterClrMapping/>
+  </p:clrMapOvr>
+</p:notes>
+</file>
+
+<file path=ppt/notesSlides/notesSlide9.xml><?xml version="1.0" encoding="utf-8"?>
+<p:notes xmlns:a="http://schemas.openxmlformats.org/drawingml/2006/main" xmlns:r="http://schemas.openxmlformats.org/officeDocument/2006/relationships" xmlns:p="http://schemas.openxmlformats.org/presentationml/2006/main">
+  <p:cSld>
+    <p:spTree>
+      <p:nvGrpSpPr>
+        <p:cNvPr id="1" name=""/>
+        <p:cNvGrpSpPr/>
+        <p:nvPr/>
+      </p:nvGrpSpPr>
+      <p:grpSpPr>
+        <a:xfrm>
+          <a:off x="0" y="0"/>
+          <a:ext cx="0" cy="0"/>
+          <a:chOff x="0" y="0"/>
+          <a:chExt cx="0" cy="0"/>
+        </a:xfrm>
+      </p:grpSpPr>
+      <p:sp>
+        <p:nvSpPr>
+          <p:cNvPr id="2" name="Slide Image Placeholder 1"/>
+          <p:cNvSpPr>
+            <a:spLocks noGrp="1" noRot="1" noChangeAspect="1"/>
+          </p:cNvSpPr>
+          <p:nvPr>
+            <p:ph type="sldImg" idx="2"/>
+          </p:nvPr>
+        </p:nvSpPr>
+        <p:spPr/>
+      </p:sp>
+      <p:sp>
+        <p:nvSpPr>
+          <p:cNvPr id="3" name="Notes Placeholder 2"/>
+          <p:cNvSpPr>
+            <a:spLocks noGrp="1"/>
+          </p:cNvSpPr>
+          <p:nvPr>
+            <p:ph type="body" sz="quarter" idx="3"/>
+          </p:nvPr>
+        </p:nvSpPr>
+        <p:spPr/>
+        <p:txBody>
+          <a:bodyPr/>
+          <a:lstStyle/>
+          <a:p>
+            <a:r>
               <a:t>PRESENTER: Tiebert   |   Target ~50 s</a:t>
             </a:r>
           </a:p>
-          <a:p/>
+          <a:p>
+            <a:endParaRPr/>
+          </a:p>
           <a:p>
             <a:r>
               <a:t>Step 3 repeats the comparison with a density filter instead of a sensitivity filter. The designs are again almost identical, 0.04 percent in compliance.</a:t>
@@ -1913,7 +2443,7 @@
             <a:spLocks noGrp="1"/>
           </p:cNvSpPr>
           <p:nvPr>
-            <p:ph type="sldNum" idx="5" sz="quarter"/>
+            <p:ph type="sldNum" sz="quarter" idx="5"/>
           </p:nvPr>
         </p:nvSpPr>
         <p:spPr/>
@@ -2648,7 +3178,7 @@
           <a:p>
             <a:fld id="{EA3A7081-D270-4FBF-AE40-A52D674243CC}" type="datetime1">
               <a:rPr lang="nl-BE" smtClean="0"/>
-              <a:t>29/11/2024</a:t>
+              <a:t>20/05/2026</a:t>
             </a:fld>
             <a:endParaRPr lang="nl-NL"/>
           </a:p>
@@ -2693,7 +3223,7 @@
           <a:p>
             <a:fld id="{CF179DAE-D0A6-40C3-B8BC-6A97C268D03A}" type="slidenum">
               <a:rPr lang="nl-NL" smtClean="0"/>
-              <a:t>‹nr.›</a:t>
+              <a:t>‹#›</a:t>
             </a:fld>
             <a:endParaRPr lang="nl-NL"/>
           </a:p>
@@ -2931,7 +3461,7 @@
           <a:p>
             <a:fld id="{5C69415A-EEF6-439C-A913-189A8C067023}" type="datetime1">
               <a:rPr lang="nl-BE" smtClean="0"/>
-              <a:t>29/11/2024</a:t>
+              <a:t>20/05/2026</a:t>
             </a:fld>
             <a:endParaRPr lang="nl-NL"/>
           </a:p>
@@ -2976,7 +3506,7 @@
           <a:p>
             <a:fld id="{CF179DAE-D0A6-40C3-B8BC-6A97C268D03A}" type="slidenum">
               <a:rPr lang="nl-NL" smtClean="0"/>
-              <a:t>‹nr.›</a:t>
+              <a:t>‹#›</a:t>
             </a:fld>
             <a:endParaRPr lang="nl-NL"/>
           </a:p>
@@ -3261,7 +3791,7 @@
           <a:p>
             <a:fld id="{AA7DF125-8D2F-407C-A946-0B214A077F46}" type="datetime1">
               <a:rPr lang="nl-BE" smtClean="0"/>
-              <a:t>29/11/2024</a:t>
+              <a:t>20/05/2026</a:t>
             </a:fld>
             <a:endParaRPr lang="nl-NL"/>
           </a:p>
@@ -3306,7 +3836,7 @@
           <a:p>
             <a:fld id="{0A297500-7527-634B-90F4-69D0994C32B4}" type="slidenum">
               <a:rPr lang="nl-NL" smtClean="0"/>
-              <a:t>‹nr.›</a:t>
+              <a:t>‹#›</a:t>
             </a:fld>
             <a:endParaRPr lang="nl-NL"/>
           </a:p>
@@ -3580,7 +4110,7 @@
           <a:p>
             <a:fld id="{FE566779-A426-4C6E-B33F-12BA9B572EC4}" type="datetime1">
               <a:rPr lang="nl-BE" smtClean="0"/>
-              <a:t>29/11/2024</a:t>
+              <a:t>20/05/2026</a:t>
             </a:fld>
             <a:endParaRPr lang="nl-NL" dirty="0"/>
           </a:p>
@@ -3625,7 +4155,7 @@
           <a:p>
             <a:fld id="{0A297500-7527-634B-90F4-69D0994C32B4}" type="slidenum">
               <a:rPr lang="nl-NL" smtClean="0"/>
-              <a:t>‹nr.›</a:t>
+              <a:t>‹#›</a:t>
             </a:fld>
             <a:endParaRPr lang="nl-NL"/>
           </a:p>
@@ -3901,7 +4431,7 @@
           <a:p>
             <a:fld id="{E40DF61B-1080-4D20-8EAC-F5AC55182461}" type="datetime1">
               <a:rPr lang="nl-BE" smtClean="0"/>
-              <a:t>29/11/2024</a:t>
+              <a:t>20/05/2026</a:t>
             </a:fld>
             <a:endParaRPr lang="nl-NL" dirty="0"/>
           </a:p>
@@ -3946,7 +4476,7 @@
           <a:p>
             <a:fld id="{0A297500-7527-634B-90F4-69D0994C32B4}" type="slidenum">
               <a:rPr lang="nl-NL" smtClean="0"/>
-              <a:t>‹nr.›</a:t>
+              <a:t>‹#›</a:t>
             </a:fld>
             <a:endParaRPr lang="nl-NL"/>
           </a:p>
@@ -4043,7 +4573,7 @@
           <a:p>
             <a:fld id="{94A4F625-24B7-4F40-98BC-AFA043082CE9}" type="datetime1">
               <a:rPr lang="nl-BE" smtClean="0"/>
-              <a:t>29/11/2024</a:t>
+              <a:t>20/05/2026</a:t>
             </a:fld>
             <a:endParaRPr lang="nl-NL"/>
           </a:p>
@@ -4088,7 +4618,7 @@
           <a:p>
             <a:fld id="{0A297500-7527-634B-90F4-69D0994C32B4}" type="slidenum">
               <a:rPr lang="nl-NL" smtClean="0"/>
-              <a:t>‹nr.›</a:t>
+              <a:t>‹#›</a:t>
             </a:fld>
             <a:endParaRPr lang="nl-NL"/>
           </a:p>
@@ -4527,7 +5057,7 @@
           <a:p>
             <a:fld id="{292342B6-1303-46D4-9581-5E95FC0B22E4}" type="datetime1">
               <a:rPr lang="nl-BE" smtClean="0"/>
-              <a:t>29/11/2024</a:t>
+              <a:t>20/05/2026</a:t>
             </a:fld>
             <a:endParaRPr lang="nl-NL" dirty="0"/>
           </a:p>
@@ -4572,7 +5102,7 @@
           <a:p>
             <a:fld id="{0A297500-7527-634B-90F4-69D0994C32B4}" type="slidenum">
               <a:rPr lang="nl-NL" smtClean="0"/>
-              <a:t>‹nr.›</a:t>
+              <a:t>‹#›</a:t>
             </a:fld>
             <a:endParaRPr lang="nl-NL"/>
           </a:p>
@@ -4648,7 +5178,7 @@
           <a:p>
             <a:fld id="{A76F3976-FDFC-4D8C-ACD3-BCE6A597C36A}" type="datetime1">
               <a:rPr lang="nl-BE" smtClean="0"/>
-              <a:t>29/11/2024</a:t>
+              <a:t>20/05/2026</a:t>
             </a:fld>
             <a:endParaRPr lang="nl-NL"/>
           </a:p>
@@ -4693,7 +5223,7 @@
           <a:p>
             <a:fld id="{0A297500-7527-634B-90F4-69D0994C32B4}" type="slidenum">
               <a:rPr lang="nl-NL" smtClean="0"/>
-              <a:t>‹nr.›</a:t>
+              <a:t>‹#›</a:t>
             </a:fld>
             <a:endParaRPr lang="nl-NL"/>
           </a:p>
@@ -4769,7 +5299,7 @@
           <a:p>
             <a:fld id="{5ADFEA79-DE61-4EF0-8C65-B83CEE2687EB}" type="datetime1">
               <a:rPr lang="nl-BE" smtClean="0"/>
-              <a:t>29/11/2024</a:t>
+              <a:t>20/05/2026</a:t>
             </a:fld>
             <a:endParaRPr lang="nl-NL"/>
           </a:p>
@@ -4814,7 +5344,7 @@
           <a:p>
             <a:fld id="{0A297500-7527-634B-90F4-69D0994C32B4}" type="slidenum">
               <a:rPr lang="nl-NL" smtClean="0"/>
-              <a:t>‹nr.›</a:t>
+              <a:t>‹#›</a:t>
             </a:fld>
             <a:endParaRPr lang="nl-NL"/>
           </a:p>
@@ -4951,7 +5481,7 @@
           <a:p>
             <a:fld id="{FA2EC5B9-2DE2-43DC-AAE2-5679419BAC4A}" type="datetime1">
               <a:rPr lang="nl-BE" smtClean="0"/>
-              <a:t>29/11/2024</a:t>
+              <a:t>20/05/2026</a:t>
             </a:fld>
             <a:endParaRPr lang="nl-NL" dirty="0"/>
           </a:p>
@@ -4996,7 +5526,7 @@
           <a:p>
             <a:fld id="{0A297500-7527-634B-90F4-69D0994C32B4}" type="slidenum">
               <a:rPr lang="nl-NL" smtClean="0"/>
-              <a:t>‹nr.›</a:t>
+              <a:t>‹#›</a:t>
             </a:fld>
             <a:endParaRPr lang="nl-NL"/>
           </a:p>
@@ -5235,7 +5765,7 @@
           <a:p>
             <a:fld id="{BB46EC33-4D1A-4426-91DF-270C2E654CCE}" type="datetime1">
               <a:rPr lang="nl-BE" smtClean="0"/>
-              <a:t>29/11/2024</a:t>
+              <a:t>20/05/2026</a:t>
             </a:fld>
             <a:endParaRPr lang="nl-NL" dirty="0"/>
           </a:p>
@@ -5316,7 +5846,7 @@
             <a:fld id="{0A297500-7527-634B-90F4-69D0994C32B4}" type="slidenum">
               <a:rPr lang="nl-NL" smtClean="0"/>
               <a:pPr/>
-              <a:t>‹nr.›</a:t>
+              <a:t>‹#›</a:t>
             </a:fld>
             <a:endParaRPr lang="nl-NL" dirty="0"/>
           </a:p>
@@ -5876,7 +6406,7 @@
           <a:p>
             <a:fld id="{48C250A7-EEA6-4BD5-AB95-D7BF57F3506B}" type="datetime1">
               <a:rPr lang="nl-BE" smtClean="0"/>
-              <a:t>29/11/2024</a:t>
+              <a:t>20/05/2026</a:t>
             </a:fld>
             <a:endParaRPr lang="nl-NL" dirty="0"/>
           </a:p>
@@ -5957,7 +6487,7 @@
             <a:fld id="{0A297500-7527-634B-90F4-69D0994C32B4}" type="slidenum">
               <a:rPr lang="nl-NL" smtClean="0"/>
               <a:pPr/>
-              <a:t>‹nr.›</a:t>
+              <a:t>‹#›</a:t>
             </a:fld>
             <a:endParaRPr lang="nl-NL" dirty="0"/>
           </a:p>
@@ -6261,7 +6791,7 @@
 </file>
 
 <file path=ppt/slides/slide1.xml><?xml version="1.0" encoding="utf-8"?>
-<p:sld xmlns:a="http://schemas.openxmlformats.org/drawingml/2006/main" xmlns:p="http://schemas.openxmlformats.org/presentationml/2006/main" xmlns:r="http://schemas.openxmlformats.org/officeDocument/2006/relationships">
+<p:sld xmlns:a="http://schemas.openxmlformats.org/drawingml/2006/main" xmlns:r="http://schemas.openxmlformats.org/officeDocument/2006/relationships" xmlns:p="http://schemas.openxmlformats.org/presentationml/2006/main">
   <p:cSld>
     <p:spTree>
       <p:nvGrpSpPr>
@@ -6269,7 +6799,14 @@
         <p:cNvGrpSpPr/>
         <p:nvPr/>
       </p:nvGrpSpPr>
-      <p:grpSpPr/>
+      <p:grpSpPr>
+        <a:xfrm>
+          <a:off x="0" y="0"/>
+          <a:ext cx="0" cy="0"/>
+          <a:chOff x="0" y="0"/>
+          <a:chExt cx="0" cy="0"/>
+        </a:xfrm>
+      </p:grpSpPr>
       <p:sp>
         <p:nvSpPr>
           <p:cNvPr id="2" name="Title 1"/>
@@ -6366,7 +6903,7 @@
           <p:nvPr/>
         </p:nvPicPr>
         <p:blipFill>
-          <a:blip r:embed="rId2"/>
+          <a:blip r:embed="rId3"/>
           <a:stretch>
             <a:fillRect/>
           </a:stretch>
@@ -6390,7 +6927,7 @@
 </file>
 
 <file path=ppt/slides/slide10.xml><?xml version="1.0" encoding="utf-8"?>
-<p:sld xmlns:a="http://schemas.openxmlformats.org/drawingml/2006/main" xmlns:p="http://schemas.openxmlformats.org/presentationml/2006/main" xmlns:r="http://schemas.openxmlformats.org/officeDocument/2006/relationships">
+<p:sld xmlns:a="http://schemas.openxmlformats.org/drawingml/2006/main" xmlns:r="http://schemas.openxmlformats.org/officeDocument/2006/relationships" xmlns:p="http://schemas.openxmlformats.org/presentationml/2006/main">
   <p:cSld>
     <p:spTree>
       <p:nvGrpSpPr>
@@ -6398,7 +6935,14 @@
         <p:cNvGrpSpPr/>
         <p:nvPr/>
       </p:nvGrpSpPr>
-      <p:grpSpPr/>
+      <p:grpSpPr>
+        <a:xfrm>
+          <a:off x="0" y="0"/>
+          <a:ext cx="0" cy="0"/>
+          <a:chOff x="0" y="0"/>
+          <a:chExt cx="0" cy="0"/>
+        </a:xfrm>
+      </p:grpSpPr>
       <p:sp>
         <p:nvSpPr>
           <p:cNvPr id="2" name="Content Placeholder 1"/>
@@ -6549,7 +7093,7 @@
           <a:noFill/>
         </p:spPr>
         <p:txBody>
-          <a:bodyPr wrap="square" anchor="t" lIns="36000" rIns="36000" tIns="18000" bIns="18000">
+          <a:bodyPr wrap="square" lIns="36000" tIns="18000" rIns="36000" bIns="18000" anchor="t">
             <a:spAutoFit/>
           </a:bodyPr>
           <a:lstStyle/>
@@ -6575,7 +7119,7 @@
           <p:nvPr/>
         </p:nvPicPr>
         <p:blipFill>
-          <a:blip r:embed="rId2"/>
+          <a:blip r:embed="rId3"/>
           <a:stretch>
             <a:fillRect/>
           </a:stretch>
@@ -6607,7 +7151,7 @@
           <a:noFill/>
         </p:spPr>
         <p:txBody>
-          <a:bodyPr wrap="square" anchor="t" lIns="36000" rIns="36000" tIns="18000" bIns="18000">
+          <a:bodyPr wrap="square" lIns="36000" tIns="18000" rIns="36000" bIns="18000" anchor="t">
             <a:spAutoFit/>
           </a:bodyPr>
           <a:lstStyle/>
@@ -6633,7 +7177,7 @@
           <p:nvPr/>
         </p:nvPicPr>
         <p:blipFill>
-          <a:blip r:embed="rId3"/>
+          <a:blip r:embed="rId4"/>
           <a:stretch>
             <a:fillRect/>
           </a:stretch>
@@ -6665,7 +7209,7 @@
           <a:noFill/>
         </p:spPr>
         <p:txBody>
-          <a:bodyPr wrap="square" anchor="t" lIns="36000" rIns="36000" tIns="18000" bIns="18000">
+          <a:bodyPr wrap="square" lIns="36000" tIns="18000" rIns="36000" bIns="18000" anchor="t">
             <a:spAutoFit/>
           </a:bodyPr>
           <a:lstStyle/>
@@ -6691,7 +7235,7 @@
           <p:nvPr/>
         </p:nvPicPr>
         <p:blipFill>
-          <a:blip r:embed="rId4"/>
+          <a:blip r:embed="rId5"/>
           <a:stretch>
             <a:fillRect/>
           </a:stretch>
@@ -6723,7 +7267,7 @@
           <a:noFill/>
         </p:spPr>
         <p:txBody>
-          <a:bodyPr wrap="square" anchor="ctr" lIns="36000" rIns="36000" tIns="18000" bIns="18000">
+          <a:bodyPr wrap="square" lIns="36000" tIns="18000" rIns="36000" bIns="18000" anchor="ctr">
             <a:spAutoFit/>
           </a:bodyPr>
           <a:lstStyle/>
@@ -6757,7 +7301,7 @@
           <a:noFill/>
         </p:spPr>
         <p:txBody>
-          <a:bodyPr wrap="square" anchor="ctr" lIns="36000" rIns="36000" tIns="18000" bIns="18000">
+          <a:bodyPr wrap="square" lIns="36000" tIns="18000" rIns="36000" bIns="18000" anchor="ctr">
             <a:spAutoFit/>
           </a:bodyPr>
           <a:lstStyle/>
@@ -6783,7 +7327,7 @@
 </file>
 
 <file path=ppt/slides/slide11.xml><?xml version="1.0" encoding="utf-8"?>
-<p:sld xmlns:a="http://schemas.openxmlformats.org/drawingml/2006/main" xmlns:p="http://schemas.openxmlformats.org/presentationml/2006/main" xmlns:r="http://schemas.openxmlformats.org/officeDocument/2006/relationships">
+<p:sld xmlns:a="http://schemas.openxmlformats.org/drawingml/2006/main" xmlns:r="http://schemas.openxmlformats.org/officeDocument/2006/relationships" xmlns:p="http://schemas.openxmlformats.org/presentationml/2006/main">
   <p:cSld>
     <p:spTree>
       <p:nvGrpSpPr>
@@ -6791,7 +7335,14 @@
         <p:cNvGrpSpPr/>
         <p:nvPr/>
       </p:nvGrpSpPr>
-      <p:grpSpPr/>
+      <p:grpSpPr>
+        <a:xfrm>
+          <a:off x="0" y="0"/>
+          <a:ext cx="0" cy="0"/>
+          <a:chOff x="0" y="0"/>
+          <a:chExt cx="0" cy="0"/>
+        </a:xfrm>
+      </p:grpSpPr>
       <p:sp>
         <p:nvSpPr>
           <p:cNvPr id="2" name="Content Placeholder 1"/>
@@ -6916,7 +7467,7 @@
           <p:nvPr/>
         </p:nvPicPr>
         <p:blipFill>
-          <a:blip r:embed="rId2"/>
+          <a:blip r:embed="rId3"/>
           <a:stretch>
             <a:fillRect/>
           </a:stretch>
@@ -6948,7 +7499,7 @@
           <a:noFill/>
         </p:spPr>
         <p:txBody>
-          <a:bodyPr wrap="square" anchor="ctr" lIns="36000" rIns="36000" tIns="18000" bIns="18000">
+          <a:bodyPr wrap="square" lIns="36000" tIns="18000" rIns="36000" bIns="18000" anchor="ctr">
             <a:spAutoFit/>
           </a:bodyPr>
           <a:lstStyle/>
@@ -6982,7 +7533,7 @@
           <a:noFill/>
         </p:spPr>
         <p:txBody>
-          <a:bodyPr wrap="square" anchor="ctr" lIns="36000" rIns="36000" tIns="18000" bIns="18000">
+          <a:bodyPr wrap="square" lIns="36000" tIns="18000" rIns="36000" bIns="18000" anchor="ctr">
             <a:spAutoFit/>
           </a:bodyPr>
           <a:lstStyle/>
@@ -7008,7 +7559,7 @@
 </file>
 
 <file path=ppt/slides/slide12.xml><?xml version="1.0" encoding="utf-8"?>
-<p:sld xmlns:a="http://schemas.openxmlformats.org/drawingml/2006/main" xmlns:p="http://schemas.openxmlformats.org/presentationml/2006/main" xmlns:r="http://schemas.openxmlformats.org/officeDocument/2006/relationships">
+<p:sld xmlns:a="http://schemas.openxmlformats.org/drawingml/2006/main" xmlns:r="http://schemas.openxmlformats.org/officeDocument/2006/relationships" xmlns:p="http://schemas.openxmlformats.org/presentationml/2006/main">
   <p:cSld>
     <p:spTree>
       <p:nvGrpSpPr>
@@ -7016,7 +7567,14 @@
         <p:cNvGrpSpPr/>
         <p:nvPr/>
       </p:nvGrpSpPr>
-      <p:grpSpPr/>
+      <p:grpSpPr>
+        <a:xfrm>
+          <a:off x="0" y="0"/>
+          <a:ext cx="0" cy="0"/>
+          <a:chOff x="0" y="0"/>
+          <a:chExt cx="0" cy="0"/>
+        </a:xfrm>
+      </p:grpSpPr>
       <p:sp>
         <p:nvSpPr>
           <p:cNvPr id="2" name="Content Placeholder 1"/>
@@ -7141,7 +7699,7 @@
           <p:nvPr/>
         </p:nvPicPr>
         <p:blipFill>
-          <a:blip r:embed="rId2"/>
+          <a:blip r:embed="rId3"/>
           <a:stretch>
             <a:fillRect/>
           </a:stretch>
@@ -7173,7 +7731,7 @@
           <a:noFill/>
         </p:spPr>
         <p:txBody>
-          <a:bodyPr wrap="square" anchor="t" lIns="36000" rIns="36000" tIns="18000" bIns="18000">
+          <a:bodyPr wrap="square" lIns="36000" tIns="18000" rIns="36000" bIns="18000" anchor="t">
             <a:spAutoFit/>
           </a:bodyPr>
           <a:lstStyle/>
@@ -7207,7 +7765,7 @@
           <a:noFill/>
         </p:spPr>
         <p:txBody>
-          <a:bodyPr wrap="square" anchor="ctr" lIns="36000" rIns="36000" tIns="18000" bIns="18000">
+          <a:bodyPr wrap="square" lIns="36000" tIns="18000" rIns="36000" bIns="18000" anchor="ctr">
             <a:spAutoFit/>
           </a:bodyPr>
           <a:lstStyle/>
@@ -7241,7 +7799,7 @@
           <a:noFill/>
         </p:spPr>
         <p:txBody>
-          <a:bodyPr wrap="square" anchor="ctr" lIns="36000" rIns="36000" tIns="18000" bIns="18000">
+          <a:bodyPr wrap="square" lIns="36000" tIns="18000" rIns="36000" bIns="18000" anchor="ctr">
             <a:spAutoFit/>
           </a:bodyPr>
           <a:lstStyle/>
@@ -7267,7 +7825,7 @@
 </file>
 
 <file path=ppt/slides/slide13.xml><?xml version="1.0" encoding="utf-8"?>
-<p:sld xmlns:a="http://schemas.openxmlformats.org/drawingml/2006/main" xmlns:p="http://schemas.openxmlformats.org/presentationml/2006/main" xmlns:r="http://schemas.openxmlformats.org/officeDocument/2006/relationships">
+<p:sld xmlns:a="http://schemas.openxmlformats.org/drawingml/2006/main" xmlns:r="http://schemas.openxmlformats.org/officeDocument/2006/relationships" xmlns:p="http://schemas.openxmlformats.org/presentationml/2006/main">
   <p:cSld>
     <p:spTree>
       <p:nvGrpSpPr>
@@ -7275,7 +7833,14 @@
         <p:cNvGrpSpPr/>
         <p:nvPr/>
       </p:nvGrpSpPr>
-      <p:grpSpPr/>
+      <p:grpSpPr>
+        <a:xfrm>
+          <a:off x="0" y="0"/>
+          <a:ext cx="0" cy="0"/>
+          <a:chOff x="0" y="0"/>
+          <a:chExt cx="0" cy="0"/>
+        </a:xfrm>
+      </p:grpSpPr>
       <p:sp>
         <p:nvSpPr>
           <p:cNvPr id="2" name="Content Placeholder 1"/>
@@ -7418,7 +7983,7 @@
           <p:nvPr/>
         </p:nvPicPr>
         <p:blipFill>
-          <a:blip r:embed="rId2"/>
+          <a:blip r:embed="rId3"/>
           <a:stretch>
             <a:fillRect/>
           </a:stretch>
@@ -7450,7 +8015,7 @@
           <a:noFill/>
         </p:spPr>
         <p:txBody>
-          <a:bodyPr wrap="square" anchor="ctr" lIns="36000" rIns="36000" tIns="18000" bIns="18000">
+          <a:bodyPr wrap="square" lIns="36000" tIns="18000" rIns="36000" bIns="18000" anchor="ctr">
             <a:spAutoFit/>
           </a:bodyPr>
           <a:lstStyle/>
@@ -7484,7 +8049,7 @@
           <a:noFill/>
         </p:spPr>
         <p:txBody>
-          <a:bodyPr wrap="square" anchor="ctr" lIns="36000" rIns="36000" tIns="18000" bIns="18000">
+          <a:bodyPr wrap="square" lIns="36000" tIns="18000" rIns="36000" bIns="18000" anchor="ctr">
             <a:spAutoFit/>
           </a:bodyPr>
           <a:lstStyle/>
@@ -7510,7 +8075,7 @@
 </file>
 
 <file path=ppt/slides/slide14.xml><?xml version="1.0" encoding="utf-8"?>
-<p:sld xmlns:a="http://schemas.openxmlformats.org/drawingml/2006/main" xmlns:p="http://schemas.openxmlformats.org/presentationml/2006/main" xmlns:r="http://schemas.openxmlformats.org/officeDocument/2006/relationships">
+<p:sld xmlns:a="http://schemas.openxmlformats.org/drawingml/2006/main" xmlns:r="http://schemas.openxmlformats.org/officeDocument/2006/relationships" xmlns:p="http://schemas.openxmlformats.org/presentationml/2006/main">
   <p:cSld>
     <p:spTree>
       <p:nvGrpSpPr>
@@ -7518,7 +8083,14 @@
         <p:cNvGrpSpPr/>
         <p:nvPr/>
       </p:nvGrpSpPr>
-      <p:grpSpPr/>
+      <p:grpSpPr>
+        <a:xfrm>
+          <a:off x="0" y="0"/>
+          <a:ext cx="0" cy="0"/>
+          <a:chOff x="0" y="0"/>
+          <a:chExt cx="0" cy="0"/>
+        </a:xfrm>
+      </p:grpSpPr>
       <p:sp>
         <p:nvSpPr>
           <p:cNvPr id="2" name="Content Placeholder 1"/>
@@ -7619,7 +8191,7 @@
             <a:spLocks noGrp="1"/>
           </p:cNvSpPr>
           <p:nvPr>
-            <p:ph idx="13" sz="quarter"/>
+            <p:ph sz="quarter" idx="13"/>
           </p:nvPr>
         </p:nvSpPr>
         <p:spPr>
@@ -7744,7 +8316,7 @@
           <a:noFill/>
         </p:spPr>
         <p:txBody>
-          <a:bodyPr wrap="square" anchor="ctr" lIns="36000" rIns="36000" tIns="18000" bIns="18000">
+          <a:bodyPr wrap="square" lIns="36000" tIns="18000" rIns="36000" bIns="18000" anchor="ctr">
             <a:spAutoFit/>
           </a:bodyPr>
           <a:lstStyle/>
@@ -7778,7 +8350,7 @@
           <a:noFill/>
         </p:spPr>
         <p:txBody>
-          <a:bodyPr wrap="square" anchor="ctr" lIns="36000" rIns="36000" tIns="18000" bIns="18000">
+          <a:bodyPr wrap="square" lIns="36000" tIns="18000" rIns="36000" bIns="18000" anchor="ctr">
             <a:spAutoFit/>
           </a:bodyPr>
           <a:lstStyle/>
@@ -7804,7 +8376,7 @@
 </file>
 
 <file path=ppt/slides/slide15.xml><?xml version="1.0" encoding="utf-8"?>
-<p:sld xmlns:a="http://schemas.openxmlformats.org/drawingml/2006/main" xmlns:p="http://schemas.openxmlformats.org/presentationml/2006/main" xmlns:r="http://schemas.openxmlformats.org/officeDocument/2006/relationships">
+<p:sld xmlns:a="http://schemas.openxmlformats.org/drawingml/2006/main" xmlns:r="http://schemas.openxmlformats.org/officeDocument/2006/relationships" xmlns:p="http://schemas.openxmlformats.org/presentationml/2006/main">
   <p:cSld>
     <p:spTree>
       <p:nvGrpSpPr>
@@ -7812,7 +8384,14 @@
         <p:cNvGrpSpPr/>
         <p:nvPr/>
       </p:nvGrpSpPr>
-      <p:grpSpPr/>
+      <p:grpSpPr>
+        <a:xfrm>
+          <a:off x="0" y="0"/>
+          <a:ext cx="0" cy="0"/>
+          <a:chOff x="0" y="0"/>
+          <a:chExt cx="0" cy="0"/>
+        </a:xfrm>
+      </p:grpSpPr>
       <p:sp>
         <p:nvSpPr>
           <p:cNvPr id="2" name="Content Placeholder 1"/>
@@ -7913,7 +8492,7 @@
             <a:spLocks noGrp="1"/>
           </p:cNvSpPr>
           <p:nvPr>
-            <p:ph idx="13" sz="quarter"/>
+            <p:ph sz="quarter" idx="13"/>
           </p:nvPr>
         </p:nvSpPr>
         <p:spPr>
@@ -8038,7 +8617,7 @@
           <a:noFill/>
         </p:spPr>
         <p:txBody>
-          <a:bodyPr wrap="square" anchor="ctr" lIns="36000" rIns="36000" tIns="18000" bIns="18000">
+          <a:bodyPr wrap="square" lIns="36000" tIns="18000" rIns="36000" bIns="18000" anchor="ctr">
             <a:spAutoFit/>
           </a:bodyPr>
           <a:lstStyle/>
@@ -8072,7 +8651,7 @@
           <a:noFill/>
         </p:spPr>
         <p:txBody>
-          <a:bodyPr wrap="square" anchor="ctr" lIns="36000" rIns="36000" tIns="18000" bIns="18000">
+          <a:bodyPr wrap="square" lIns="36000" tIns="18000" rIns="36000" bIns="18000" anchor="ctr">
             <a:spAutoFit/>
           </a:bodyPr>
           <a:lstStyle/>
@@ -8106,7 +8685,7 @@
           <a:noFill/>
         </p:spPr>
         <p:txBody>
-          <a:bodyPr wrap="square" anchor="ctr" lIns="36000" rIns="36000" tIns="18000" bIns="18000">
+          <a:bodyPr wrap="square" lIns="36000" tIns="18000" rIns="36000" bIns="18000" anchor="ctr">
             <a:spAutoFit/>
           </a:bodyPr>
           <a:lstStyle/>
@@ -8119,6 +8698,1311 @@
                 </a:solidFill>
               </a:rPr>
               <a:t>15</a:t>
+            </a:r>
+          </a:p>
+        </p:txBody>
+      </p:sp>
+    </p:spTree>
+  </p:cSld>
+  <p:clrMapOvr>
+    <a:masterClrMapping/>
+  </p:clrMapOvr>
+</p:sld>
+</file>
+
+<file path=ppt/slides/slide16.xml><?xml version="1.0" encoding="utf-8"?>
+<p:sld xmlns:a="http://schemas.openxmlformats.org/drawingml/2006/main" xmlns:r="http://schemas.openxmlformats.org/officeDocument/2006/relationships" xmlns:p="http://schemas.openxmlformats.org/presentationml/2006/main">
+  <p:cSld>
+    <p:spTree>
+      <p:nvGrpSpPr>
+        <p:cNvPr id="1" name=""/>
+        <p:cNvGrpSpPr/>
+        <p:nvPr/>
+      </p:nvGrpSpPr>
+      <p:grpSpPr>
+        <a:xfrm>
+          <a:off x="0" y="0"/>
+          <a:ext cx="0" cy="0"/>
+          <a:chOff x="0" y="0"/>
+          <a:chExt cx="0" cy="0"/>
+        </a:xfrm>
+      </p:grpSpPr>
+      <p:sp>
+        <p:nvSpPr>
+          <p:cNvPr id="2" name="Title 1"/>
+          <p:cNvSpPr>
+            <a:spLocks noGrp="1"/>
+          </p:cNvSpPr>
+          <p:nvPr>
+            <p:ph type="title"/>
+          </p:nvPr>
+        </p:nvSpPr>
+        <p:spPr/>
+        <p:txBody>
+          <a:bodyPr/>
+          <a:lstStyle/>
+          <a:p>
+            <a:r>
+              <a:t>Appendix</a:t>
+            </a:r>
+          </a:p>
+        </p:txBody>
+      </p:sp>
+      <p:sp>
+        <p:nvSpPr>
+          <p:cNvPr id="3" name="TextBox 2"/>
+          <p:cNvSpPr txBox="1"/>
+          <p:nvPr/>
+        </p:nvSpPr>
+        <p:spPr>
+          <a:xfrm>
+            <a:off x="576000" y="4050000"/>
+            <a:ext cx="11040000" cy="520000"/>
+          </a:xfrm>
+          <a:prstGeom prst="rect">
+            <a:avLst/>
+          </a:prstGeom>
+          <a:noFill/>
+        </p:spPr>
+        <p:txBody>
+          <a:bodyPr wrap="square" lIns="36000" tIns="18000" rIns="36000" bIns="18000" anchor="ctr">
+            <a:spAutoFit/>
+          </a:bodyPr>
+          <a:lstStyle/>
+          <a:p>
+            <a:pPr algn="ctr"/>
+            <a:r>
+              <a:rPr sz="2000" b="0">
+                <a:solidFill>
+                  <a:srgbClr val="FFFFFF"/>
+                </a:solidFill>
+              </a:rPr>
+              <a:t>Backup slides for the discussion</a:t>
+            </a:r>
+          </a:p>
+        </p:txBody>
+      </p:sp>
+    </p:spTree>
+  </p:cSld>
+  <p:clrMapOvr>
+    <a:masterClrMapping/>
+  </p:clrMapOvr>
+</p:sld>
+</file>
+
+<file path=ppt/slides/slide17.xml><?xml version="1.0" encoding="utf-8"?>
+<p:sld xmlns:a="http://schemas.openxmlformats.org/drawingml/2006/main" xmlns:r="http://schemas.openxmlformats.org/officeDocument/2006/relationships" xmlns:p="http://schemas.openxmlformats.org/presentationml/2006/main">
+  <p:cSld>
+    <p:spTree>
+      <p:nvGrpSpPr>
+        <p:cNvPr id="1" name=""/>
+        <p:cNvGrpSpPr/>
+        <p:nvPr/>
+      </p:nvGrpSpPr>
+      <p:grpSpPr>
+        <a:xfrm>
+          <a:off x="0" y="0"/>
+          <a:ext cx="0" cy="0"/>
+          <a:chOff x="0" y="0"/>
+          <a:chExt cx="0" cy="0"/>
+        </a:xfrm>
+      </p:grpSpPr>
+      <p:sp>
+        <p:nvSpPr>
+          <p:cNvPr id="4" name="Title 3"/>
+          <p:cNvSpPr>
+            <a:spLocks noGrp="1"/>
+          </p:cNvSpPr>
+          <p:nvPr>
+            <p:ph type="title"/>
+          </p:nvPr>
+        </p:nvSpPr>
+        <p:spPr/>
+        <p:txBody>
+          <a:bodyPr/>
+          <a:lstStyle/>
+          <a:p>
+            <a:r>
+              <a:rPr sz="3200"/>
+              <a:t>Appendix: problem formulation and SIMP</a:t>
+            </a:r>
+          </a:p>
+        </p:txBody>
+      </p:sp>
+      <p:sp>
+        <p:nvSpPr>
+          <p:cNvPr id="5" name="TextBox 4"/>
+          <p:cNvSpPr txBox="1"/>
+          <p:nvPr/>
+        </p:nvSpPr>
+        <p:spPr>
+          <a:xfrm>
+            <a:off x="576000" y="1410000"/>
+            <a:ext cx="5500000" cy="4740000"/>
+          </a:xfrm>
+          <a:prstGeom prst="rect">
+            <a:avLst/>
+          </a:prstGeom>
+          <a:noFill/>
+        </p:spPr>
+        <p:txBody>
+          <a:bodyPr wrap="square" lIns="36000" rIns="36000" anchor="t">
+            <a:spAutoFit/>
+          </a:bodyPr>
+          <a:lstStyle/>
+          <a:p>
+            <a:pPr>
+              <a:spcAft>
+                <a:spcPts val="400"/>
+              </a:spcAft>
+            </a:pPr>
+            <a:r>
+              <a:rPr sz="1800" b="1">
+                <a:solidFill>
+                  <a:srgbClr val="1D8DB0"/>
+                </a:solidFill>
+              </a:rPr>
+              <a:t>Minimum-compliance problem</a:t>
+            </a:r>
+          </a:p>
+          <a:p>
+            <a:pPr>
+              <a:spcAft>
+                <a:spcPts val="400"/>
+              </a:spcAft>
+            </a:pPr>
+            <a:r>
+              <a:rPr sz="1500" b="0">
+                <a:solidFill>
+                  <a:srgbClr val="2F4D5D"/>
+                </a:solidFill>
+              </a:rPr>
+              <a:t>minimize   C(x) = f^T u(ρ)</a:t>
+            </a:r>
+          </a:p>
+          <a:p>
+            <a:pPr>
+              <a:spcAft>
+                <a:spcPts val="400"/>
+              </a:spcAft>
+            </a:pPr>
+            <a:r>
+              <a:rPr sz="1500" b="0">
+                <a:solidFill>
+                  <a:srgbClr val="2F4D5D"/>
+                </a:solidFill>
+              </a:rPr>
+              <a:t>subject to   K(ρ) u = f</a:t>
+            </a:r>
+          </a:p>
+          <a:p>
+            <a:pPr>
+              <a:spcAft>
+                <a:spcPts val="400"/>
+              </a:spcAft>
+            </a:pPr>
+            <a:r>
+              <a:rPr sz="1500" b="0">
+                <a:solidFill>
+                  <a:srgbClr val="2F4D5D"/>
+                </a:solidFill>
+              </a:rPr>
+              <a:t>and   mean density ≤ V* = 0.5</a:t>
+            </a:r>
+          </a:p>
+          <a:p>
+            <a:pPr>
+              <a:spcAft>
+                <a:spcPts val="400"/>
+              </a:spcAft>
+            </a:pPr>
+            <a:r>
+              <a:rPr sz="1300" b="0">
+                <a:solidFill>
+                  <a:srgbClr val="2F4D5D"/>
+                </a:solidFill>
+              </a:rPr>
+              <a:t>design variable x in [0,1] per density cell</a:t>
+            </a:r>
+          </a:p>
+          <a:p>
+            <a:pPr>
+              <a:spcBef>
+                <a:spcPts val="1200"/>
+              </a:spcBef>
+              <a:spcAft>
+                <a:spcPts val="400"/>
+              </a:spcAft>
+            </a:pPr>
+            <a:r>
+              <a:rPr sz="1800" b="1">
+                <a:solidFill>
+                  <a:srgbClr val="1D8DB0"/>
+                </a:solidFill>
+              </a:rPr>
+              <a:t>SIMP material law</a:t>
+            </a:r>
+          </a:p>
+          <a:p>
+            <a:pPr>
+              <a:spcAft>
+                <a:spcPts val="400"/>
+              </a:spcAft>
+            </a:pPr>
+            <a:r>
+              <a:rPr sz="1500" b="0">
+                <a:solidFill>
+                  <a:srgbClr val="2F4D5D"/>
+                </a:solidFill>
+              </a:rPr>
+              <a:t>E(ρ) = E_min + ρ^p (E0 - E_min),   p = 3</a:t>
+            </a:r>
+          </a:p>
+          <a:p>
+            <a:pPr>
+              <a:spcAft>
+                <a:spcPts val="400"/>
+              </a:spcAft>
+            </a:pPr>
+            <a:r>
+              <a:rPr sz="1300" b="0">
+                <a:solidFill>
+                  <a:srgbClr val="2F4D5D"/>
+                </a:solidFill>
+              </a:rPr>
+              <a:t>at ρ = 0.5 this gives E / E0 = 0.125</a:t>
+            </a:r>
+          </a:p>
+          <a:p>
+            <a:pPr>
+              <a:spcBef>
+                <a:spcPts val="1200"/>
+              </a:spcBef>
+              <a:spcAft>
+                <a:spcPts val="400"/>
+              </a:spcAft>
+            </a:pPr>
+            <a:r>
+              <a:rPr sz="1800" b="1">
+                <a:solidFill>
+                  <a:srgbClr val="1D8DB0"/>
+                </a:solidFill>
+              </a:rPr>
+              <a:t>Cone filter, radius r = 24 density cells</a:t>
+            </a:r>
+          </a:p>
+          <a:p>
+            <a:pPr>
+              <a:spcAft>
+                <a:spcPts val="400"/>
+              </a:spcAft>
+            </a:pPr>
+            <a:r>
+              <a:rPr sz="1500" b="0">
+                <a:solidFill>
+                  <a:srgbClr val="2F4D5D"/>
+                </a:solidFill>
+              </a:rPr>
+              <a:t>density filter:  ρ_i = Σ H_ij x_j  /  Σ H_ij</a:t>
+            </a:r>
+          </a:p>
+          <a:p>
+            <a:pPr>
+              <a:spcAft>
+                <a:spcPts val="400"/>
+              </a:spcAft>
+            </a:pPr>
+            <a:r>
+              <a:rPr sz="1400" b="0">
+                <a:solidFill>
+                  <a:srgbClr val="2F4D5D"/>
+                </a:solidFill>
+              </a:rPr>
+              <a:t>sensitivity filter: smooths ∂C/∂x_i (a heuristic)</a:t>
+            </a:r>
+          </a:p>
+        </p:txBody>
+      </p:sp>
+      <p:pic>
+        <p:nvPicPr>
+          <p:cNvPr id="6" name="Picture 5" descr="simp_interpolation.png"/>
+          <p:cNvPicPr>
+            <a:picLocks noChangeAspect="1"/>
+          </p:cNvPicPr>
+          <p:nvPr/>
+        </p:nvPicPr>
+        <p:blipFill>
+          <a:blip r:embed="rId3"/>
+          <a:stretch>
+            <a:fillRect/>
+          </a:stretch>
+        </p:blipFill>
+        <p:spPr>
+          <a:xfrm>
+            <a:off x="6300000" y="1955783"/>
+            <a:ext cx="5316000" cy="3648433"/>
+          </a:xfrm>
+          <a:prstGeom prst="rect">
+            <a:avLst/>
+          </a:prstGeom>
+        </p:spPr>
+      </p:pic>
+      <p:sp>
+        <p:nvSpPr>
+          <p:cNvPr id="7" name="TextBox 6"/>
+          <p:cNvSpPr txBox="1"/>
+          <p:nvPr/>
+        </p:nvSpPr>
+        <p:spPr>
+          <a:xfrm>
+            <a:off x="6033600" y="6210000"/>
+            <a:ext cx="4993200" cy="648000"/>
+          </a:xfrm>
+          <a:prstGeom prst="rect">
+            <a:avLst/>
+          </a:prstGeom>
+          <a:noFill/>
+        </p:spPr>
+        <p:txBody>
+          <a:bodyPr wrap="square" lIns="36000" tIns="18000" rIns="36000" bIns="18000" anchor="ctr">
+            <a:spAutoFit/>
+          </a:bodyPr>
+          <a:lstStyle/>
+          <a:p>
+            <a:pPr algn="r"/>
+            <a:r>
+              <a:rPr sz="1000" b="0">
+                <a:solidFill>
+                  <a:srgbClr val="FFFFFF"/>
+                </a:solidFill>
+              </a:rPr>
+              <a:t>Structural Optimization (B-KUL-H0T88A)</a:t>
+            </a:r>
+          </a:p>
+        </p:txBody>
+      </p:sp>
+      <p:sp>
+        <p:nvSpPr>
+          <p:cNvPr id="8" name="TextBox 7"/>
+          <p:cNvSpPr txBox="1"/>
+          <p:nvPr/>
+        </p:nvSpPr>
+        <p:spPr>
+          <a:xfrm>
+            <a:off x="576000" y="6210000"/>
+            <a:ext cx="648000" cy="648000"/>
+          </a:xfrm>
+          <a:prstGeom prst="rect">
+            <a:avLst/>
+          </a:prstGeom>
+          <a:noFill/>
+        </p:spPr>
+        <p:txBody>
+          <a:bodyPr wrap="square" lIns="36000" tIns="18000" rIns="36000" bIns="18000" anchor="ctr">
+            <a:spAutoFit/>
+          </a:bodyPr>
+          <a:lstStyle/>
+          <a:p>
+            <a:pPr algn="l"/>
+            <a:r>
+              <a:rPr sz="1000" b="0">
+                <a:solidFill>
+                  <a:srgbClr val="FFFFFF"/>
+                </a:solidFill>
+              </a:rPr>
+              <a:t>17</a:t>
+            </a:r>
+          </a:p>
+        </p:txBody>
+      </p:sp>
+    </p:spTree>
+  </p:cSld>
+  <p:clrMapOvr>
+    <a:masterClrMapping/>
+  </p:clrMapOvr>
+</p:sld>
+</file>
+
+<file path=ppt/slides/slide18.xml><?xml version="1.0" encoding="utf-8"?>
+<p:sld xmlns:a="http://schemas.openxmlformats.org/drawingml/2006/main" xmlns:r="http://schemas.openxmlformats.org/officeDocument/2006/relationships" xmlns:p="http://schemas.openxmlformats.org/presentationml/2006/main">
+  <p:cSld>
+    <p:spTree>
+      <p:nvGrpSpPr>
+        <p:cNvPr id="1" name=""/>
+        <p:cNvGrpSpPr/>
+        <p:nvPr/>
+      </p:nvGrpSpPr>
+      <p:grpSpPr>
+        <a:xfrm>
+          <a:off x="0" y="0"/>
+          <a:ext cx="0" cy="0"/>
+          <a:chOff x="0" y="0"/>
+          <a:chExt cx="0" cy="0"/>
+        </a:xfrm>
+      </p:grpSpPr>
+      <p:sp>
+        <p:nvSpPr>
+          <p:cNvPr id="4" name="Title 3"/>
+          <p:cNvSpPr>
+            <a:spLocks noGrp="1"/>
+          </p:cNvSpPr>
+          <p:nvPr>
+            <p:ph type="title"/>
+          </p:nvPr>
+        </p:nvSpPr>
+        <p:spPr/>
+        <p:txBody>
+          <a:bodyPr/>
+          <a:lstStyle/>
+          <a:p>
+            <a:r>
+              <a:rPr sz="3200"/>
+              <a:t>Appendix: MTOP element and sensitivities</a:t>
+            </a:r>
+          </a:p>
+        </p:txBody>
+      </p:sp>
+      <p:sp>
+        <p:nvSpPr>
+          <p:cNvPr id="5" name="TextBox 4"/>
+          <p:cNvSpPr txBox="1"/>
+          <p:nvPr/>
+        </p:nvSpPr>
+        <p:spPr>
+          <a:xfrm>
+            <a:off x="576000" y="1410000"/>
+            <a:ext cx="5650000" cy="4740000"/>
+          </a:xfrm>
+          <a:prstGeom prst="rect">
+            <a:avLst/>
+          </a:prstGeom>
+          <a:noFill/>
+        </p:spPr>
+        <p:txBody>
+          <a:bodyPr wrap="square" lIns="36000" rIns="36000" anchor="t">
+            <a:spAutoFit/>
+          </a:bodyPr>
+          <a:lstStyle/>
+          <a:p>
+            <a:pPr>
+              <a:spcAft>
+                <a:spcPts val="400"/>
+              </a:spcAft>
+            </a:pPr>
+            <a:r>
+              <a:rPr sz="1700" b="1">
+                <a:solidFill>
+                  <a:srgbClr val="1D8DB0"/>
+                </a:solidFill>
+              </a:rPr>
+              <a:t>Element stiffness, midpoint quadrature</a:t>
+            </a:r>
+          </a:p>
+          <a:p>
+            <a:pPr>
+              <a:spcAft>
+                <a:spcPts val="400"/>
+              </a:spcAft>
+            </a:pPr>
+            <a:r>
+              <a:rPr sz="1400" b="0">
+                <a:solidFill>
+                  <a:srgbClr val="2F4D5D"/>
+                </a:solidFill>
+              </a:rPr>
+              <a:t>K_e = Σ_k [ E_min + ρ_ek^p (E0 - E_min) ] I_k</a:t>
+            </a:r>
+          </a:p>
+          <a:p>
+            <a:pPr>
+              <a:spcAft>
+                <a:spcPts val="400"/>
+              </a:spcAft>
+            </a:pPr>
+            <a:r>
+              <a:rPr sz="1400" b="0">
+                <a:solidFill>
+                  <a:srgbClr val="2F4D5D"/>
+                </a:solidFill>
+              </a:rPr>
+              <a:t>I_k = A_k · B^T(ξ_k) D0 B(ξ_k),   A_k = 1/25</a:t>
+            </a:r>
+          </a:p>
+          <a:p>
+            <a:pPr>
+              <a:spcAft>
+                <a:spcPts val="400"/>
+              </a:spcAft>
+            </a:pPr>
+            <a:r>
+              <a:rPr sz="1300" b="0">
+                <a:solidFill>
+                  <a:srgbClr val="2F4D5D"/>
+                </a:solidFill>
+              </a:rPr>
+              <a:t>the 25 templates I_k depend on geometry only</a:t>
+            </a:r>
+          </a:p>
+          <a:p>
+            <a:pPr>
+              <a:spcAft>
+                <a:spcPts val="400"/>
+              </a:spcAft>
+            </a:pPr>
+            <a:r>
+              <a:rPr sz="1300" b="0">
+                <a:solidFill>
+                  <a:srgbClr val="2F4D5D"/>
+                </a:solidFill>
+              </a:rPr>
+              <a:t>and are precomputed once per run</a:t>
+            </a:r>
+          </a:p>
+          <a:p>
+            <a:pPr>
+              <a:spcBef>
+                <a:spcPts val="1200"/>
+              </a:spcBef>
+              <a:spcAft>
+                <a:spcPts val="400"/>
+              </a:spcAft>
+            </a:pPr>
+            <a:r>
+              <a:rPr sz="1700" b="1">
+                <a:solidFill>
+                  <a:srgbClr val="1D8DB0"/>
+                </a:solidFill>
+              </a:rPr>
+              <a:t>Compliance sensitivity (self-adjoint)</a:t>
+            </a:r>
+          </a:p>
+          <a:p>
+            <a:pPr>
+              <a:spcAft>
+                <a:spcPts val="400"/>
+              </a:spcAft>
+            </a:pPr>
+            <a:r>
+              <a:rPr sz="1400" b="0">
+                <a:solidFill>
+                  <a:srgbClr val="2F4D5D"/>
+                </a:solidFill>
+              </a:rPr>
+              <a:t>∂C/∂ρ = - u^T (∂K/∂ρ) u   (no extra solve)</a:t>
+            </a:r>
+          </a:p>
+          <a:p>
+            <a:pPr>
+              <a:spcAft>
+                <a:spcPts val="400"/>
+              </a:spcAft>
+            </a:pPr>
+            <a:r>
+              <a:rPr sz="1200" b="0">
+                <a:solidFill>
+                  <a:srgbClr val="2F4D5D"/>
+                </a:solidFill>
+              </a:rPr>
+              <a:t>classical:  ∂C/∂ρ_e = -p (E0-E_min) ρ_e^(p-1) u_e^T K0 u_e</a:t>
+            </a:r>
+          </a:p>
+          <a:p>
+            <a:pPr>
+              <a:spcAft>
+                <a:spcPts val="400"/>
+              </a:spcAft>
+            </a:pPr>
+            <a:r>
+              <a:rPr sz="1200" b="0">
+                <a:solidFill>
+                  <a:srgbClr val="2F4D5D"/>
+                </a:solidFill>
+              </a:rPr>
+              <a:t>MTOP cell:  ∂C/∂ρ_ek = -p (E0-E_min) ρ_ek^(p-1) u_e^T I_k u_e</a:t>
+            </a:r>
+          </a:p>
+        </p:txBody>
+      </p:sp>
+      <p:pic>
+        <p:nvPicPr>
+          <p:cNvPr id="6" name="Picture 5" descr="gen_concept_meshes.png"/>
+          <p:cNvPicPr>
+            <a:picLocks noChangeAspect="1"/>
+          </p:cNvPicPr>
+          <p:nvPr/>
+        </p:nvPicPr>
+        <p:blipFill>
+          <a:blip r:embed="rId3"/>
+          <a:stretch>
+            <a:fillRect/>
+          </a:stretch>
+        </p:blipFill>
+        <p:spPr>
+          <a:xfrm>
+            <a:off x="6376000" y="2546454"/>
+            <a:ext cx="5240000" cy="2467091"/>
+          </a:xfrm>
+          <a:prstGeom prst="rect">
+            <a:avLst/>
+          </a:prstGeom>
+        </p:spPr>
+      </p:pic>
+      <p:sp>
+        <p:nvSpPr>
+          <p:cNvPr id="7" name="TextBox 6"/>
+          <p:cNvSpPr txBox="1"/>
+          <p:nvPr/>
+        </p:nvSpPr>
+        <p:spPr>
+          <a:xfrm>
+            <a:off x="6033600" y="6210000"/>
+            <a:ext cx="4993200" cy="648000"/>
+          </a:xfrm>
+          <a:prstGeom prst="rect">
+            <a:avLst/>
+          </a:prstGeom>
+          <a:noFill/>
+        </p:spPr>
+        <p:txBody>
+          <a:bodyPr wrap="square" lIns="36000" tIns="18000" rIns="36000" bIns="18000" anchor="ctr">
+            <a:spAutoFit/>
+          </a:bodyPr>
+          <a:lstStyle/>
+          <a:p>
+            <a:pPr algn="r"/>
+            <a:r>
+              <a:rPr sz="1000" b="0">
+                <a:solidFill>
+                  <a:srgbClr val="FFFFFF"/>
+                </a:solidFill>
+              </a:rPr>
+              <a:t>Structural Optimization (B-KUL-H0T88A)</a:t>
+            </a:r>
+          </a:p>
+        </p:txBody>
+      </p:sp>
+      <p:sp>
+        <p:nvSpPr>
+          <p:cNvPr id="8" name="TextBox 7"/>
+          <p:cNvSpPr txBox="1"/>
+          <p:nvPr/>
+        </p:nvSpPr>
+        <p:spPr>
+          <a:xfrm>
+            <a:off x="576000" y="6210000"/>
+            <a:ext cx="648000" cy="648000"/>
+          </a:xfrm>
+          <a:prstGeom prst="rect">
+            <a:avLst/>
+          </a:prstGeom>
+          <a:noFill/>
+        </p:spPr>
+        <p:txBody>
+          <a:bodyPr wrap="square" lIns="36000" tIns="18000" rIns="36000" bIns="18000" anchor="ctr">
+            <a:spAutoFit/>
+          </a:bodyPr>
+          <a:lstStyle/>
+          <a:p>
+            <a:pPr algn="l"/>
+            <a:r>
+              <a:rPr sz="1000" b="0">
+                <a:solidFill>
+                  <a:srgbClr val="FFFFFF"/>
+                </a:solidFill>
+              </a:rPr>
+              <a:t>18</a:t>
+            </a:r>
+          </a:p>
+        </p:txBody>
+      </p:sp>
+    </p:spTree>
+  </p:cSld>
+  <p:clrMapOvr>
+    <a:masterClrMapping/>
+  </p:clrMapOvr>
+</p:sld>
+</file>
+
+<file path=ppt/slides/slide19.xml><?xml version="1.0" encoding="utf-8"?>
+<p:sld xmlns:a="http://schemas.openxmlformats.org/drawingml/2006/main" xmlns:r="http://schemas.openxmlformats.org/officeDocument/2006/relationships" xmlns:p="http://schemas.openxmlformats.org/presentationml/2006/main">
+  <p:cSld>
+    <p:spTree>
+      <p:nvGrpSpPr>
+        <p:cNvPr id="1" name=""/>
+        <p:cNvGrpSpPr/>
+        <p:nvPr/>
+      </p:nvGrpSpPr>
+      <p:grpSpPr>
+        <a:xfrm>
+          <a:off x="0" y="0"/>
+          <a:ext cx="0" cy="0"/>
+          <a:chOff x="0" y="0"/>
+          <a:chExt cx="0" cy="0"/>
+        </a:xfrm>
+      </p:grpSpPr>
+      <p:sp>
+        <p:nvSpPr>
+          <p:cNvPr id="2" name="Title 1"/>
+          <p:cNvSpPr>
+            <a:spLocks noGrp="1"/>
+          </p:cNvSpPr>
+          <p:nvPr>
+            <p:ph type="title"/>
+          </p:nvPr>
+        </p:nvSpPr>
+        <p:spPr/>
+        <p:txBody>
+          <a:bodyPr/>
+          <a:lstStyle/>
+          <a:p>
+            <a:r>
+              <a:rPr sz="3200"/>
+              <a:t>Appendix: sensitivity verification</a:t>
+            </a:r>
+          </a:p>
+        </p:txBody>
+      </p:sp>
+      <p:graphicFrame>
+        <p:nvGraphicFramePr>
+          <p:cNvPr id="3" name="Table 2"/>
+          <p:cNvGraphicFramePr>
+            <a:graphicFrameLocks noGrp="1"/>
+          </p:cNvGraphicFramePr>
+          <p:nvPr/>
+        </p:nvGraphicFramePr>
+        <p:xfrm>
+          <a:off x="1196000" y="2350000"/>
+          <a:ext cx="9800000" cy="1640000"/>
+        </p:xfrm>
+        <a:graphic>
+          <a:graphicData uri="http://schemas.openxmlformats.org/drawingml/2006/table">
+            <a:tbl>
+              <a:tblPr>
+                <a:tableStyleId>{5C22544A-7EE6-4342-B048-85BDC9FD1C3A}</a:tableStyleId>
+              </a:tblPr>
+              <a:tblGrid>
+                <a:gridCol w="3000000">
+                  <a:extLst>
+                    <a:ext uri="{9D8B030D-6E8A-4147-A177-3AD203B41FA5}">
+                      <a16:colId xmlns:a16="http://schemas.microsoft.com/office/drawing/2014/main" val="20000"/>
+                    </a:ext>
+                  </a:extLst>
+                </a:gridCol>
+                <a:gridCol w="2700000">
+                  <a:extLst>
+                    <a:ext uri="{9D8B030D-6E8A-4147-A177-3AD203B41FA5}">
+                      <a16:colId xmlns:a16="http://schemas.microsoft.com/office/drawing/2014/main" val="20001"/>
+                    </a:ext>
+                  </a:extLst>
+                </a:gridCol>
+                <a:gridCol w="2500000">
+                  <a:extLst>
+                    <a:ext uri="{9D8B030D-6E8A-4147-A177-3AD203B41FA5}">
+                      <a16:colId xmlns:a16="http://schemas.microsoft.com/office/drawing/2014/main" val="20002"/>
+                    </a:ext>
+                  </a:extLst>
+                </a:gridCol>
+                <a:gridCol w="1600000">
+                  <a:extLst>
+                    <a:ext uri="{9D8B030D-6E8A-4147-A177-3AD203B41FA5}">
+                      <a16:colId xmlns:a16="http://schemas.microsoft.com/office/drawing/2014/main" val="20003"/>
+                    </a:ext>
+                  </a:extLst>
+                </a:gridCol>
+              </a:tblGrid>
+              <a:tr h="410000">
+                <a:tc>
+                  <a:txBody>
+                    <a:bodyPr/>
+                    <a:lstStyle/>
+                    <a:p>
+                      <a:pPr algn="l"/>
+                      <a:r>
+                        <a:rPr sz="1250" b="1">
+                          <a:solidFill>
+                            <a:srgbClr val="FFFFFF"/>
+                          </a:solidFill>
+                        </a:rPr>
+                        <a:t>Derivative chain</a:t>
+                      </a:r>
+                    </a:p>
+                  </a:txBody>
+                  <a:tcPr marL="82000" marR="55000" marT="14000" marB="14000" anchor="ctr">
+                    <a:solidFill>
+                      <a:srgbClr val="1D8DB0"/>
+                    </a:solidFill>
+                  </a:tcPr>
+                </a:tc>
+                <a:tc>
+                  <a:txBody>
+                    <a:bodyPr/>
+                    <a:lstStyle/>
+                    <a:p>
+                      <a:pPr algn="ctr"/>
+                      <a:r>
+                        <a:rPr sz="1250" b="1">
+                          <a:solidFill>
+                            <a:srgbClr val="FFFFFF"/>
+                          </a:solidFill>
+                        </a:rPr>
+                        <a:t>Best component-wise error</a:t>
+                      </a:r>
+                    </a:p>
+                  </a:txBody>
+                  <a:tcPr marL="82000" marR="55000" marT="14000" marB="14000" anchor="ctr">
+                    <a:solidFill>
+                      <a:srgbClr val="1D8DB0"/>
+                    </a:solidFill>
+                  </a:tcPr>
+                </a:tc>
+                <a:tc>
+                  <a:txBody>
+                    <a:bodyPr/>
+                    <a:lstStyle/>
+                    <a:p>
+                      <a:pPr algn="ctr"/>
+                      <a:r>
+                        <a:rPr sz="1250" b="1">
+                          <a:solidFill>
+                            <a:srgbClr val="FFFFFF"/>
+                          </a:solidFill>
+                        </a:rPr>
+                        <a:t>Best directional error</a:t>
+                      </a:r>
+                    </a:p>
+                  </a:txBody>
+                  <a:tcPr marL="82000" marR="55000" marT="14000" marB="14000" anchor="ctr">
+                    <a:solidFill>
+                      <a:srgbClr val="1D8DB0"/>
+                    </a:solidFill>
+                  </a:tcPr>
+                </a:tc>
+                <a:tc>
+                  <a:txBody>
+                    <a:bodyPr/>
+                    <a:lstStyle/>
+                    <a:p>
+                      <a:pPr algn="ctr"/>
+                      <a:r>
+                        <a:rPr sz="1250" b="1">
+                          <a:solidFill>
+                            <a:srgbClr val="FFFFFF"/>
+                          </a:solidFill>
+                        </a:rPr>
+                        <a:t>Taylor slope</a:t>
+                      </a:r>
+                    </a:p>
+                  </a:txBody>
+                  <a:tcPr marL="82000" marR="55000" marT="14000" marB="14000" anchor="ctr">
+                    <a:solidFill>
+                      <a:srgbClr val="1D8DB0"/>
+                    </a:solidFill>
+                  </a:tcPr>
+                </a:tc>
+                <a:extLst>
+                  <a:ext uri="{0D108BD9-81ED-4DB2-BD59-A6C34878D82A}">
+                    <a16:rowId xmlns:a16="http://schemas.microsoft.com/office/drawing/2014/main" val="10000"/>
+                  </a:ext>
+                </a:extLst>
+              </a:tr>
+              <a:tr h="410000">
+                <a:tc>
+                  <a:txBody>
+                    <a:bodyPr/>
+                    <a:lstStyle/>
+                    <a:p>
+                      <a:pPr algn="l"/>
+                      <a:r>
+                        <a:rPr sz="1300" b="0">
+                          <a:solidFill>
+                            <a:srgbClr val="2F4D5D"/>
+                          </a:solidFill>
+                        </a:rPr>
+                        <a:t>Classical SIMP</a:t>
+                      </a:r>
+                    </a:p>
+                  </a:txBody>
+                  <a:tcPr marL="82000" marR="55000" marT="14000" marB="14000" anchor="ctr">
+                    <a:solidFill>
+                      <a:srgbClr val="FFFFFF"/>
+                    </a:solidFill>
+                  </a:tcPr>
+                </a:tc>
+                <a:tc>
+                  <a:txBody>
+                    <a:bodyPr/>
+                    <a:lstStyle/>
+                    <a:p>
+                      <a:pPr algn="ctr"/>
+                      <a:r>
+                        <a:rPr sz="1300" b="0">
+                          <a:solidFill>
+                            <a:srgbClr val="2F4D5D"/>
+                          </a:solidFill>
+                        </a:rPr>
+                        <a:t>6.9e-6</a:t>
+                      </a:r>
+                    </a:p>
+                  </a:txBody>
+                  <a:tcPr marL="82000" marR="55000" marT="14000" marB="14000" anchor="ctr">
+                    <a:solidFill>
+                      <a:srgbClr val="FFFFFF"/>
+                    </a:solidFill>
+                  </a:tcPr>
+                </a:tc>
+                <a:tc>
+                  <a:txBody>
+                    <a:bodyPr/>
+                    <a:lstStyle/>
+                    <a:p>
+                      <a:pPr algn="ctr"/>
+                      <a:r>
+                        <a:rPr sz="1300" b="0">
+                          <a:solidFill>
+                            <a:srgbClr val="2F4D5D"/>
+                          </a:solidFill>
+                        </a:rPr>
+                        <a:t>3.4e-6</a:t>
+                      </a:r>
+                    </a:p>
+                  </a:txBody>
+                  <a:tcPr marL="82000" marR="55000" marT="14000" marB="14000" anchor="ctr">
+                    <a:solidFill>
+                      <a:srgbClr val="FFFFFF"/>
+                    </a:solidFill>
+                  </a:tcPr>
+                </a:tc>
+                <a:tc>
+                  <a:txBody>
+                    <a:bodyPr/>
+                    <a:lstStyle/>
+                    <a:p>
+                      <a:pPr algn="ctr"/>
+                      <a:r>
+                        <a:rPr sz="1300" b="0">
+                          <a:solidFill>
+                            <a:srgbClr val="2F4D5D"/>
+                          </a:solidFill>
+                        </a:rPr>
+                        <a:t>2.000</a:t>
+                      </a:r>
+                    </a:p>
+                  </a:txBody>
+                  <a:tcPr marL="82000" marR="55000" marT="14000" marB="14000" anchor="ctr">
+                    <a:solidFill>
+                      <a:srgbClr val="FFFFFF"/>
+                    </a:solidFill>
+                  </a:tcPr>
+                </a:tc>
+                <a:extLst>
+                  <a:ext uri="{0D108BD9-81ED-4DB2-BD59-A6C34878D82A}">
+                    <a16:rowId xmlns:a16="http://schemas.microsoft.com/office/drawing/2014/main" val="10001"/>
+                  </a:ext>
+                </a:extLst>
+              </a:tr>
+              <a:tr h="410000">
+                <a:tc>
+                  <a:txBody>
+                    <a:bodyPr/>
+                    <a:lstStyle/>
+                    <a:p>
+                      <a:pPr algn="l"/>
+                      <a:r>
+                        <a:rPr sz="1300" b="0">
+                          <a:solidFill>
+                            <a:srgbClr val="2F4D5D"/>
+                          </a:solidFill>
+                        </a:rPr>
+                        <a:t>MTOP per-cell</a:t>
+                      </a:r>
+                    </a:p>
+                  </a:txBody>
+                  <a:tcPr marL="82000" marR="55000" marT="14000" marB="14000" anchor="ctr">
+                    <a:solidFill>
+                      <a:srgbClr val="FFFFFF"/>
+                    </a:solidFill>
+                  </a:tcPr>
+                </a:tc>
+                <a:tc>
+                  <a:txBody>
+                    <a:bodyPr/>
+                    <a:lstStyle/>
+                    <a:p>
+                      <a:pPr algn="ctr"/>
+                      <a:r>
+                        <a:rPr sz="1300" b="0">
+                          <a:solidFill>
+                            <a:srgbClr val="2F4D5D"/>
+                          </a:solidFill>
+                        </a:rPr>
+                        <a:t>2.1e-5</a:t>
+                      </a:r>
+                    </a:p>
+                  </a:txBody>
+                  <a:tcPr marL="82000" marR="55000" marT="14000" marB="14000" anchor="ctr">
+                    <a:solidFill>
+                      <a:srgbClr val="FFFFFF"/>
+                    </a:solidFill>
+                  </a:tcPr>
+                </a:tc>
+                <a:tc>
+                  <a:txBody>
+                    <a:bodyPr/>
+                    <a:lstStyle/>
+                    <a:p>
+                      <a:pPr algn="ctr"/>
+                      <a:r>
+                        <a:rPr sz="1300" b="0">
+                          <a:solidFill>
+                            <a:srgbClr val="2F4D5D"/>
+                          </a:solidFill>
+                        </a:rPr>
+                        <a:t>1.9e-4</a:t>
+                      </a:r>
+                    </a:p>
+                  </a:txBody>
+                  <a:tcPr marL="82000" marR="55000" marT="14000" marB="14000" anchor="ctr">
+                    <a:solidFill>
+                      <a:srgbClr val="FFFFFF"/>
+                    </a:solidFill>
+                  </a:tcPr>
+                </a:tc>
+                <a:tc>
+                  <a:txBody>
+                    <a:bodyPr/>
+                    <a:lstStyle/>
+                    <a:p>
+                      <a:pPr algn="ctr"/>
+                      <a:r>
+                        <a:rPr sz="1300" b="0">
+                          <a:solidFill>
+                            <a:srgbClr val="2F4D5D"/>
+                          </a:solidFill>
+                        </a:rPr>
+                        <a:t>2.000</a:t>
+                      </a:r>
+                    </a:p>
+                  </a:txBody>
+                  <a:tcPr marL="82000" marR="55000" marT="14000" marB="14000" anchor="ctr">
+                    <a:solidFill>
+                      <a:srgbClr val="FFFFFF"/>
+                    </a:solidFill>
+                  </a:tcPr>
+                </a:tc>
+                <a:extLst>
+                  <a:ext uri="{0D108BD9-81ED-4DB2-BD59-A6C34878D82A}">
+                    <a16:rowId xmlns:a16="http://schemas.microsoft.com/office/drawing/2014/main" val="10002"/>
+                  </a:ext>
+                </a:extLst>
+              </a:tr>
+              <a:tr h="410000">
+                <a:tc>
+                  <a:txBody>
+                    <a:bodyPr/>
+                    <a:lstStyle/>
+                    <a:p>
+                      <a:pPr algn="l"/>
+                      <a:r>
+                        <a:rPr sz="1300" b="0">
+                          <a:solidFill>
+                            <a:srgbClr val="2F4D5D"/>
+                          </a:solidFill>
+                        </a:rPr>
+                        <a:t>Full Heaviside chain</a:t>
+                      </a:r>
+                    </a:p>
+                  </a:txBody>
+                  <a:tcPr marL="82000" marR="55000" marT="14000" marB="14000" anchor="ctr">
+                    <a:solidFill>
+                      <a:srgbClr val="FFFFFF"/>
+                    </a:solidFill>
+                  </a:tcPr>
+                </a:tc>
+                <a:tc>
+                  <a:txBody>
+                    <a:bodyPr/>
+                    <a:lstStyle/>
+                    <a:p>
+                      <a:pPr algn="ctr"/>
+                      <a:r>
+                        <a:rPr sz="1300" b="0">
+                          <a:solidFill>
+                            <a:srgbClr val="2F4D5D"/>
+                          </a:solidFill>
+                        </a:rPr>
+                        <a:t>2.0e-6</a:t>
+                      </a:r>
+                    </a:p>
+                  </a:txBody>
+                  <a:tcPr marL="82000" marR="55000" marT="14000" marB="14000" anchor="ctr">
+                    <a:solidFill>
+                      <a:srgbClr val="FFFFFF"/>
+                    </a:solidFill>
+                  </a:tcPr>
+                </a:tc>
+                <a:tc>
+                  <a:txBody>
+                    <a:bodyPr/>
+                    <a:lstStyle/>
+                    <a:p>
+                      <a:pPr algn="ctr"/>
+                      <a:r>
+                        <a:rPr sz="1300" b="0">
+                          <a:solidFill>
+                            <a:srgbClr val="2F4D5D"/>
+                          </a:solidFill>
+                        </a:rPr>
+                        <a:t>7.9e-6</a:t>
+                      </a:r>
+                    </a:p>
+                  </a:txBody>
+                  <a:tcPr marL="82000" marR="55000" marT="14000" marB="14000" anchor="ctr">
+                    <a:solidFill>
+                      <a:srgbClr val="FFFFFF"/>
+                    </a:solidFill>
+                  </a:tcPr>
+                </a:tc>
+                <a:tc>
+                  <a:txBody>
+                    <a:bodyPr/>
+                    <a:lstStyle/>
+                    <a:p>
+                      <a:pPr algn="ctr"/>
+                      <a:r>
+                        <a:rPr sz="1300" b="0">
+                          <a:solidFill>
+                            <a:srgbClr val="2F4D5D"/>
+                          </a:solidFill>
+                        </a:rPr>
+                        <a:t>1.999</a:t>
+                      </a:r>
+                    </a:p>
+                  </a:txBody>
+                  <a:tcPr marL="82000" marR="55000" marT="14000" marB="14000" anchor="ctr">
+                    <a:solidFill>
+                      <a:srgbClr val="FFFFFF"/>
+                    </a:solidFill>
+                  </a:tcPr>
+                </a:tc>
+                <a:extLst>
+                  <a:ext uri="{0D108BD9-81ED-4DB2-BD59-A6C34878D82A}">
+                    <a16:rowId xmlns:a16="http://schemas.microsoft.com/office/drawing/2014/main" val="10003"/>
+                  </a:ext>
+                </a:extLst>
+              </a:tr>
+            </a:tbl>
+          </a:graphicData>
+        </a:graphic>
+      </p:graphicFrame>
+      <p:sp>
+        <p:nvSpPr>
+          <p:cNvPr id="4" name="TextBox 3"/>
+          <p:cNvSpPr txBox="1"/>
+          <p:nvPr/>
+        </p:nvSpPr>
+        <p:spPr>
+          <a:xfrm>
+            <a:off x="1196000" y="4250000"/>
+            <a:ext cx="9800000" cy="900000"/>
+          </a:xfrm>
+          <a:prstGeom prst="rect">
+            <a:avLst/>
+          </a:prstGeom>
+          <a:noFill/>
+        </p:spPr>
+        <p:txBody>
+          <a:bodyPr wrap="square" lIns="36000" tIns="18000" rIns="36000" bIns="18000" anchor="t">
+            <a:spAutoFit/>
+          </a:bodyPr>
+          <a:lstStyle/>
+          <a:p>
+            <a:pPr algn="ctr"/>
+            <a:r>
+              <a:rPr sz="1400" b="0">
+                <a:solidFill>
+                  <a:srgbClr val="2F4D5D"/>
+                </a:solidFill>
+              </a:rPr>
+              <a:t>Three finite-difference strategies on three derivative chains.</a:t>
+            </a:r>
+          </a:p>
+          <a:p>
+            <a:pPr algn="ctr"/>
+            <a:r>
+              <a:rPr sz="1400" b="0">
+                <a:solidFill>
+                  <a:srgbClr val="2F4D5D"/>
+                </a:solidFill>
+              </a:rPr>
+              <a:t>The Taylor-remainder slope of about 2 confirms the analytical gradients.</a:t>
+            </a:r>
+          </a:p>
+        </p:txBody>
+      </p:sp>
+      <p:sp>
+        <p:nvSpPr>
+          <p:cNvPr id="5" name="TextBox 4"/>
+          <p:cNvSpPr txBox="1"/>
+          <p:nvPr/>
+        </p:nvSpPr>
+        <p:spPr>
+          <a:xfrm>
+            <a:off x="6033600" y="6210000"/>
+            <a:ext cx="4993200" cy="648000"/>
+          </a:xfrm>
+          <a:prstGeom prst="rect">
+            <a:avLst/>
+          </a:prstGeom>
+          <a:noFill/>
+        </p:spPr>
+        <p:txBody>
+          <a:bodyPr wrap="square" lIns="36000" tIns="18000" rIns="36000" bIns="18000" anchor="ctr">
+            <a:spAutoFit/>
+          </a:bodyPr>
+          <a:lstStyle/>
+          <a:p>
+            <a:pPr algn="r"/>
+            <a:r>
+              <a:rPr sz="1000" b="0">
+                <a:solidFill>
+                  <a:srgbClr val="FFFFFF"/>
+                </a:solidFill>
+              </a:rPr>
+              <a:t>Structural Optimization (B-KUL-H0T88A)</a:t>
+            </a:r>
+          </a:p>
+        </p:txBody>
+      </p:sp>
+      <p:sp>
+        <p:nvSpPr>
+          <p:cNvPr id="6" name="TextBox 5"/>
+          <p:cNvSpPr txBox="1"/>
+          <p:nvPr/>
+        </p:nvSpPr>
+        <p:spPr>
+          <a:xfrm>
+            <a:off x="576000" y="6210000"/>
+            <a:ext cx="648000" cy="648000"/>
+          </a:xfrm>
+          <a:prstGeom prst="rect">
+            <a:avLst/>
+          </a:prstGeom>
+          <a:noFill/>
+        </p:spPr>
+        <p:txBody>
+          <a:bodyPr wrap="square" lIns="36000" tIns="18000" rIns="36000" bIns="18000" anchor="ctr">
+            <a:spAutoFit/>
+          </a:bodyPr>
+          <a:lstStyle/>
+          <a:p>
+            <a:pPr algn="l"/>
+            <a:r>
+              <a:rPr sz="1000" b="0">
+                <a:solidFill>
+                  <a:srgbClr val="FFFFFF"/>
+                </a:solidFill>
+              </a:rPr>
+              <a:t>19</a:t>
             </a:r>
           </a:p>
         </p:txBody>
@@ -8132,7 +10016,7 @@
 </file>
 
 <file path=ppt/slides/slide2.xml><?xml version="1.0" encoding="utf-8"?>
-<p:sld xmlns:a="http://schemas.openxmlformats.org/drawingml/2006/main" xmlns:p="http://schemas.openxmlformats.org/presentationml/2006/main" xmlns:r="http://schemas.openxmlformats.org/officeDocument/2006/relationships">
+<p:sld xmlns:a="http://schemas.openxmlformats.org/drawingml/2006/main" xmlns:r="http://schemas.openxmlformats.org/officeDocument/2006/relationships" xmlns:p="http://schemas.openxmlformats.org/presentationml/2006/main">
   <p:cSld>
     <p:spTree>
       <p:nvGrpSpPr>
@@ -8140,7 +10024,14 @@
         <p:cNvGrpSpPr/>
         <p:nvPr/>
       </p:nvGrpSpPr>
-      <p:grpSpPr/>
+      <p:grpSpPr>
+        <a:xfrm>
+          <a:off x="0" y="0"/>
+          <a:ext cx="0" cy="0"/>
+          <a:chOff x="0" y="0"/>
+          <a:chExt cx="0" cy="0"/>
+        </a:xfrm>
+      </p:grpSpPr>
       <p:sp>
         <p:nvSpPr>
           <p:cNvPr id="2" name="Content Placeholder 1"/>
@@ -8283,7 +10174,7 @@
           <p:nvPr/>
         </p:nvPicPr>
         <p:blipFill>
-          <a:blip r:embed="rId2"/>
+          <a:blip r:embed="rId3"/>
           <a:stretch>
             <a:fillRect/>
           </a:stretch>
@@ -8315,7 +10206,7 @@
           <a:noFill/>
         </p:spPr>
         <p:txBody>
-          <a:bodyPr wrap="square" anchor="ctr" lIns="36000" rIns="36000" tIns="18000" bIns="18000">
+          <a:bodyPr wrap="square" lIns="36000" tIns="18000" rIns="36000" bIns="18000" anchor="ctr">
             <a:spAutoFit/>
           </a:bodyPr>
           <a:lstStyle/>
@@ -8349,7 +10240,7 @@
           <a:noFill/>
         </p:spPr>
         <p:txBody>
-          <a:bodyPr wrap="square" anchor="ctr" lIns="36000" rIns="36000" tIns="18000" bIns="18000">
+          <a:bodyPr wrap="square" lIns="36000" tIns="18000" rIns="36000" bIns="18000" anchor="ctr">
             <a:spAutoFit/>
           </a:bodyPr>
           <a:lstStyle/>
@@ -8362,6 +10253,2690 @@
                 </a:solidFill>
               </a:rPr>
               <a:t>2</a:t>
+            </a:r>
+          </a:p>
+        </p:txBody>
+      </p:sp>
+    </p:spTree>
+  </p:cSld>
+  <p:clrMapOvr>
+    <a:masterClrMapping/>
+  </p:clrMapOvr>
+</p:sld>
+</file>
+
+<file path=ppt/slides/slide20.xml><?xml version="1.0" encoding="utf-8"?>
+<p:sld xmlns:a="http://schemas.openxmlformats.org/drawingml/2006/main" xmlns:r="http://schemas.openxmlformats.org/officeDocument/2006/relationships" xmlns:p="http://schemas.openxmlformats.org/presentationml/2006/main">
+  <p:cSld>
+    <p:spTree>
+      <p:nvGrpSpPr>
+        <p:cNvPr id="1" name=""/>
+        <p:cNvGrpSpPr/>
+        <p:nvPr/>
+      </p:nvGrpSpPr>
+      <p:grpSpPr>
+        <a:xfrm>
+          <a:off x="0" y="0"/>
+          <a:ext cx="0" cy="0"/>
+          <a:chOff x="0" y="0"/>
+          <a:chExt cx="0" cy="0"/>
+        </a:xfrm>
+      </p:grpSpPr>
+      <p:sp>
+        <p:nvSpPr>
+          <p:cNvPr id="2" name="Title 1"/>
+          <p:cNvSpPr>
+            <a:spLocks noGrp="1"/>
+          </p:cNvSpPr>
+          <p:nvPr>
+            <p:ph type="title"/>
+          </p:nvPr>
+        </p:nvSpPr>
+        <p:spPr/>
+        <p:txBody>
+          <a:bodyPr/>
+          <a:lstStyle/>
+          <a:p>
+            <a:r>
+              <a:rPr sz="3200"/>
+              <a:t>Appendix: all nine experiments</a:t>
+            </a:r>
+          </a:p>
+        </p:txBody>
+      </p:sp>
+      <p:graphicFrame>
+        <p:nvGraphicFramePr>
+          <p:cNvPr id="3" name="Table 2"/>
+          <p:cNvGraphicFramePr>
+            <a:graphicFrameLocks noGrp="1"/>
+          </p:cNvGraphicFramePr>
+          <p:nvPr/>
+        </p:nvGraphicFramePr>
+        <p:xfrm>
+          <a:off x="576000" y="1640000"/>
+          <a:ext cx="11040000" cy="4050000"/>
+        </p:xfrm>
+        <a:graphic>
+          <a:graphicData uri="http://schemas.openxmlformats.org/drawingml/2006/table">
+            <a:tbl>
+              <a:tblPr>
+                <a:tableStyleId>{5C22544A-7EE6-4342-B048-85BDC9FD1C3A}</a:tableStyleId>
+              </a:tblPr>
+              <a:tblGrid>
+                <a:gridCol w="3700000">
+                  <a:extLst>
+                    <a:ext uri="{9D8B030D-6E8A-4147-A177-3AD203B41FA5}">
+                      <a16:colId xmlns:a16="http://schemas.microsoft.com/office/drawing/2014/main" val="20000"/>
+                    </a:ext>
+                  </a:extLst>
+                </a:gridCol>
+                <a:gridCol w="1900000">
+                  <a:extLst>
+                    <a:ext uri="{9D8B030D-6E8A-4147-A177-3AD203B41FA5}">
+                      <a16:colId xmlns:a16="http://schemas.microsoft.com/office/drawing/2014/main" val="20001"/>
+                    </a:ext>
+                  </a:extLst>
+                </a:gridCol>
+                <a:gridCol w="1750000">
+                  <a:extLst>
+                    <a:ext uri="{9D8B030D-6E8A-4147-A177-3AD203B41FA5}">
+                      <a16:colId xmlns:a16="http://schemas.microsoft.com/office/drawing/2014/main" val="20002"/>
+                    </a:ext>
+                  </a:extLst>
+                </a:gridCol>
+                <a:gridCol w="1550000">
+                  <a:extLst>
+                    <a:ext uri="{9D8B030D-6E8A-4147-A177-3AD203B41FA5}">
+                      <a16:colId xmlns:a16="http://schemas.microsoft.com/office/drawing/2014/main" val="20003"/>
+                    </a:ext>
+                  </a:extLst>
+                </a:gridCol>
+                <a:gridCol w="2140000">
+                  <a:extLst>
+                    <a:ext uri="{9D8B030D-6E8A-4147-A177-3AD203B41FA5}">
+                      <a16:colId xmlns:a16="http://schemas.microsoft.com/office/drawing/2014/main" val="20004"/>
+                    </a:ext>
+                  </a:extLst>
+                </a:gridCol>
+              </a:tblGrid>
+              <a:tr h="405000">
+                <a:tc>
+                  <a:txBody>
+                    <a:bodyPr/>
+                    <a:lstStyle/>
+                    <a:p>
+                      <a:pPr algn="l"/>
+                      <a:r>
+                        <a:rPr sz="1200" b="1">
+                          <a:solidFill>
+                            <a:srgbClr val="FFFFFF"/>
+                          </a:solidFill>
+                        </a:rPr>
+                        <a:t>Run</a:t>
+                      </a:r>
+                    </a:p>
+                  </a:txBody>
+                  <a:tcPr marL="82000" marR="55000" marT="14000" marB="14000" anchor="ctr">
+                    <a:solidFill>
+                      <a:srgbClr val="1D8DB0"/>
+                    </a:solidFill>
+                  </a:tcPr>
+                </a:tc>
+                <a:tc>
+                  <a:txBody>
+                    <a:bodyPr/>
+                    <a:lstStyle/>
+                    <a:p>
+                      <a:pPr algn="ctr"/>
+                      <a:r>
+                        <a:rPr sz="1200" b="1">
+                          <a:solidFill>
+                            <a:srgbClr val="FFFFFF"/>
+                          </a:solidFill>
+                        </a:rPr>
+                        <a:t>C (fine mesh)</a:t>
+                      </a:r>
+                    </a:p>
+                  </a:txBody>
+                  <a:tcPr marL="82000" marR="55000" marT="14000" marB="14000" anchor="ctr">
+                    <a:solidFill>
+                      <a:srgbClr val="1D8DB0"/>
+                    </a:solidFill>
+                  </a:tcPr>
+                </a:tc>
+                <a:tc>
+                  <a:txBody>
+                    <a:bodyPr/>
+                    <a:lstStyle/>
+                    <a:p>
+                      <a:pPr algn="ctr"/>
+                      <a:r>
+                        <a:rPr sz="1200" b="1">
+                          <a:solidFill>
+                            <a:srgbClr val="FFFFFF"/>
+                          </a:solidFill>
+                        </a:rPr>
+                        <a:t>Iterations</a:t>
+                      </a:r>
+                    </a:p>
+                  </a:txBody>
+                  <a:tcPr marL="82000" marR="55000" marT="14000" marB="14000" anchor="ctr">
+                    <a:solidFill>
+                      <a:srgbClr val="1D8DB0"/>
+                    </a:solidFill>
+                  </a:tcPr>
+                </a:tc>
+                <a:tc>
+                  <a:txBody>
+                    <a:bodyPr/>
+                    <a:lstStyle/>
+                    <a:p>
+                      <a:pPr algn="ctr"/>
+                      <a:r>
+                        <a:rPr sz="1200" b="1">
+                          <a:solidFill>
+                            <a:srgbClr val="FFFFFF"/>
+                          </a:solidFill>
+                        </a:rPr>
+                        <a:t>Time (s)</a:t>
+                      </a:r>
+                    </a:p>
+                  </a:txBody>
+                  <a:tcPr marL="82000" marR="55000" marT="14000" marB="14000" anchor="ctr">
+                    <a:solidFill>
+                      <a:srgbClr val="1D8DB0"/>
+                    </a:solidFill>
+                  </a:tcPr>
+                </a:tc>
+                <a:tc>
+                  <a:txBody>
+                    <a:bodyPr/>
+                    <a:lstStyle/>
+                    <a:p>
+                      <a:pPr algn="ctr"/>
+                      <a:r>
+                        <a:rPr sz="1200" b="1">
+                          <a:solidFill>
+                            <a:srgbClr val="FFFFFF"/>
+                          </a:solidFill>
+                        </a:rPr>
+                        <a:t>Stopping criterion</a:t>
+                      </a:r>
+                    </a:p>
+                  </a:txBody>
+                  <a:tcPr marL="82000" marR="55000" marT="14000" marB="14000" anchor="ctr">
+                    <a:solidFill>
+                      <a:srgbClr val="1D8DB0"/>
+                    </a:solidFill>
+                  </a:tcPr>
+                </a:tc>
+                <a:extLst>
+                  <a:ext uri="{0D108BD9-81ED-4DB2-BD59-A6C34878D82A}">
+                    <a16:rowId xmlns:a16="http://schemas.microsoft.com/office/drawing/2014/main" val="10000"/>
+                  </a:ext>
+                </a:extLst>
+              </a:tr>
+              <a:tr h="405000">
+                <a:tc>
+                  <a:txBody>
+                    <a:bodyPr/>
+                    <a:lstStyle/>
+                    <a:p>
+                      <a:pPr algn="l"/>
+                      <a:r>
+                        <a:rPr sz="1200" b="0">
+                          <a:solidFill>
+                            <a:srgbClr val="2F4D5D"/>
+                          </a:solidFill>
+                        </a:rPr>
+                        <a:t>Classical OC, sensitivity filter</a:t>
+                      </a:r>
+                    </a:p>
+                  </a:txBody>
+                  <a:tcPr marL="82000" marR="55000" marT="14000" marB="14000" anchor="ctr">
+                    <a:solidFill>
+                      <a:srgbClr val="FFFFFF"/>
+                    </a:solidFill>
+                  </a:tcPr>
+                </a:tc>
+                <a:tc>
+                  <a:txBody>
+                    <a:bodyPr/>
+                    <a:lstStyle/>
+                    <a:p>
+                      <a:pPr algn="ctr"/>
+                      <a:r>
+                        <a:rPr sz="1200" b="0">
+                          <a:solidFill>
+                            <a:srgbClr val="2F4D5D"/>
+                          </a:solidFill>
+                        </a:rPr>
+                        <a:t>224.6</a:t>
+                      </a:r>
+                    </a:p>
+                  </a:txBody>
+                  <a:tcPr marL="82000" marR="55000" marT="14000" marB="14000" anchor="ctr">
+                    <a:solidFill>
+                      <a:srgbClr val="FFFFFF"/>
+                    </a:solidFill>
+                  </a:tcPr>
+                </a:tc>
+                <a:tc>
+                  <a:txBody>
+                    <a:bodyPr/>
+                    <a:lstStyle/>
+                    <a:p>
+                      <a:pPr algn="ctr"/>
+                      <a:r>
+                        <a:rPr sz="1200" b="0">
+                          <a:solidFill>
+                            <a:srgbClr val="2F4D5D"/>
+                          </a:solidFill>
+                        </a:rPr>
+                        <a:t>94</a:t>
+                      </a:r>
+                    </a:p>
+                  </a:txBody>
+                  <a:tcPr marL="82000" marR="55000" marT="14000" marB="14000" anchor="ctr">
+                    <a:solidFill>
+                      <a:srgbClr val="FFFFFF"/>
+                    </a:solidFill>
+                  </a:tcPr>
+                </a:tc>
+                <a:tc>
+                  <a:txBody>
+                    <a:bodyPr/>
+                    <a:lstStyle/>
+                    <a:p>
+                      <a:pPr algn="ctr"/>
+                      <a:r>
+                        <a:rPr sz="1200" b="0">
+                          <a:solidFill>
+                            <a:srgbClr val="2F4D5D"/>
+                          </a:solidFill>
+                        </a:rPr>
+                        <a:t>263</a:t>
+                      </a:r>
+                    </a:p>
+                  </a:txBody>
+                  <a:tcPr marL="82000" marR="55000" marT="14000" marB="14000" anchor="ctr">
+                    <a:solidFill>
+                      <a:srgbClr val="FFFFFF"/>
+                    </a:solidFill>
+                  </a:tcPr>
+                </a:tc>
+                <a:tc>
+                  <a:txBody>
+                    <a:bodyPr/>
+                    <a:lstStyle/>
+                    <a:p>
+                      <a:pPr algn="ctr"/>
+                      <a:r>
+                        <a:rPr sz="1200" b="0">
+                          <a:solidFill>
+                            <a:srgbClr val="2F4D5D"/>
+                          </a:solidFill>
+                        </a:rPr>
+                        <a:t>design change</a:t>
+                      </a:r>
+                    </a:p>
+                  </a:txBody>
+                  <a:tcPr marL="82000" marR="55000" marT="14000" marB="14000" anchor="ctr">
+                    <a:solidFill>
+                      <a:srgbClr val="FFFFFF"/>
+                    </a:solidFill>
+                  </a:tcPr>
+                </a:tc>
+                <a:extLst>
+                  <a:ext uri="{0D108BD9-81ED-4DB2-BD59-A6C34878D82A}">
+                    <a16:rowId xmlns:a16="http://schemas.microsoft.com/office/drawing/2014/main" val="10001"/>
+                  </a:ext>
+                </a:extLst>
+              </a:tr>
+              <a:tr h="405000">
+                <a:tc>
+                  <a:txBody>
+                    <a:bodyPr/>
+                    <a:lstStyle/>
+                    <a:p>
+                      <a:pPr algn="l"/>
+                      <a:r>
+                        <a:rPr sz="1200" b="0">
+                          <a:solidFill>
+                            <a:srgbClr val="2F4D5D"/>
+                          </a:solidFill>
+                        </a:rPr>
+                        <a:t>MTOP OC, sensitivity filter</a:t>
+                      </a:r>
+                    </a:p>
+                  </a:txBody>
+                  <a:tcPr marL="82000" marR="55000" marT="14000" marB="14000" anchor="ctr">
+                    <a:solidFill>
+                      <a:srgbClr val="FFFFFF"/>
+                    </a:solidFill>
+                  </a:tcPr>
+                </a:tc>
+                <a:tc>
+                  <a:txBody>
+                    <a:bodyPr/>
+                    <a:lstStyle/>
+                    <a:p>
+                      <a:pPr algn="ctr"/>
+                      <a:r>
+                        <a:rPr sz="1200" b="0">
+                          <a:solidFill>
+                            <a:srgbClr val="2F4D5D"/>
+                          </a:solidFill>
+                        </a:rPr>
+                        <a:t>224.7</a:t>
+                      </a:r>
+                    </a:p>
+                  </a:txBody>
+                  <a:tcPr marL="82000" marR="55000" marT="14000" marB="14000" anchor="ctr">
+                    <a:solidFill>
+                      <a:srgbClr val="FFFFFF"/>
+                    </a:solidFill>
+                  </a:tcPr>
+                </a:tc>
+                <a:tc>
+                  <a:txBody>
+                    <a:bodyPr/>
+                    <a:lstStyle/>
+                    <a:p>
+                      <a:pPr algn="ctr"/>
+                      <a:r>
+                        <a:rPr sz="1200" b="0">
+                          <a:solidFill>
+                            <a:srgbClr val="2F4D5D"/>
+                          </a:solidFill>
+                        </a:rPr>
+                        <a:t>95</a:t>
+                      </a:r>
+                    </a:p>
+                  </a:txBody>
+                  <a:tcPr marL="82000" marR="55000" marT="14000" marB="14000" anchor="ctr">
+                    <a:solidFill>
+                      <a:srgbClr val="FFFFFF"/>
+                    </a:solidFill>
+                  </a:tcPr>
+                </a:tc>
+                <a:tc>
+                  <a:txBody>
+                    <a:bodyPr/>
+                    <a:lstStyle/>
+                    <a:p>
+                      <a:pPr algn="ctr"/>
+                      <a:r>
+                        <a:rPr sz="1200" b="0">
+                          <a:solidFill>
+                            <a:srgbClr val="2F4D5D"/>
+                          </a:solidFill>
+                        </a:rPr>
+                        <a:t>12</a:t>
+                      </a:r>
+                    </a:p>
+                  </a:txBody>
+                  <a:tcPr marL="82000" marR="55000" marT="14000" marB="14000" anchor="ctr">
+                    <a:solidFill>
+                      <a:srgbClr val="FFFFFF"/>
+                    </a:solidFill>
+                  </a:tcPr>
+                </a:tc>
+                <a:tc>
+                  <a:txBody>
+                    <a:bodyPr/>
+                    <a:lstStyle/>
+                    <a:p>
+                      <a:pPr algn="ctr"/>
+                      <a:r>
+                        <a:rPr sz="1200" b="0">
+                          <a:solidFill>
+                            <a:srgbClr val="2F4D5D"/>
+                          </a:solidFill>
+                        </a:rPr>
+                        <a:t>design change</a:t>
+                      </a:r>
+                    </a:p>
+                  </a:txBody>
+                  <a:tcPr marL="82000" marR="55000" marT="14000" marB="14000" anchor="ctr">
+                    <a:solidFill>
+                      <a:srgbClr val="FFFFFF"/>
+                    </a:solidFill>
+                  </a:tcPr>
+                </a:tc>
+                <a:extLst>
+                  <a:ext uri="{0D108BD9-81ED-4DB2-BD59-A6C34878D82A}">
+                    <a16:rowId xmlns:a16="http://schemas.microsoft.com/office/drawing/2014/main" val="10002"/>
+                  </a:ext>
+                </a:extLst>
+              </a:tr>
+              <a:tr h="405000">
+                <a:tc>
+                  <a:txBody>
+                    <a:bodyPr/>
+                    <a:lstStyle/>
+                    <a:p>
+                      <a:pPr algn="l"/>
+                      <a:r>
+                        <a:rPr sz="1200" b="0">
+                          <a:solidFill>
+                            <a:srgbClr val="2F4D5D"/>
+                          </a:solidFill>
+                        </a:rPr>
+                        <a:t>Classical OC, density filter</a:t>
+                      </a:r>
+                    </a:p>
+                  </a:txBody>
+                  <a:tcPr marL="82000" marR="55000" marT="14000" marB="14000" anchor="ctr">
+                    <a:solidFill>
+                      <a:srgbClr val="FFFFFF"/>
+                    </a:solidFill>
+                  </a:tcPr>
+                </a:tc>
+                <a:tc>
+                  <a:txBody>
+                    <a:bodyPr/>
+                    <a:lstStyle/>
+                    <a:p>
+                      <a:pPr algn="ctr"/>
+                      <a:r>
+                        <a:rPr sz="1200" b="0">
+                          <a:solidFill>
+                            <a:srgbClr val="2F4D5D"/>
+                          </a:solidFill>
+                        </a:rPr>
+                        <a:t>241.1</a:t>
+                      </a:r>
+                    </a:p>
+                  </a:txBody>
+                  <a:tcPr marL="82000" marR="55000" marT="14000" marB="14000" anchor="ctr">
+                    <a:solidFill>
+                      <a:srgbClr val="FFFFFF"/>
+                    </a:solidFill>
+                  </a:tcPr>
+                </a:tc>
+                <a:tc>
+                  <a:txBody>
+                    <a:bodyPr/>
+                    <a:lstStyle/>
+                    <a:p>
+                      <a:pPr algn="ctr"/>
+                      <a:r>
+                        <a:rPr sz="1200" b="0">
+                          <a:solidFill>
+                            <a:srgbClr val="2F4D5D"/>
+                          </a:solidFill>
+                        </a:rPr>
+                        <a:t>237</a:t>
+                      </a:r>
+                    </a:p>
+                  </a:txBody>
+                  <a:tcPr marL="82000" marR="55000" marT="14000" marB="14000" anchor="ctr">
+                    <a:solidFill>
+                      <a:srgbClr val="FFFFFF"/>
+                    </a:solidFill>
+                  </a:tcPr>
+                </a:tc>
+                <a:tc>
+                  <a:txBody>
+                    <a:bodyPr/>
+                    <a:lstStyle/>
+                    <a:p>
+                      <a:pPr algn="ctr"/>
+                      <a:r>
+                        <a:rPr sz="1200" b="0">
+                          <a:solidFill>
+                            <a:srgbClr val="2F4D5D"/>
+                          </a:solidFill>
+                        </a:rPr>
+                        <a:t>693</a:t>
+                      </a:r>
+                    </a:p>
+                  </a:txBody>
+                  <a:tcPr marL="82000" marR="55000" marT="14000" marB="14000" anchor="ctr">
+                    <a:solidFill>
+                      <a:srgbClr val="FFFFFF"/>
+                    </a:solidFill>
+                  </a:tcPr>
+                </a:tc>
+                <a:tc>
+                  <a:txBody>
+                    <a:bodyPr/>
+                    <a:lstStyle/>
+                    <a:p>
+                      <a:pPr algn="ctr"/>
+                      <a:r>
+                        <a:rPr sz="1200" b="0">
+                          <a:solidFill>
+                            <a:srgbClr val="2F4D5D"/>
+                          </a:solidFill>
+                        </a:rPr>
+                        <a:t>compliance plateau</a:t>
+                      </a:r>
+                    </a:p>
+                  </a:txBody>
+                  <a:tcPr marL="82000" marR="55000" marT="14000" marB="14000" anchor="ctr">
+                    <a:solidFill>
+                      <a:srgbClr val="FFFFFF"/>
+                    </a:solidFill>
+                  </a:tcPr>
+                </a:tc>
+                <a:extLst>
+                  <a:ext uri="{0D108BD9-81ED-4DB2-BD59-A6C34878D82A}">
+                    <a16:rowId xmlns:a16="http://schemas.microsoft.com/office/drawing/2014/main" val="10003"/>
+                  </a:ext>
+                </a:extLst>
+              </a:tr>
+              <a:tr h="405000">
+                <a:tc>
+                  <a:txBody>
+                    <a:bodyPr/>
+                    <a:lstStyle/>
+                    <a:p>
+                      <a:pPr algn="l"/>
+                      <a:r>
+                        <a:rPr sz="1200" b="0">
+                          <a:solidFill>
+                            <a:srgbClr val="2F4D5D"/>
+                          </a:solidFill>
+                        </a:rPr>
+                        <a:t>MTOP OC, density filter</a:t>
+                      </a:r>
+                    </a:p>
+                  </a:txBody>
+                  <a:tcPr marL="82000" marR="55000" marT="14000" marB="14000" anchor="ctr">
+                    <a:solidFill>
+                      <a:srgbClr val="FFFFFF"/>
+                    </a:solidFill>
+                  </a:tcPr>
+                </a:tc>
+                <a:tc>
+                  <a:txBody>
+                    <a:bodyPr/>
+                    <a:lstStyle/>
+                    <a:p>
+                      <a:pPr algn="ctr"/>
+                      <a:r>
+                        <a:rPr sz="1200" b="0">
+                          <a:solidFill>
+                            <a:srgbClr val="2F4D5D"/>
+                          </a:solidFill>
+                        </a:rPr>
+                        <a:t>241.0</a:t>
+                      </a:r>
+                    </a:p>
+                  </a:txBody>
+                  <a:tcPr marL="82000" marR="55000" marT="14000" marB="14000" anchor="ctr">
+                    <a:solidFill>
+                      <a:srgbClr val="FFFFFF"/>
+                    </a:solidFill>
+                  </a:tcPr>
+                </a:tc>
+                <a:tc>
+                  <a:txBody>
+                    <a:bodyPr/>
+                    <a:lstStyle/>
+                    <a:p>
+                      <a:pPr algn="ctr"/>
+                      <a:r>
+                        <a:rPr sz="1200" b="0">
+                          <a:solidFill>
+                            <a:srgbClr val="2F4D5D"/>
+                          </a:solidFill>
+                        </a:rPr>
+                        <a:t>299</a:t>
+                      </a:r>
+                    </a:p>
+                  </a:txBody>
+                  <a:tcPr marL="82000" marR="55000" marT="14000" marB="14000" anchor="ctr">
+                    <a:solidFill>
+                      <a:srgbClr val="FFFFFF"/>
+                    </a:solidFill>
+                  </a:tcPr>
+                </a:tc>
+                <a:tc>
+                  <a:txBody>
+                    <a:bodyPr/>
+                    <a:lstStyle/>
+                    <a:p>
+                      <a:pPr algn="ctr"/>
+                      <a:r>
+                        <a:rPr sz="1200" b="0">
+                          <a:solidFill>
+                            <a:srgbClr val="2F4D5D"/>
+                          </a:solidFill>
+                        </a:rPr>
+                        <a:t>137</a:t>
+                      </a:r>
+                    </a:p>
+                  </a:txBody>
+                  <a:tcPr marL="82000" marR="55000" marT="14000" marB="14000" anchor="ctr">
+                    <a:solidFill>
+                      <a:srgbClr val="FFFFFF"/>
+                    </a:solidFill>
+                  </a:tcPr>
+                </a:tc>
+                <a:tc>
+                  <a:txBody>
+                    <a:bodyPr/>
+                    <a:lstStyle/>
+                    <a:p>
+                      <a:pPr algn="ctr"/>
+                      <a:r>
+                        <a:rPr sz="1200" b="0">
+                          <a:solidFill>
+                            <a:srgbClr val="2F4D5D"/>
+                          </a:solidFill>
+                        </a:rPr>
+                        <a:t>compliance plateau</a:t>
+                      </a:r>
+                    </a:p>
+                  </a:txBody>
+                  <a:tcPr marL="82000" marR="55000" marT="14000" marB="14000" anchor="ctr">
+                    <a:solidFill>
+                      <a:srgbClr val="FFFFFF"/>
+                    </a:solidFill>
+                  </a:tcPr>
+                </a:tc>
+                <a:extLst>
+                  <a:ext uri="{0D108BD9-81ED-4DB2-BD59-A6C34878D82A}">
+                    <a16:rowId xmlns:a16="http://schemas.microsoft.com/office/drawing/2014/main" val="10004"/>
+                  </a:ext>
+                </a:extLst>
+              </a:tr>
+              <a:tr h="405000">
+                <a:tc>
+                  <a:txBody>
+                    <a:bodyPr/>
+                    <a:lstStyle/>
+                    <a:p>
+                      <a:pPr algn="l"/>
+                      <a:r>
+                        <a:rPr sz="1200" b="0">
+                          <a:solidFill>
+                            <a:srgbClr val="2F4D5D"/>
+                          </a:solidFill>
+                        </a:rPr>
+                        <a:t>MTOP MMA, sensitivity filter</a:t>
+                      </a:r>
+                    </a:p>
+                  </a:txBody>
+                  <a:tcPr marL="82000" marR="55000" marT="14000" marB="14000" anchor="ctr">
+                    <a:solidFill>
+                      <a:srgbClr val="FFFFFF"/>
+                    </a:solidFill>
+                  </a:tcPr>
+                </a:tc>
+                <a:tc>
+                  <a:txBody>
+                    <a:bodyPr/>
+                    <a:lstStyle/>
+                    <a:p>
+                      <a:pPr algn="ctr"/>
+                      <a:r>
+                        <a:rPr sz="1200" b="0">
+                          <a:solidFill>
+                            <a:srgbClr val="2F4D5D"/>
+                          </a:solidFill>
+                        </a:rPr>
+                        <a:t>226.5</a:t>
+                      </a:r>
+                    </a:p>
+                  </a:txBody>
+                  <a:tcPr marL="82000" marR="55000" marT="14000" marB="14000" anchor="ctr">
+                    <a:solidFill>
+                      <a:srgbClr val="FFFFFF"/>
+                    </a:solidFill>
+                  </a:tcPr>
+                </a:tc>
+                <a:tc>
+                  <a:txBody>
+                    <a:bodyPr/>
+                    <a:lstStyle/>
+                    <a:p>
+                      <a:pPr algn="ctr"/>
+                      <a:r>
+                        <a:rPr sz="1200" b="0">
+                          <a:solidFill>
+                            <a:srgbClr val="2F4D5D"/>
+                          </a:solidFill>
+                        </a:rPr>
+                        <a:t>250</a:t>
+                      </a:r>
+                    </a:p>
+                  </a:txBody>
+                  <a:tcPr marL="82000" marR="55000" marT="14000" marB="14000" anchor="ctr">
+                    <a:solidFill>
+                      <a:srgbClr val="FFFFFF"/>
+                    </a:solidFill>
+                  </a:tcPr>
+                </a:tc>
+                <a:tc>
+                  <a:txBody>
+                    <a:bodyPr/>
+                    <a:lstStyle/>
+                    <a:p>
+                      <a:pPr algn="ctr"/>
+                      <a:r>
+                        <a:rPr sz="1200" b="0">
+                          <a:solidFill>
+                            <a:srgbClr val="2F4D5D"/>
+                          </a:solidFill>
+                        </a:rPr>
+                        <a:t>187</a:t>
+                      </a:r>
+                    </a:p>
+                  </a:txBody>
+                  <a:tcPr marL="82000" marR="55000" marT="14000" marB="14000" anchor="ctr">
+                    <a:solidFill>
+                      <a:srgbClr val="FFFFFF"/>
+                    </a:solidFill>
+                  </a:tcPr>
+                </a:tc>
+                <a:tc>
+                  <a:txBody>
+                    <a:bodyPr/>
+                    <a:lstStyle/>
+                    <a:p>
+                      <a:pPr algn="ctr"/>
+                      <a:r>
+                        <a:rPr sz="1200" b="0">
+                          <a:solidFill>
+                            <a:srgbClr val="2F4D5D"/>
+                          </a:solidFill>
+                        </a:rPr>
+                        <a:t>design change</a:t>
+                      </a:r>
+                    </a:p>
+                  </a:txBody>
+                  <a:tcPr marL="82000" marR="55000" marT="14000" marB="14000" anchor="ctr">
+                    <a:solidFill>
+                      <a:srgbClr val="FFFFFF"/>
+                    </a:solidFill>
+                  </a:tcPr>
+                </a:tc>
+                <a:extLst>
+                  <a:ext uri="{0D108BD9-81ED-4DB2-BD59-A6C34878D82A}">
+                    <a16:rowId xmlns:a16="http://schemas.microsoft.com/office/drawing/2014/main" val="10005"/>
+                  </a:ext>
+                </a:extLst>
+              </a:tr>
+              <a:tr h="405000">
+                <a:tc>
+                  <a:txBody>
+                    <a:bodyPr/>
+                    <a:lstStyle/>
+                    <a:p>
+                      <a:pPr algn="l"/>
+                      <a:r>
+                        <a:rPr sz="1200" b="0">
+                          <a:solidFill>
+                            <a:srgbClr val="2F4D5D"/>
+                          </a:solidFill>
+                        </a:rPr>
+                        <a:t>MTOP MMA, density filter</a:t>
+                      </a:r>
+                    </a:p>
+                  </a:txBody>
+                  <a:tcPr marL="82000" marR="55000" marT="14000" marB="14000" anchor="ctr">
+                    <a:solidFill>
+                      <a:srgbClr val="FFFFFF"/>
+                    </a:solidFill>
+                  </a:tcPr>
+                </a:tc>
+                <a:tc>
+                  <a:txBody>
+                    <a:bodyPr/>
+                    <a:lstStyle/>
+                    <a:p>
+                      <a:pPr algn="ctr"/>
+                      <a:r>
+                        <a:rPr sz="1200" b="0">
+                          <a:solidFill>
+                            <a:srgbClr val="2F4D5D"/>
+                          </a:solidFill>
+                        </a:rPr>
+                        <a:t>240.1</a:t>
+                      </a:r>
+                    </a:p>
+                  </a:txBody>
+                  <a:tcPr marL="82000" marR="55000" marT="14000" marB="14000" anchor="ctr">
+                    <a:solidFill>
+                      <a:srgbClr val="FFFFFF"/>
+                    </a:solidFill>
+                  </a:tcPr>
+                </a:tc>
+                <a:tc>
+                  <a:txBody>
+                    <a:bodyPr/>
+                    <a:lstStyle/>
+                    <a:p>
+                      <a:pPr algn="ctr"/>
+                      <a:r>
+                        <a:rPr sz="1200" b="0">
+                          <a:solidFill>
+                            <a:srgbClr val="2F4D5D"/>
+                          </a:solidFill>
+                        </a:rPr>
+                        <a:t>419</a:t>
+                      </a:r>
+                    </a:p>
+                  </a:txBody>
+                  <a:tcPr marL="82000" marR="55000" marT="14000" marB="14000" anchor="ctr">
+                    <a:solidFill>
+                      <a:srgbClr val="FFFFFF"/>
+                    </a:solidFill>
+                  </a:tcPr>
+                </a:tc>
+                <a:tc>
+                  <a:txBody>
+                    <a:bodyPr/>
+                    <a:lstStyle/>
+                    <a:p>
+                      <a:pPr algn="ctr"/>
+                      <a:r>
+                        <a:rPr sz="1200" b="0">
+                          <a:solidFill>
+                            <a:srgbClr val="2F4D5D"/>
+                          </a:solidFill>
+                        </a:rPr>
+                        <a:t>254</a:t>
+                      </a:r>
+                    </a:p>
+                  </a:txBody>
+                  <a:tcPr marL="82000" marR="55000" marT="14000" marB="14000" anchor="ctr">
+                    <a:solidFill>
+                      <a:srgbClr val="FFFFFF"/>
+                    </a:solidFill>
+                  </a:tcPr>
+                </a:tc>
+                <a:tc>
+                  <a:txBody>
+                    <a:bodyPr/>
+                    <a:lstStyle/>
+                    <a:p>
+                      <a:pPr algn="ctr"/>
+                      <a:r>
+                        <a:rPr sz="1200" b="0">
+                          <a:solidFill>
+                            <a:srgbClr val="2F4D5D"/>
+                          </a:solidFill>
+                        </a:rPr>
+                        <a:t>compliance plateau</a:t>
+                      </a:r>
+                    </a:p>
+                  </a:txBody>
+                  <a:tcPr marL="82000" marR="55000" marT="14000" marB="14000" anchor="ctr">
+                    <a:solidFill>
+                      <a:srgbClr val="FFFFFF"/>
+                    </a:solidFill>
+                  </a:tcPr>
+                </a:tc>
+                <a:extLst>
+                  <a:ext uri="{0D108BD9-81ED-4DB2-BD59-A6C34878D82A}">
+                    <a16:rowId xmlns:a16="http://schemas.microsoft.com/office/drawing/2014/main" val="10006"/>
+                  </a:ext>
+                </a:extLst>
+              </a:tr>
+              <a:tr h="405000">
+                <a:tc>
+                  <a:txBody>
+                    <a:bodyPr/>
+                    <a:lstStyle/>
+                    <a:p>
+                      <a:pPr algn="l"/>
+                      <a:r>
+                        <a:rPr sz="1200" b="0">
+                          <a:solidFill>
+                            <a:srgbClr val="2F4D5D"/>
+                          </a:solidFill>
+                        </a:rPr>
+                        <a:t>MTOP MMA, Heaviside η = 0.3</a:t>
+                      </a:r>
+                    </a:p>
+                  </a:txBody>
+                  <a:tcPr marL="82000" marR="55000" marT="14000" marB="14000" anchor="ctr">
+                    <a:solidFill>
+                      <a:srgbClr val="FFFFFF"/>
+                    </a:solidFill>
+                  </a:tcPr>
+                </a:tc>
+                <a:tc>
+                  <a:txBody>
+                    <a:bodyPr/>
+                    <a:lstStyle/>
+                    <a:p>
+                      <a:pPr algn="ctr"/>
+                      <a:r>
+                        <a:rPr sz="1200" b="0">
+                          <a:solidFill>
+                            <a:srgbClr val="2F4D5D"/>
+                          </a:solidFill>
+                        </a:rPr>
+                        <a:t>200.0</a:t>
+                      </a:r>
+                    </a:p>
+                  </a:txBody>
+                  <a:tcPr marL="82000" marR="55000" marT="14000" marB="14000" anchor="ctr">
+                    <a:solidFill>
+                      <a:srgbClr val="FFFFFF"/>
+                    </a:solidFill>
+                  </a:tcPr>
+                </a:tc>
+                <a:tc>
+                  <a:txBody>
+                    <a:bodyPr/>
+                    <a:lstStyle/>
+                    <a:p>
+                      <a:pPr algn="ctr"/>
+                      <a:r>
+                        <a:rPr sz="1200" b="0">
+                          <a:solidFill>
+                            <a:srgbClr val="2F4D5D"/>
+                          </a:solidFill>
+                        </a:rPr>
+                        <a:t>419</a:t>
+                      </a:r>
+                    </a:p>
+                  </a:txBody>
+                  <a:tcPr marL="82000" marR="55000" marT="14000" marB="14000" anchor="ctr">
+                    <a:solidFill>
+                      <a:srgbClr val="FFFFFF"/>
+                    </a:solidFill>
+                  </a:tcPr>
+                </a:tc>
+                <a:tc>
+                  <a:txBody>
+                    <a:bodyPr/>
+                    <a:lstStyle/>
+                    <a:p>
+                      <a:pPr algn="ctr"/>
+                      <a:r>
+                        <a:rPr sz="1200" b="0">
+                          <a:solidFill>
+                            <a:srgbClr val="2F4D5D"/>
+                          </a:solidFill>
+                        </a:rPr>
+                        <a:t>279</a:t>
+                      </a:r>
+                    </a:p>
+                  </a:txBody>
+                  <a:tcPr marL="82000" marR="55000" marT="14000" marB="14000" anchor="ctr">
+                    <a:solidFill>
+                      <a:srgbClr val="FFFFFF"/>
+                    </a:solidFill>
+                  </a:tcPr>
+                </a:tc>
+                <a:tc>
+                  <a:txBody>
+                    <a:bodyPr/>
+                    <a:lstStyle/>
+                    <a:p>
+                      <a:pPr algn="ctr"/>
+                      <a:r>
+                        <a:rPr sz="1200" b="0">
+                          <a:solidFill>
+                            <a:srgbClr val="2F4D5D"/>
+                          </a:solidFill>
+                        </a:rPr>
+                        <a:t>design change</a:t>
+                      </a:r>
+                    </a:p>
+                  </a:txBody>
+                  <a:tcPr marL="82000" marR="55000" marT="14000" marB="14000" anchor="ctr">
+                    <a:solidFill>
+                      <a:srgbClr val="FFFFFF"/>
+                    </a:solidFill>
+                  </a:tcPr>
+                </a:tc>
+                <a:extLst>
+                  <a:ext uri="{0D108BD9-81ED-4DB2-BD59-A6C34878D82A}">
+                    <a16:rowId xmlns:a16="http://schemas.microsoft.com/office/drawing/2014/main" val="10007"/>
+                  </a:ext>
+                </a:extLst>
+              </a:tr>
+              <a:tr h="405000">
+                <a:tc>
+                  <a:txBody>
+                    <a:bodyPr/>
+                    <a:lstStyle/>
+                    <a:p>
+                      <a:pPr algn="l"/>
+                      <a:r>
+                        <a:rPr sz="1200" b="0">
+                          <a:solidFill>
+                            <a:srgbClr val="2F4D5D"/>
+                          </a:solidFill>
+                        </a:rPr>
+                        <a:t>MTOP MMA, Heaviside η = 0.5</a:t>
+                      </a:r>
+                    </a:p>
+                  </a:txBody>
+                  <a:tcPr marL="82000" marR="55000" marT="14000" marB="14000" anchor="ctr">
+                    <a:solidFill>
+                      <a:srgbClr val="FFFFFF"/>
+                    </a:solidFill>
+                  </a:tcPr>
+                </a:tc>
+                <a:tc>
+                  <a:txBody>
+                    <a:bodyPr/>
+                    <a:lstStyle/>
+                    <a:p>
+                      <a:pPr algn="ctr"/>
+                      <a:r>
+                        <a:rPr sz="1200" b="0">
+                          <a:solidFill>
+                            <a:srgbClr val="2F4D5D"/>
+                          </a:solidFill>
+                        </a:rPr>
+                        <a:t>199.3</a:t>
+                      </a:r>
+                    </a:p>
+                  </a:txBody>
+                  <a:tcPr marL="82000" marR="55000" marT="14000" marB="14000" anchor="ctr">
+                    <a:solidFill>
+                      <a:srgbClr val="FFFFFF"/>
+                    </a:solidFill>
+                  </a:tcPr>
+                </a:tc>
+                <a:tc>
+                  <a:txBody>
+                    <a:bodyPr/>
+                    <a:lstStyle/>
+                    <a:p>
+                      <a:pPr algn="ctr"/>
+                      <a:r>
+                        <a:rPr sz="1200" b="0">
+                          <a:solidFill>
+                            <a:srgbClr val="2F4D5D"/>
+                          </a:solidFill>
+                        </a:rPr>
+                        <a:t>563</a:t>
+                      </a:r>
+                    </a:p>
+                  </a:txBody>
+                  <a:tcPr marL="82000" marR="55000" marT="14000" marB="14000" anchor="ctr">
+                    <a:solidFill>
+                      <a:srgbClr val="FFFFFF"/>
+                    </a:solidFill>
+                  </a:tcPr>
+                </a:tc>
+                <a:tc>
+                  <a:txBody>
+                    <a:bodyPr/>
+                    <a:lstStyle/>
+                    <a:p>
+                      <a:pPr algn="ctr"/>
+                      <a:r>
+                        <a:rPr sz="1200" b="0">
+                          <a:solidFill>
+                            <a:srgbClr val="2F4D5D"/>
+                          </a:solidFill>
+                        </a:rPr>
+                        <a:t>371</a:t>
+                      </a:r>
+                    </a:p>
+                  </a:txBody>
+                  <a:tcPr marL="82000" marR="55000" marT="14000" marB="14000" anchor="ctr">
+                    <a:solidFill>
+                      <a:srgbClr val="FFFFFF"/>
+                    </a:solidFill>
+                  </a:tcPr>
+                </a:tc>
+                <a:tc>
+                  <a:txBody>
+                    <a:bodyPr/>
+                    <a:lstStyle/>
+                    <a:p>
+                      <a:pPr algn="ctr"/>
+                      <a:r>
+                        <a:rPr sz="1200" b="0">
+                          <a:solidFill>
+                            <a:srgbClr val="2F4D5D"/>
+                          </a:solidFill>
+                        </a:rPr>
+                        <a:t>design change</a:t>
+                      </a:r>
+                    </a:p>
+                  </a:txBody>
+                  <a:tcPr marL="82000" marR="55000" marT="14000" marB="14000" anchor="ctr">
+                    <a:solidFill>
+                      <a:srgbClr val="FFFFFF"/>
+                    </a:solidFill>
+                  </a:tcPr>
+                </a:tc>
+                <a:extLst>
+                  <a:ext uri="{0D108BD9-81ED-4DB2-BD59-A6C34878D82A}">
+                    <a16:rowId xmlns:a16="http://schemas.microsoft.com/office/drawing/2014/main" val="10008"/>
+                  </a:ext>
+                </a:extLst>
+              </a:tr>
+              <a:tr h="405000">
+                <a:tc>
+                  <a:txBody>
+                    <a:bodyPr/>
+                    <a:lstStyle/>
+                    <a:p>
+                      <a:pPr algn="l"/>
+                      <a:r>
+                        <a:rPr sz="1200" b="0">
+                          <a:solidFill>
+                            <a:srgbClr val="2F4D5D"/>
+                          </a:solidFill>
+                        </a:rPr>
+                        <a:t>MTOP MMA, Heaviside η = 0.7</a:t>
+                      </a:r>
+                    </a:p>
+                  </a:txBody>
+                  <a:tcPr marL="82000" marR="55000" marT="14000" marB="14000" anchor="ctr">
+                    <a:solidFill>
+                      <a:srgbClr val="FFFFFF"/>
+                    </a:solidFill>
+                  </a:tcPr>
+                </a:tc>
+                <a:tc>
+                  <a:txBody>
+                    <a:bodyPr/>
+                    <a:lstStyle/>
+                    <a:p>
+                      <a:pPr algn="ctr"/>
+                      <a:r>
+                        <a:rPr sz="1200" b="0">
+                          <a:solidFill>
+                            <a:srgbClr val="2F4D5D"/>
+                          </a:solidFill>
+                        </a:rPr>
+                        <a:t>200.6</a:t>
+                      </a:r>
+                    </a:p>
+                  </a:txBody>
+                  <a:tcPr marL="82000" marR="55000" marT="14000" marB="14000" anchor="ctr">
+                    <a:solidFill>
+                      <a:srgbClr val="FFFFFF"/>
+                    </a:solidFill>
+                  </a:tcPr>
+                </a:tc>
+                <a:tc>
+                  <a:txBody>
+                    <a:bodyPr/>
+                    <a:lstStyle/>
+                    <a:p>
+                      <a:pPr algn="ctr"/>
+                      <a:r>
+                        <a:rPr sz="1200" b="0">
+                          <a:solidFill>
+                            <a:srgbClr val="2F4D5D"/>
+                          </a:solidFill>
+                        </a:rPr>
+                        <a:t>522</a:t>
+                      </a:r>
+                    </a:p>
+                  </a:txBody>
+                  <a:tcPr marL="82000" marR="55000" marT="14000" marB="14000" anchor="ctr">
+                    <a:solidFill>
+                      <a:srgbClr val="FFFFFF"/>
+                    </a:solidFill>
+                  </a:tcPr>
+                </a:tc>
+                <a:tc>
+                  <a:txBody>
+                    <a:bodyPr/>
+                    <a:lstStyle/>
+                    <a:p>
+                      <a:pPr algn="ctr"/>
+                      <a:r>
+                        <a:rPr sz="1200" b="0">
+                          <a:solidFill>
+                            <a:srgbClr val="2F4D5D"/>
+                          </a:solidFill>
+                        </a:rPr>
+                        <a:t>328</a:t>
+                      </a:r>
+                    </a:p>
+                  </a:txBody>
+                  <a:tcPr marL="82000" marR="55000" marT="14000" marB="14000" anchor="ctr">
+                    <a:solidFill>
+                      <a:srgbClr val="FFFFFF"/>
+                    </a:solidFill>
+                  </a:tcPr>
+                </a:tc>
+                <a:tc>
+                  <a:txBody>
+                    <a:bodyPr/>
+                    <a:lstStyle/>
+                    <a:p>
+                      <a:pPr algn="ctr"/>
+                      <a:r>
+                        <a:rPr sz="1200" b="0">
+                          <a:solidFill>
+                            <a:srgbClr val="2F4D5D"/>
+                          </a:solidFill>
+                        </a:rPr>
+                        <a:t>design change</a:t>
+                      </a:r>
+                    </a:p>
+                  </a:txBody>
+                  <a:tcPr marL="82000" marR="55000" marT="14000" marB="14000" anchor="ctr">
+                    <a:solidFill>
+                      <a:srgbClr val="FFFFFF"/>
+                    </a:solidFill>
+                  </a:tcPr>
+                </a:tc>
+                <a:extLst>
+                  <a:ext uri="{0D108BD9-81ED-4DB2-BD59-A6C34878D82A}">
+                    <a16:rowId xmlns:a16="http://schemas.microsoft.com/office/drawing/2014/main" val="10009"/>
+                  </a:ext>
+                </a:extLst>
+              </a:tr>
+            </a:tbl>
+          </a:graphicData>
+        </a:graphic>
+      </p:graphicFrame>
+      <p:sp>
+        <p:nvSpPr>
+          <p:cNvPr id="4" name="TextBox 3"/>
+          <p:cNvSpPr txBox="1"/>
+          <p:nvPr/>
+        </p:nvSpPr>
+        <p:spPr>
+          <a:xfrm>
+            <a:off x="6033600" y="6210000"/>
+            <a:ext cx="4993200" cy="648000"/>
+          </a:xfrm>
+          <a:prstGeom prst="rect">
+            <a:avLst/>
+          </a:prstGeom>
+          <a:noFill/>
+        </p:spPr>
+        <p:txBody>
+          <a:bodyPr wrap="square" lIns="36000" tIns="18000" rIns="36000" bIns="18000" anchor="ctr">
+            <a:spAutoFit/>
+          </a:bodyPr>
+          <a:lstStyle/>
+          <a:p>
+            <a:pPr algn="r"/>
+            <a:r>
+              <a:rPr sz="1000" b="0">
+                <a:solidFill>
+                  <a:srgbClr val="FFFFFF"/>
+                </a:solidFill>
+              </a:rPr>
+              <a:t>Structural Optimization (B-KUL-H0T88A)</a:t>
+            </a:r>
+          </a:p>
+        </p:txBody>
+      </p:sp>
+      <p:sp>
+        <p:nvSpPr>
+          <p:cNvPr id="5" name="TextBox 4"/>
+          <p:cNvSpPr txBox="1"/>
+          <p:nvPr/>
+        </p:nvSpPr>
+        <p:spPr>
+          <a:xfrm>
+            <a:off x="576000" y="6210000"/>
+            <a:ext cx="648000" cy="648000"/>
+          </a:xfrm>
+          <a:prstGeom prst="rect">
+            <a:avLst/>
+          </a:prstGeom>
+          <a:noFill/>
+        </p:spPr>
+        <p:txBody>
+          <a:bodyPr wrap="square" lIns="36000" tIns="18000" rIns="36000" bIns="18000" anchor="ctr">
+            <a:spAutoFit/>
+          </a:bodyPr>
+          <a:lstStyle/>
+          <a:p>
+            <a:pPr algn="l"/>
+            <a:r>
+              <a:rPr sz="1000" b="0">
+                <a:solidFill>
+                  <a:srgbClr val="FFFFFF"/>
+                </a:solidFill>
+              </a:rPr>
+              <a:t>20</a:t>
+            </a:r>
+          </a:p>
+        </p:txBody>
+      </p:sp>
+    </p:spTree>
+  </p:cSld>
+  <p:clrMapOvr>
+    <a:masterClrMapping/>
+  </p:clrMapOvr>
+</p:sld>
+</file>
+
+<file path=ppt/slides/slide21.xml><?xml version="1.0" encoding="utf-8"?>
+<p:sld xmlns:a="http://schemas.openxmlformats.org/drawingml/2006/main" xmlns:r="http://schemas.openxmlformats.org/officeDocument/2006/relationships" xmlns:p="http://schemas.openxmlformats.org/presentationml/2006/main">
+  <p:cSld>
+    <p:spTree>
+      <p:nvGrpSpPr>
+        <p:cNvPr id="1" name=""/>
+        <p:cNvGrpSpPr/>
+        <p:nvPr/>
+      </p:nvGrpSpPr>
+      <p:grpSpPr>
+        <a:xfrm>
+          <a:off x="0" y="0"/>
+          <a:ext cx="0" cy="0"/>
+          <a:chOff x="0" y="0"/>
+          <a:chExt cx="0" cy="0"/>
+        </a:xfrm>
+      </p:grpSpPr>
+      <p:sp>
+        <p:nvSpPr>
+          <p:cNvPr id="4" name="Title 3"/>
+          <p:cNvSpPr>
+            <a:spLocks noGrp="1"/>
+          </p:cNvSpPr>
+          <p:nvPr>
+            <p:ph type="title"/>
+          </p:nvPr>
+        </p:nvSpPr>
+        <p:spPr/>
+        <p:txBody>
+          <a:bodyPr/>
+          <a:lstStyle/>
+          <a:p>
+            <a:r>
+              <a:rPr sz="3200"/>
+              <a:t>Appendix: native vs fine-mesh compliance</a:t>
+            </a:r>
+          </a:p>
+        </p:txBody>
+      </p:sp>
+      <p:graphicFrame>
+        <p:nvGraphicFramePr>
+          <p:cNvPr id="5" name="Table 4"/>
+          <p:cNvGraphicFramePr>
+            <a:graphicFrameLocks noGrp="1"/>
+          </p:cNvGraphicFramePr>
+          <p:nvPr/>
+        </p:nvGraphicFramePr>
+        <p:xfrm>
+          <a:off x="576000" y="1660000"/>
+          <a:ext cx="11040000" cy="1640000"/>
+        </p:xfrm>
+        <a:graphic>
+          <a:graphicData uri="http://schemas.openxmlformats.org/drawingml/2006/table">
+            <a:tbl>
+              <a:tblPr>
+                <a:tableStyleId>{5C22544A-7EE6-4342-B048-85BDC9FD1C3A}</a:tableStyleId>
+              </a:tblPr>
+              <a:tblGrid>
+                <a:gridCol w="3300000">
+                  <a:extLst>
+                    <a:ext uri="{9D8B030D-6E8A-4147-A177-3AD203B41FA5}">
+                      <a16:colId xmlns:a16="http://schemas.microsoft.com/office/drawing/2014/main" val="20000"/>
+                    </a:ext>
+                  </a:extLst>
+                </a:gridCol>
+                <a:gridCol w="1850000">
+                  <a:extLst>
+                    <a:ext uri="{9D8B030D-6E8A-4147-A177-3AD203B41FA5}">
+                      <a16:colId xmlns:a16="http://schemas.microsoft.com/office/drawing/2014/main" val="20001"/>
+                    </a:ext>
+                  </a:extLst>
+                </a:gridCol>
+                <a:gridCol w="1850000">
+                  <a:extLst>
+                    <a:ext uri="{9D8B030D-6E8A-4147-A177-3AD203B41FA5}">
+                      <a16:colId xmlns:a16="http://schemas.microsoft.com/office/drawing/2014/main" val="20002"/>
+                    </a:ext>
+                  </a:extLst>
+                </a:gridCol>
+                <a:gridCol w="1820000">
+                  <a:extLst>
+                    <a:ext uri="{9D8B030D-6E8A-4147-A177-3AD203B41FA5}">
+                      <a16:colId xmlns:a16="http://schemas.microsoft.com/office/drawing/2014/main" val="20003"/>
+                    </a:ext>
+                  </a:extLst>
+                </a:gridCol>
+                <a:gridCol w="2220000">
+                  <a:extLst>
+                    <a:ext uri="{9D8B030D-6E8A-4147-A177-3AD203B41FA5}">
+                      <a16:colId xmlns:a16="http://schemas.microsoft.com/office/drawing/2014/main" val="20004"/>
+                    </a:ext>
+                  </a:extLst>
+                </a:gridCol>
+              </a:tblGrid>
+              <a:tr h="410000">
+                <a:tc>
+                  <a:txBody>
+                    <a:bodyPr/>
+                    <a:lstStyle/>
+                    <a:p>
+                      <a:pPr algn="l"/>
+                      <a:r>
+                        <a:rPr sz="1250" b="1">
+                          <a:solidFill>
+                            <a:srgbClr val="FFFFFF"/>
+                          </a:solidFill>
+                        </a:rPr>
+                        <a:t>Model</a:t>
+                      </a:r>
+                    </a:p>
+                  </a:txBody>
+                  <a:tcPr marL="82000" marR="55000" marT="14000" marB="14000" anchor="ctr">
+                    <a:solidFill>
+                      <a:srgbClr val="1D8DB0"/>
+                    </a:solidFill>
+                  </a:tcPr>
+                </a:tc>
+                <a:tc>
+                  <a:txBody>
+                    <a:bodyPr/>
+                    <a:lstStyle/>
+                    <a:p>
+                      <a:pPr algn="ctr"/>
+                      <a:r>
+                        <a:rPr sz="1250" b="1">
+                          <a:solidFill>
+                            <a:srgbClr val="FFFFFF"/>
+                          </a:solidFill>
+                        </a:rPr>
+                        <a:t>Analysis</a:t>
+                      </a:r>
+                    </a:p>
+                  </a:txBody>
+                  <a:tcPr marL="82000" marR="55000" marT="14000" marB="14000" anchor="ctr">
+                    <a:solidFill>
+                      <a:srgbClr val="1D8DB0"/>
+                    </a:solidFill>
+                  </a:tcPr>
+                </a:tc>
+                <a:tc>
+                  <a:txBody>
+                    <a:bodyPr/>
+                    <a:lstStyle/>
+                    <a:p>
+                      <a:pPr algn="ctr"/>
+                      <a:r>
+                        <a:rPr sz="1250" b="1">
+                          <a:solidFill>
+                            <a:srgbClr val="FFFFFF"/>
+                          </a:solidFill>
+                        </a:rPr>
+                        <a:t>Density</a:t>
+                      </a:r>
+                    </a:p>
+                  </a:txBody>
+                  <a:tcPr marL="82000" marR="55000" marT="14000" marB="14000" anchor="ctr">
+                    <a:solidFill>
+                      <a:srgbClr val="1D8DB0"/>
+                    </a:solidFill>
+                  </a:tcPr>
+                </a:tc>
+                <a:tc>
+                  <a:txBody>
+                    <a:bodyPr/>
+                    <a:lstStyle/>
+                    <a:p>
+                      <a:pPr algn="ctr"/>
+                      <a:r>
+                        <a:rPr sz="1250" b="1">
+                          <a:solidFill>
+                            <a:srgbClr val="FFFFFF"/>
+                          </a:solidFill>
+                        </a:rPr>
+                        <a:t>Native C</a:t>
+                      </a:r>
+                    </a:p>
+                  </a:txBody>
+                  <a:tcPr marL="82000" marR="55000" marT="14000" marB="14000" anchor="ctr">
+                    <a:solidFill>
+                      <a:srgbClr val="1D8DB0"/>
+                    </a:solidFill>
+                  </a:tcPr>
+                </a:tc>
+                <a:tc>
+                  <a:txBody>
+                    <a:bodyPr/>
+                    <a:lstStyle/>
+                    <a:p>
+                      <a:pPr algn="ctr"/>
+                      <a:r>
+                        <a:rPr sz="1250" b="1">
+                          <a:solidFill>
+                            <a:srgbClr val="FFFFFF"/>
+                          </a:solidFill>
+                        </a:rPr>
+                        <a:t>Fine-mesh C</a:t>
+                      </a:r>
+                    </a:p>
+                  </a:txBody>
+                  <a:tcPr marL="82000" marR="55000" marT="14000" marB="14000" anchor="ctr">
+                    <a:solidFill>
+                      <a:srgbClr val="1D8DB0"/>
+                    </a:solidFill>
+                  </a:tcPr>
+                </a:tc>
+                <a:extLst>
+                  <a:ext uri="{0D108BD9-81ED-4DB2-BD59-A6C34878D82A}">
+                    <a16:rowId xmlns:a16="http://schemas.microsoft.com/office/drawing/2014/main" val="10000"/>
+                  </a:ext>
+                </a:extLst>
+              </a:tr>
+              <a:tr h="410000">
+                <a:tc>
+                  <a:txBody>
+                    <a:bodyPr/>
+                    <a:lstStyle/>
+                    <a:p>
+                      <a:pPr algn="l"/>
+                      <a:r>
+                        <a:rPr sz="1250" b="0">
+                          <a:solidFill>
+                            <a:srgbClr val="2F4D5D"/>
+                          </a:solidFill>
+                        </a:rPr>
+                        <a:t>Classical fine</a:t>
+                      </a:r>
+                    </a:p>
+                  </a:txBody>
+                  <a:tcPr marL="82000" marR="55000" marT="14000" marB="14000" anchor="ctr">
+                    <a:solidFill>
+                      <a:srgbClr val="FFFFFF"/>
+                    </a:solidFill>
+                  </a:tcPr>
+                </a:tc>
+                <a:tc>
+                  <a:txBody>
+                    <a:bodyPr/>
+                    <a:lstStyle/>
+                    <a:p>
+                      <a:pPr algn="ctr"/>
+                      <a:r>
+                        <a:rPr sz="1250" b="0">
+                          <a:solidFill>
+                            <a:srgbClr val="2F4D5D"/>
+                          </a:solidFill>
+                        </a:rPr>
+                        <a:t>600 × 200</a:t>
+                      </a:r>
+                    </a:p>
+                  </a:txBody>
+                  <a:tcPr marL="82000" marR="55000" marT="14000" marB="14000" anchor="ctr">
+                    <a:solidFill>
+                      <a:srgbClr val="FFFFFF"/>
+                    </a:solidFill>
+                  </a:tcPr>
+                </a:tc>
+                <a:tc>
+                  <a:txBody>
+                    <a:bodyPr/>
+                    <a:lstStyle/>
+                    <a:p>
+                      <a:pPr algn="ctr"/>
+                      <a:r>
+                        <a:rPr sz="1250" b="0">
+                          <a:solidFill>
+                            <a:srgbClr val="2F4D5D"/>
+                          </a:solidFill>
+                        </a:rPr>
+                        <a:t>600 × 200</a:t>
+                      </a:r>
+                    </a:p>
+                  </a:txBody>
+                  <a:tcPr marL="82000" marR="55000" marT="14000" marB="14000" anchor="ctr">
+                    <a:solidFill>
+                      <a:srgbClr val="FFFFFF"/>
+                    </a:solidFill>
+                  </a:tcPr>
+                </a:tc>
+                <a:tc>
+                  <a:txBody>
+                    <a:bodyPr/>
+                    <a:lstStyle/>
+                    <a:p>
+                      <a:pPr algn="ctr"/>
+                      <a:r>
+                        <a:rPr sz="1250" b="0">
+                          <a:solidFill>
+                            <a:srgbClr val="2F4D5D"/>
+                          </a:solidFill>
+                        </a:rPr>
+                        <a:t>224.60</a:t>
+                      </a:r>
+                    </a:p>
+                  </a:txBody>
+                  <a:tcPr marL="82000" marR="55000" marT="14000" marB="14000" anchor="ctr">
+                    <a:solidFill>
+                      <a:srgbClr val="FFFFFF"/>
+                    </a:solidFill>
+                  </a:tcPr>
+                </a:tc>
+                <a:tc>
+                  <a:txBody>
+                    <a:bodyPr/>
+                    <a:lstStyle/>
+                    <a:p>
+                      <a:pPr algn="ctr"/>
+                      <a:r>
+                        <a:rPr sz="1250" b="0">
+                          <a:solidFill>
+                            <a:srgbClr val="2F4D5D"/>
+                          </a:solidFill>
+                        </a:rPr>
+                        <a:t>224.60</a:t>
+                      </a:r>
+                    </a:p>
+                  </a:txBody>
+                  <a:tcPr marL="82000" marR="55000" marT="14000" marB="14000" anchor="ctr">
+                    <a:solidFill>
+                      <a:srgbClr val="FFFFFF"/>
+                    </a:solidFill>
+                  </a:tcPr>
+                </a:tc>
+                <a:extLst>
+                  <a:ext uri="{0D108BD9-81ED-4DB2-BD59-A6C34878D82A}">
+                    <a16:rowId xmlns:a16="http://schemas.microsoft.com/office/drawing/2014/main" val="10001"/>
+                  </a:ext>
+                </a:extLst>
+              </a:tr>
+              <a:tr h="410000">
+                <a:tc>
+                  <a:txBody>
+                    <a:bodyPr/>
+                    <a:lstStyle/>
+                    <a:p>
+                      <a:pPr algn="l"/>
+                      <a:r>
+                        <a:rPr sz="1250" b="0">
+                          <a:solidFill>
+                            <a:srgbClr val="2F4D5D"/>
+                          </a:solidFill>
+                        </a:rPr>
+                        <a:t>MTOP</a:t>
+                      </a:r>
+                    </a:p>
+                  </a:txBody>
+                  <a:tcPr marL="82000" marR="55000" marT="14000" marB="14000" anchor="ctr">
+                    <a:solidFill>
+                      <a:srgbClr val="FFFFFF"/>
+                    </a:solidFill>
+                  </a:tcPr>
+                </a:tc>
+                <a:tc>
+                  <a:txBody>
+                    <a:bodyPr/>
+                    <a:lstStyle/>
+                    <a:p>
+                      <a:pPr algn="ctr"/>
+                      <a:r>
+                        <a:rPr sz="1250" b="0">
+                          <a:solidFill>
+                            <a:srgbClr val="2F4D5D"/>
+                          </a:solidFill>
+                        </a:rPr>
+                        <a:t>120 × 40</a:t>
+                      </a:r>
+                    </a:p>
+                  </a:txBody>
+                  <a:tcPr marL="82000" marR="55000" marT="14000" marB="14000" anchor="ctr">
+                    <a:solidFill>
+                      <a:srgbClr val="FFFFFF"/>
+                    </a:solidFill>
+                  </a:tcPr>
+                </a:tc>
+                <a:tc>
+                  <a:txBody>
+                    <a:bodyPr/>
+                    <a:lstStyle/>
+                    <a:p>
+                      <a:pPr algn="ctr"/>
+                      <a:r>
+                        <a:rPr sz="1250" b="0">
+                          <a:solidFill>
+                            <a:srgbClr val="2F4D5D"/>
+                          </a:solidFill>
+                        </a:rPr>
+                        <a:t>600 × 200</a:t>
+                      </a:r>
+                    </a:p>
+                  </a:txBody>
+                  <a:tcPr marL="82000" marR="55000" marT="14000" marB="14000" anchor="ctr">
+                    <a:solidFill>
+                      <a:srgbClr val="FFFFFF"/>
+                    </a:solidFill>
+                  </a:tcPr>
+                </a:tc>
+                <a:tc>
+                  <a:txBody>
+                    <a:bodyPr/>
+                    <a:lstStyle/>
+                    <a:p>
+                      <a:pPr algn="ctr"/>
+                      <a:r>
+                        <a:rPr sz="1250" b="0">
+                          <a:solidFill>
+                            <a:srgbClr val="2F4D5D"/>
+                          </a:solidFill>
+                        </a:rPr>
+                        <a:t>219.07</a:t>
+                      </a:r>
+                    </a:p>
+                  </a:txBody>
+                  <a:tcPr marL="82000" marR="55000" marT="14000" marB="14000" anchor="ctr">
+                    <a:solidFill>
+                      <a:srgbClr val="FFFFFF"/>
+                    </a:solidFill>
+                  </a:tcPr>
+                </a:tc>
+                <a:tc>
+                  <a:txBody>
+                    <a:bodyPr/>
+                    <a:lstStyle/>
+                    <a:p>
+                      <a:pPr algn="ctr"/>
+                      <a:r>
+                        <a:rPr sz="1250" b="0">
+                          <a:solidFill>
+                            <a:srgbClr val="2F4D5D"/>
+                          </a:solidFill>
+                        </a:rPr>
+                        <a:t>224.70</a:t>
+                      </a:r>
+                    </a:p>
+                  </a:txBody>
+                  <a:tcPr marL="82000" marR="55000" marT="14000" marB="14000" anchor="ctr">
+                    <a:solidFill>
+                      <a:srgbClr val="FFFFFF"/>
+                    </a:solidFill>
+                  </a:tcPr>
+                </a:tc>
+                <a:extLst>
+                  <a:ext uri="{0D108BD9-81ED-4DB2-BD59-A6C34878D82A}">
+                    <a16:rowId xmlns:a16="http://schemas.microsoft.com/office/drawing/2014/main" val="10002"/>
+                  </a:ext>
+                </a:extLst>
+              </a:tr>
+              <a:tr h="410000">
+                <a:tc>
+                  <a:txBody>
+                    <a:bodyPr/>
+                    <a:lstStyle/>
+                    <a:p>
+                      <a:pPr algn="l"/>
+                      <a:r>
+                        <a:rPr sz="1250" b="0">
+                          <a:solidFill>
+                            <a:srgbClr val="2F4D5D"/>
+                          </a:solidFill>
+                        </a:rPr>
+                        <a:t>Classical coarse-resolution</a:t>
+                      </a:r>
+                    </a:p>
+                  </a:txBody>
+                  <a:tcPr marL="82000" marR="55000" marT="14000" marB="14000" anchor="ctr">
+                    <a:solidFill>
+                      <a:srgbClr val="FFFFFF"/>
+                    </a:solidFill>
+                  </a:tcPr>
+                </a:tc>
+                <a:tc>
+                  <a:txBody>
+                    <a:bodyPr/>
+                    <a:lstStyle/>
+                    <a:p>
+                      <a:pPr algn="ctr"/>
+                      <a:r>
+                        <a:rPr sz="1250" b="0">
+                          <a:solidFill>
+                            <a:srgbClr val="2F4D5D"/>
+                          </a:solidFill>
+                        </a:rPr>
+                        <a:t>120 × 40</a:t>
+                      </a:r>
+                    </a:p>
+                  </a:txBody>
+                  <a:tcPr marL="82000" marR="55000" marT="14000" marB="14000" anchor="ctr">
+                    <a:solidFill>
+                      <a:srgbClr val="FFFFFF"/>
+                    </a:solidFill>
+                  </a:tcPr>
+                </a:tc>
+                <a:tc>
+                  <a:txBody>
+                    <a:bodyPr/>
+                    <a:lstStyle/>
+                    <a:p>
+                      <a:pPr algn="ctr"/>
+                      <a:r>
+                        <a:rPr sz="1250" b="0">
+                          <a:solidFill>
+                            <a:srgbClr val="2F4D5D"/>
+                          </a:solidFill>
+                        </a:rPr>
+                        <a:t>120 × 40</a:t>
+                      </a:r>
+                    </a:p>
+                  </a:txBody>
+                  <a:tcPr marL="82000" marR="55000" marT="14000" marB="14000" anchor="ctr">
+                    <a:solidFill>
+                      <a:srgbClr val="FFFFFF"/>
+                    </a:solidFill>
+                  </a:tcPr>
+                </a:tc>
+                <a:tc>
+                  <a:txBody>
+                    <a:bodyPr/>
+                    <a:lstStyle/>
+                    <a:p>
+                      <a:pPr algn="ctr"/>
+                      <a:r>
+                        <a:rPr sz="1250" b="0">
+                          <a:solidFill>
+                            <a:srgbClr val="2F4D5D"/>
+                          </a:solidFill>
+                        </a:rPr>
+                        <a:t>219.11</a:t>
+                      </a:r>
+                    </a:p>
+                  </a:txBody>
+                  <a:tcPr marL="82000" marR="55000" marT="14000" marB="14000" anchor="ctr">
+                    <a:solidFill>
+                      <a:srgbClr val="FFFFFF"/>
+                    </a:solidFill>
+                  </a:tcPr>
+                </a:tc>
+                <a:tc>
+                  <a:txBody>
+                    <a:bodyPr/>
+                    <a:lstStyle/>
+                    <a:p>
+                      <a:pPr algn="ctr"/>
+                      <a:r>
+                        <a:rPr sz="1250" b="0">
+                          <a:solidFill>
+                            <a:srgbClr val="2F4D5D"/>
+                          </a:solidFill>
+                        </a:rPr>
+                        <a:t>226.04</a:t>
+                      </a:r>
+                    </a:p>
+                  </a:txBody>
+                  <a:tcPr marL="82000" marR="55000" marT="14000" marB="14000" anchor="ctr">
+                    <a:solidFill>
+                      <a:srgbClr val="FFFFFF"/>
+                    </a:solidFill>
+                  </a:tcPr>
+                </a:tc>
+                <a:extLst>
+                  <a:ext uri="{0D108BD9-81ED-4DB2-BD59-A6C34878D82A}">
+                    <a16:rowId xmlns:a16="http://schemas.microsoft.com/office/drawing/2014/main" val="10003"/>
+                  </a:ext>
+                </a:extLst>
+              </a:tr>
+            </a:tbl>
+          </a:graphicData>
+        </a:graphic>
+      </p:graphicFrame>
+      <p:sp>
+        <p:nvSpPr>
+          <p:cNvPr id="6" name="TextBox 5"/>
+          <p:cNvSpPr txBox="1"/>
+          <p:nvPr/>
+        </p:nvSpPr>
+        <p:spPr>
+          <a:xfrm>
+            <a:off x="576000" y="3640000"/>
+            <a:ext cx="11040000" cy="2200000"/>
+          </a:xfrm>
+          <a:prstGeom prst="rect">
+            <a:avLst/>
+          </a:prstGeom>
+          <a:noFill/>
+        </p:spPr>
+        <p:txBody>
+          <a:bodyPr wrap="square" lIns="36000" rIns="36000" anchor="t">
+            <a:spAutoFit/>
+          </a:bodyPr>
+          <a:lstStyle/>
+          <a:p>
+            <a:pPr>
+              <a:spcAft>
+                <a:spcPts val="400"/>
+              </a:spcAft>
+            </a:pPr>
+            <a:r>
+              <a:rPr sz="1700" b="1">
+                <a:solidFill>
+                  <a:srgbClr val="1D8DB0"/>
+                </a:solidFill>
+              </a:rPr>
+              <a:t>Why two compliance values?</a:t>
+            </a:r>
+          </a:p>
+          <a:p>
+            <a:pPr>
+              <a:spcAft>
+                <a:spcPts val="400"/>
+              </a:spcAft>
+            </a:pPr>
+            <a:r>
+              <a:rPr sz="1400" b="0">
+                <a:solidFill>
+                  <a:srgbClr val="2F4D5D"/>
+                </a:solidFill>
+              </a:rPr>
+              <a:t>Native C uses each run's own analysis model. A coarser displacement mesh is stiffer, so MTOP's native C is lower.</a:t>
+            </a:r>
+          </a:p>
+          <a:p>
+            <a:pPr>
+              <a:spcAft>
+                <a:spcPts val="400"/>
+              </a:spcAft>
+            </a:pPr>
+            <a:r>
+              <a:rPr sz="1400" b="0">
+                <a:solidFill>
+                  <a:srgbClr val="2F4D5D"/>
+                </a:solidFill>
+              </a:rPr>
+              <a:t>Fine-mesh C re-analyzes every design on the common 600 × 200 model: this is the value used for all comparisons.</a:t>
+            </a:r>
+          </a:p>
+          <a:p>
+            <a:pPr>
+              <a:spcAft>
+                <a:spcPts val="400"/>
+              </a:spcAft>
+            </a:pPr>
+            <a:r>
+              <a:rPr sz="1400" b="0">
+                <a:solidFill>
+                  <a:srgbClr val="2F4D5D"/>
+                </a:solidFill>
+              </a:rPr>
+              <a:t>The coarse-resolution baseline reaches 226.04 but is locked to 120 × 40 and is grayer; MTOP keeps the full design.</a:t>
+            </a:r>
+          </a:p>
+        </p:txBody>
+      </p:sp>
+      <p:sp>
+        <p:nvSpPr>
+          <p:cNvPr id="7" name="TextBox 6"/>
+          <p:cNvSpPr txBox="1"/>
+          <p:nvPr/>
+        </p:nvSpPr>
+        <p:spPr>
+          <a:xfrm>
+            <a:off x="6033600" y="6210000"/>
+            <a:ext cx="4993200" cy="648000"/>
+          </a:xfrm>
+          <a:prstGeom prst="rect">
+            <a:avLst/>
+          </a:prstGeom>
+          <a:noFill/>
+        </p:spPr>
+        <p:txBody>
+          <a:bodyPr wrap="square" lIns="36000" tIns="18000" rIns="36000" bIns="18000" anchor="ctr">
+            <a:spAutoFit/>
+          </a:bodyPr>
+          <a:lstStyle/>
+          <a:p>
+            <a:pPr algn="r"/>
+            <a:r>
+              <a:rPr sz="1000" b="0">
+                <a:solidFill>
+                  <a:srgbClr val="FFFFFF"/>
+                </a:solidFill>
+              </a:rPr>
+              <a:t>Structural Optimization (B-KUL-H0T88A)</a:t>
+            </a:r>
+          </a:p>
+        </p:txBody>
+      </p:sp>
+      <p:sp>
+        <p:nvSpPr>
+          <p:cNvPr id="8" name="TextBox 7"/>
+          <p:cNvSpPr txBox="1"/>
+          <p:nvPr/>
+        </p:nvSpPr>
+        <p:spPr>
+          <a:xfrm>
+            <a:off x="576000" y="6210000"/>
+            <a:ext cx="648000" cy="648000"/>
+          </a:xfrm>
+          <a:prstGeom prst="rect">
+            <a:avLst/>
+          </a:prstGeom>
+          <a:noFill/>
+        </p:spPr>
+        <p:txBody>
+          <a:bodyPr wrap="square" lIns="36000" tIns="18000" rIns="36000" bIns="18000" anchor="ctr">
+            <a:spAutoFit/>
+          </a:bodyPr>
+          <a:lstStyle/>
+          <a:p>
+            <a:pPr algn="l"/>
+            <a:r>
+              <a:rPr sz="1000" b="0">
+                <a:solidFill>
+                  <a:srgbClr val="FFFFFF"/>
+                </a:solidFill>
+              </a:rPr>
+              <a:t>21</a:t>
+            </a:r>
+          </a:p>
+        </p:txBody>
+      </p:sp>
+    </p:spTree>
+  </p:cSld>
+  <p:clrMapOvr>
+    <a:masterClrMapping/>
+  </p:clrMapOvr>
+</p:sld>
+</file>
+
+<file path=ppt/slides/slide22.xml><?xml version="1.0" encoding="utf-8"?>
+<p:sld xmlns:a="http://schemas.openxmlformats.org/drawingml/2006/main" xmlns:r="http://schemas.openxmlformats.org/officeDocument/2006/relationships" xmlns:p="http://schemas.openxmlformats.org/presentationml/2006/main">
+  <p:cSld>
+    <p:spTree>
+      <p:nvGrpSpPr>
+        <p:cNvPr id="1" name=""/>
+        <p:cNvGrpSpPr/>
+        <p:nvPr/>
+      </p:nvGrpSpPr>
+      <p:grpSpPr>
+        <a:xfrm>
+          <a:off x="0" y="0"/>
+          <a:ext cx="0" cy="0"/>
+          <a:chOff x="0" y="0"/>
+          <a:chExt cx="0" cy="0"/>
+        </a:xfrm>
+      </p:grpSpPr>
+      <p:sp>
+        <p:nvSpPr>
+          <p:cNvPr id="4" name="Title 3"/>
+          <p:cNvSpPr>
+            <a:spLocks noGrp="1"/>
+          </p:cNvSpPr>
+          <p:nvPr>
+            <p:ph type="title"/>
+          </p:nvPr>
+        </p:nvSpPr>
+        <p:spPr/>
+        <p:txBody>
+          <a:bodyPr/>
+          <a:lstStyle/>
+          <a:p>
+            <a:r>
+              <a:rPr sz="3200"/>
+              <a:t>Appendix: the OC and MMA updates</a:t>
+            </a:r>
+          </a:p>
+        </p:txBody>
+      </p:sp>
+      <p:sp>
+        <p:nvSpPr>
+          <p:cNvPr id="5" name="TextBox 4"/>
+          <p:cNvSpPr txBox="1"/>
+          <p:nvPr/>
+        </p:nvSpPr>
+        <p:spPr>
+          <a:xfrm>
+            <a:off x="576000" y="1410000"/>
+            <a:ext cx="5500000" cy="4740000"/>
+          </a:xfrm>
+          <a:prstGeom prst="rect">
+            <a:avLst/>
+          </a:prstGeom>
+          <a:noFill/>
+        </p:spPr>
+        <p:txBody>
+          <a:bodyPr wrap="square" lIns="36000" rIns="36000" anchor="t">
+            <a:spAutoFit/>
+          </a:bodyPr>
+          <a:lstStyle/>
+          <a:p>
+            <a:pPr>
+              <a:spcAft>
+                <a:spcPts val="400"/>
+              </a:spcAft>
+            </a:pPr>
+            <a:r>
+              <a:rPr sz="1700" b="1">
+                <a:solidFill>
+                  <a:srgbClr val="1D8DB0"/>
+                </a:solidFill>
+              </a:rPr>
+              <a:t>Optimality criteria (OC)</a:t>
+            </a:r>
+          </a:p>
+          <a:p>
+            <a:pPr>
+              <a:spcAft>
+                <a:spcPts val="400"/>
+              </a:spcAft>
+            </a:pPr>
+            <a:r>
+              <a:rPr sz="1500" b="0">
+                <a:solidFill>
+                  <a:srgbClr val="2F4D5D"/>
+                </a:solidFill>
+              </a:rPr>
+              <a:t>x_i  ←  x_i · ( B_i / λ )^(1/2)</a:t>
+            </a:r>
+          </a:p>
+          <a:p>
+            <a:pPr>
+              <a:spcAft>
+                <a:spcPts val="400"/>
+              </a:spcAft>
+            </a:pPr>
+            <a:r>
+              <a:rPr sz="1300" b="0">
+                <a:solidFill>
+                  <a:srgbClr val="2F4D5D"/>
+                </a:solidFill>
+              </a:rPr>
+              <a:t>then clip to move limit m = 0.2 and to [0,1]</a:t>
+            </a:r>
+          </a:p>
+          <a:p>
+            <a:pPr>
+              <a:spcAft>
+                <a:spcPts val="400"/>
+              </a:spcAft>
+            </a:pPr>
+            <a:r>
+              <a:rPr sz="1400" b="0">
+                <a:solidFill>
+                  <a:srgbClr val="2F4D5D"/>
+                </a:solidFill>
+              </a:rPr>
+              <a:t>B_i = - (∂C/∂x_i) / (∂V/∂x_i)</a:t>
+            </a:r>
+          </a:p>
+          <a:p>
+            <a:pPr>
+              <a:spcAft>
+                <a:spcPts val="400"/>
+              </a:spcAft>
+            </a:pPr>
+            <a:r>
+              <a:rPr sz="1300" b="0">
+                <a:solidFill>
+                  <a:srgbClr val="2F4D5D"/>
+                </a:solidFill>
+              </a:rPr>
+              <a:t>optimality criterion: B_i = λ at all interior cells</a:t>
+            </a:r>
+          </a:p>
+          <a:p>
+            <a:pPr>
+              <a:spcAft>
+                <a:spcPts val="400"/>
+              </a:spcAft>
+            </a:pPr>
+            <a:r>
+              <a:rPr sz="1300" b="0">
+                <a:solidFill>
+                  <a:srgbClr val="2F4D5D"/>
+                </a:solidFill>
+              </a:rPr>
+              <a:t>λ from bisection so the volume constraint is active</a:t>
+            </a:r>
+          </a:p>
+          <a:p>
+            <a:pPr>
+              <a:spcBef>
+                <a:spcPts val="1200"/>
+              </a:spcBef>
+              <a:spcAft>
+                <a:spcPts val="400"/>
+              </a:spcAft>
+            </a:pPr>
+            <a:r>
+              <a:rPr sz="1700" b="1">
+                <a:solidFill>
+                  <a:srgbClr val="1D8DB0"/>
+                </a:solidFill>
+              </a:rPr>
+              <a:t>MMA, method of moving asymptotes</a:t>
+            </a:r>
+          </a:p>
+          <a:p>
+            <a:pPr>
+              <a:spcAft>
+                <a:spcPts val="400"/>
+              </a:spcAft>
+            </a:pPr>
+            <a:r>
+              <a:rPr sz="1300" b="0">
+                <a:solidFill>
+                  <a:srgbClr val="2F4D5D"/>
+                </a:solidFill>
+              </a:rPr>
+              <a:t>a separable convex subproblem each iteration</a:t>
+            </a:r>
+          </a:p>
+          <a:p>
+            <a:pPr>
+              <a:spcAft>
+                <a:spcPts val="400"/>
+              </a:spcAft>
+            </a:pPr>
+            <a:r>
+              <a:rPr sz="1300" b="0">
+                <a:solidFill>
+                  <a:srgbClr val="2F4D5D"/>
+                </a:solidFill>
+              </a:rPr>
+              <a:t>asymptotes L_k, U_k act as an adaptive trust region</a:t>
+            </a:r>
+          </a:p>
+          <a:p>
+            <a:pPr>
+              <a:spcAft>
+                <a:spcPts val="400"/>
+              </a:spcAft>
+            </a:pPr>
+            <a:r>
+              <a:rPr sz="1300" b="0">
+                <a:solidFill>
+                  <a:srgbClr val="2F4D5D"/>
+                </a:solidFill>
+              </a:rPr>
+              <a:t>general-purpose: handles the Heaviside projection</a:t>
+            </a:r>
+          </a:p>
+        </p:txBody>
+      </p:sp>
+      <p:pic>
+        <p:nvPicPr>
+          <p:cNvPr id="6" name="Picture 5" descr="mma_asymptotes.png"/>
+          <p:cNvPicPr>
+            <a:picLocks noChangeAspect="1"/>
+          </p:cNvPicPr>
+          <p:nvPr/>
+        </p:nvPicPr>
+        <p:blipFill>
+          <a:blip r:embed="rId3"/>
+          <a:stretch>
+            <a:fillRect/>
+          </a:stretch>
+        </p:blipFill>
+        <p:spPr>
+          <a:xfrm>
+            <a:off x="6300000" y="1828818"/>
+            <a:ext cx="5316000" cy="3902364"/>
+          </a:xfrm>
+          <a:prstGeom prst="rect">
+            <a:avLst/>
+          </a:prstGeom>
+        </p:spPr>
+      </p:pic>
+      <p:sp>
+        <p:nvSpPr>
+          <p:cNvPr id="7" name="TextBox 6"/>
+          <p:cNvSpPr txBox="1"/>
+          <p:nvPr/>
+        </p:nvSpPr>
+        <p:spPr>
+          <a:xfrm>
+            <a:off x="6033600" y="6210000"/>
+            <a:ext cx="4993200" cy="648000"/>
+          </a:xfrm>
+          <a:prstGeom prst="rect">
+            <a:avLst/>
+          </a:prstGeom>
+          <a:noFill/>
+        </p:spPr>
+        <p:txBody>
+          <a:bodyPr wrap="square" lIns="36000" tIns="18000" rIns="36000" bIns="18000" anchor="ctr">
+            <a:spAutoFit/>
+          </a:bodyPr>
+          <a:lstStyle/>
+          <a:p>
+            <a:pPr algn="r"/>
+            <a:r>
+              <a:rPr sz="1000" b="0">
+                <a:solidFill>
+                  <a:srgbClr val="FFFFFF"/>
+                </a:solidFill>
+              </a:rPr>
+              <a:t>Structural Optimization (B-KUL-H0T88A)</a:t>
+            </a:r>
+          </a:p>
+        </p:txBody>
+      </p:sp>
+      <p:sp>
+        <p:nvSpPr>
+          <p:cNvPr id="8" name="TextBox 7"/>
+          <p:cNvSpPr txBox="1"/>
+          <p:nvPr/>
+        </p:nvSpPr>
+        <p:spPr>
+          <a:xfrm>
+            <a:off x="576000" y="6210000"/>
+            <a:ext cx="648000" cy="648000"/>
+          </a:xfrm>
+          <a:prstGeom prst="rect">
+            <a:avLst/>
+          </a:prstGeom>
+          <a:noFill/>
+        </p:spPr>
+        <p:txBody>
+          <a:bodyPr wrap="square" lIns="36000" tIns="18000" rIns="36000" bIns="18000" anchor="ctr">
+            <a:spAutoFit/>
+          </a:bodyPr>
+          <a:lstStyle/>
+          <a:p>
+            <a:pPr algn="l"/>
+            <a:r>
+              <a:rPr sz="1000" b="0">
+                <a:solidFill>
+                  <a:srgbClr val="FFFFFF"/>
+                </a:solidFill>
+              </a:rPr>
+              <a:t>22</a:t>
+            </a:r>
+          </a:p>
+        </p:txBody>
+      </p:sp>
+    </p:spTree>
+  </p:cSld>
+  <p:clrMapOvr>
+    <a:masterClrMapping/>
+  </p:clrMapOvr>
+</p:sld>
+</file>
+
+<file path=ppt/slides/slide23.xml><?xml version="1.0" encoding="utf-8"?>
+<p:sld xmlns:a="http://schemas.openxmlformats.org/drawingml/2006/main" xmlns:r="http://schemas.openxmlformats.org/officeDocument/2006/relationships" xmlns:p="http://schemas.openxmlformats.org/presentationml/2006/main">
+  <p:cSld>
+    <p:spTree>
+      <p:nvGrpSpPr>
+        <p:cNvPr id="1" name=""/>
+        <p:cNvGrpSpPr/>
+        <p:nvPr/>
+      </p:nvGrpSpPr>
+      <p:grpSpPr>
+        <a:xfrm>
+          <a:off x="0" y="0"/>
+          <a:ext cx="0" cy="0"/>
+          <a:chOff x="0" y="0"/>
+          <a:chExt cx="0" cy="0"/>
+        </a:xfrm>
+      </p:grpSpPr>
+      <p:sp>
+        <p:nvSpPr>
+          <p:cNvPr id="4" name="Title 3"/>
+          <p:cNvSpPr>
+            <a:spLocks noGrp="1"/>
+          </p:cNvSpPr>
+          <p:nvPr>
+            <p:ph type="title"/>
+          </p:nvPr>
+        </p:nvSpPr>
+        <p:spPr/>
+        <p:txBody>
+          <a:bodyPr/>
+          <a:lstStyle/>
+          <a:p>
+            <a:r>
+              <a:rPr sz="3200"/>
+              <a:t>Appendix: Heaviside projection</a:t>
+            </a:r>
+          </a:p>
+        </p:txBody>
+      </p:sp>
+      <p:sp>
+        <p:nvSpPr>
+          <p:cNvPr id="5" name="TextBox 4"/>
+          <p:cNvSpPr txBox="1"/>
+          <p:nvPr/>
+        </p:nvSpPr>
+        <p:spPr>
+          <a:xfrm>
+            <a:off x="576000" y="1410000"/>
+            <a:ext cx="5300000" cy="4740000"/>
+          </a:xfrm>
+          <a:prstGeom prst="rect">
+            <a:avLst/>
+          </a:prstGeom>
+          <a:noFill/>
+        </p:spPr>
+        <p:txBody>
+          <a:bodyPr wrap="square" lIns="36000" rIns="36000" anchor="t">
+            <a:spAutoFit/>
+          </a:bodyPr>
+          <a:lstStyle/>
+          <a:p>
+            <a:pPr>
+              <a:spcAft>
+                <a:spcPts val="400"/>
+              </a:spcAft>
+            </a:pPr>
+            <a:r>
+              <a:rPr sz="1700" b="1">
+                <a:solidFill>
+                  <a:srgbClr val="1D8DB0"/>
+                </a:solidFill>
+              </a:rPr>
+              <a:t>Smooth Heaviside projection</a:t>
+            </a:r>
+          </a:p>
+          <a:p>
+            <a:pPr>
+              <a:spcAft>
+                <a:spcPts val="400"/>
+              </a:spcAft>
+            </a:pPr>
+            <a:r>
+              <a:rPr sz="1300" b="0">
+                <a:solidFill>
+                  <a:srgbClr val="2F4D5D"/>
+                </a:solidFill>
+              </a:rPr>
+              <a:t>projects the filtered density d toward 0 or 1:</a:t>
+            </a:r>
+          </a:p>
+          <a:p>
+            <a:pPr>
+              <a:spcAft>
+                <a:spcPts val="400"/>
+              </a:spcAft>
+            </a:pPr>
+            <a:r>
+              <a:rPr sz="1400" b="0">
+                <a:solidFill>
+                  <a:srgbClr val="2F4D5D"/>
+                </a:solidFill>
+              </a:rPr>
+              <a:t>ρ = [ tanh(βη) + tanh(β(d - η)) ]</a:t>
+            </a:r>
+          </a:p>
+          <a:p>
+            <a:pPr>
+              <a:spcAft>
+                <a:spcPts val="400"/>
+              </a:spcAft>
+            </a:pPr>
+            <a:r>
+              <a:rPr sz="1400" b="0">
+                <a:solidFill>
+                  <a:srgbClr val="2F4D5D"/>
+                </a:solidFill>
+              </a:rPr>
+              <a:t>        /  [ tanh(βη) + tanh(β(1 - η)) ]</a:t>
+            </a:r>
+          </a:p>
+          <a:p>
+            <a:pPr>
+              <a:spcAft>
+                <a:spcPts val="400"/>
+              </a:spcAft>
+            </a:pPr>
+            <a:r>
+              <a:rPr sz="1300" b="0">
+                <a:solidFill>
+                  <a:srgbClr val="2F4D5D"/>
+                </a:solidFill>
+              </a:rPr>
+              <a:t>η : threshold       β : projection sharpness</a:t>
+            </a:r>
+          </a:p>
+          <a:p>
+            <a:pPr>
+              <a:spcBef>
+                <a:spcPts val="1200"/>
+              </a:spcBef>
+              <a:spcAft>
+                <a:spcPts val="400"/>
+              </a:spcAft>
+            </a:pPr>
+            <a:r>
+              <a:rPr sz="1700" b="1">
+                <a:solidFill>
+                  <a:srgbClr val="1D8DB0"/>
+                </a:solidFill>
+              </a:rPr>
+              <a:t>Continuation in β</a:t>
+            </a:r>
+          </a:p>
+          <a:p>
+            <a:pPr>
+              <a:spcAft>
+                <a:spcPts val="400"/>
+              </a:spcAft>
+            </a:pPr>
+            <a:r>
+              <a:rPr sz="1400" b="0">
+                <a:solidFill>
+                  <a:srgbClr val="2F4D5D"/>
+                </a:solidFill>
+              </a:rPr>
+              <a:t>β doubled from 1 to 16, every 50 iterations</a:t>
+            </a:r>
+          </a:p>
+          <a:p>
+            <a:pPr>
+              <a:spcAft>
+                <a:spcPts val="400"/>
+              </a:spcAft>
+            </a:pPr>
+            <a:r>
+              <a:rPr sz="1300" b="0">
+                <a:solidFill>
+                  <a:srgbClr val="2F4D5D"/>
+                </a:solidFill>
+              </a:rPr>
+              <a:t>solve the smooth problem first, then sharpen</a:t>
+            </a:r>
+          </a:p>
+          <a:p>
+            <a:pPr>
+              <a:spcAft>
+                <a:spcPts val="400"/>
+              </a:spcAft>
+            </a:pPr>
+            <a:r>
+              <a:rPr sz="1300" b="0">
+                <a:solidFill>
+                  <a:srgbClr val="2F4D5D"/>
+                </a:solidFill>
+              </a:rPr>
+              <a:t>this avoids poor local minima at high β</a:t>
+            </a:r>
+          </a:p>
+        </p:txBody>
+      </p:sp>
+      <p:pic>
+        <p:nvPicPr>
+          <p:cNvPr id="6" name="Picture 5" descr="mtop_mma_heaviside_eta_050_convergence_iter.png"/>
+          <p:cNvPicPr>
+            <a:picLocks noChangeAspect="1"/>
+          </p:cNvPicPr>
+          <p:nvPr/>
+        </p:nvPicPr>
+        <p:blipFill>
+          <a:blip r:embed="rId3"/>
+          <a:stretch>
+            <a:fillRect/>
+          </a:stretch>
+        </p:blipFill>
+        <p:spPr>
+          <a:xfrm>
+            <a:off x="6050000" y="1681970"/>
+            <a:ext cx="5566000" cy="4196060"/>
+          </a:xfrm>
+          <a:prstGeom prst="rect">
+            <a:avLst/>
+          </a:prstGeom>
+        </p:spPr>
+      </p:pic>
+      <p:sp>
+        <p:nvSpPr>
+          <p:cNvPr id="7" name="TextBox 6"/>
+          <p:cNvSpPr txBox="1"/>
+          <p:nvPr/>
+        </p:nvSpPr>
+        <p:spPr>
+          <a:xfrm>
+            <a:off x="6033600" y="6210000"/>
+            <a:ext cx="4993200" cy="648000"/>
+          </a:xfrm>
+          <a:prstGeom prst="rect">
+            <a:avLst/>
+          </a:prstGeom>
+          <a:noFill/>
+        </p:spPr>
+        <p:txBody>
+          <a:bodyPr wrap="square" lIns="36000" tIns="18000" rIns="36000" bIns="18000" anchor="ctr">
+            <a:spAutoFit/>
+          </a:bodyPr>
+          <a:lstStyle/>
+          <a:p>
+            <a:pPr algn="r"/>
+            <a:r>
+              <a:rPr sz="1000" b="0">
+                <a:solidFill>
+                  <a:srgbClr val="FFFFFF"/>
+                </a:solidFill>
+              </a:rPr>
+              <a:t>Structural Optimization (B-KUL-H0T88A)</a:t>
+            </a:r>
+          </a:p>
+        </p:txBody>
+      </p:sp>
+      <p:sp>
+        <p:nvSpPr>
+          <p:cNvPr id="8" name="TextBox 7"/>
+          <p:cNvSpPr txBox="1"/>
+          <p:nvPr/>
+        </p:nvSpPr>
+        <p:spPr>
+          <a:xfrm>
+            <a:off x="576000" y="6210000"/>
+            <a:ext cx="648000" cy="648000"/>
+          </a:xfrm>
+          <a:prstGeom prst="rect">
+            <a:avLst/>
+          </a:prstGeom>
+          <a:noFill/>
+        </p:spPr>
+        <p:txBody>
+          <a:bodyPr wrap="square" lIns="36000" tIns="18000" rIns="36000" bIns="18000" anchor="ctr">
+            <a:spAutoFit/>
+          </a:bodyPr>
+          <a:lstStyle/>
+          <a:p>
+            <a:pPr algn="l"/>
+            <a:r>
+              <a:rPr sz="1000" b="0">
+                <a:solidFill>
+                  <a:srgbClr val="FFFFFF"/>
+                </a:solidFill>
+              </a:rPr>
+              <a:t>23</a:t>
             </a:r>
           </a:p>
         </p:txBody>
@@ -8375,7 +12950,7 @@
 </file>
 
 <file path=ppt/slides/slide3.xml><?xml version="1.0" encoding="utf-8"?>
-<p:sld xmlns:a="http://schemas.openxmlformats.org/drawingml/2006/main" xmlns:p="http://schemas.openxmlformats.org/presentationml/2006/main" xmlns:r="http://schemas.openxmlformats.org/officeDocument/2006/relationships">
+<p:sld xmlns:a="http://schemas.openxmlformats.org/drawingml/2006/main" xmlns:r="http://schemas.openxmlformats.org/officeDocument/2006/relationships" xmlns:p="http://schemas.openxmlformats.org/presentationml/2006/main">
   <p:cSld>
     <p:spTree>
       <p:nvGrpSpPr>
@@ -8383,7 +12958,14 @@
         <p:cNvGrpSpPr/>
         <p:nvPr/>
       </p:nvGrpSpPr>
-      <p:grpSpPr/>
+      <p:grpSpPr>
+        <a:xfrm>
+          <a:off x="0" y="0"/>
+          <a:ext cx="0" cy="0"/>
+          <a:chOff x="0" y="0"/>
+          <a:chExt cx="0" cy="0"/>
+        </a:xfrm>
+      </p:grpSpPr>
       <p:sp>
         <p:nvSpPr>
           <p:cNvPr id="2" name="Content Placeholder 1"/>
@@ -8544,7 +13126,7 @@
           <p:nvPr/>
         </p:nvPicPr>
         <p:blipFill>
-          <a:blip r:embed="rId2"/>
+          <a:blip r:embed="rId3"/>
           <a:stretch>
             <a:fillRect/>
           </a:stretch>
@@ -8576,7 +13158,7 @@
           <a:noFill/>
         </p:spPr>
         <p:txBody>
-          <a:bodyPr wrap="square" anchor="ctr" lIns="36000" rIns="36000" tIns="18000" bIns="18000">
+          <a:bodyPr wrap="square" lIns="36000" tIns="18000" rIns="36000" bIns="18000" anchor="ctr">
             <a:spAutoFit/>
           </a:bodyPr>
           <a:lstStyle/>
@@ -8610,7 +13192,7 @@
           <a:noFill/>
         </p:spPr>
         <p:txBody>
-          <a:bodyPr wrap="square" anchor="ctr" lIns="36000" rIns="36000" tIns="18000" bIns="18000">
+          <a:bodyPr wrap="square" lIns="36000" tIns="18000" rIns="36000" bIns="18000" anchor="ctr">
             <a:spAutoFit/>
           </a:bodyPr>
           <a:lstStyle/>
@@ -8636,7 +13218,7 @@
 </file>
 
 <file path=ppt/slides/slide4.xml><?xml version="1.0" encoding="utf-8"?>
-<p:sld xmlns:a="http://schemas.openxmlformats.org/drawingml/2006/main" xmlns:p="http://schemas.openxmlformats.org/presentationml/2006/main" xmlns:r="http://schemas.openxmlformats.org/officeDocument/2006/relationships">
+<p:sld xmlns:a="http://schemas.openxmlformats.org/drawingml/2006/main" xmlns:r="http://schemas.openxmlformats.org/officeDocument/2006/relationships" xmlns:p="http://schemas.openxmlformats.org/presentationml/2006/main">
   <p:cSld>
     <p:spTree>
       <p:nvGrpSpPr>
@@ -8644,7 +13226,14 @@
         <p:cNvGrpSpPr/>
         <p:nvPr/>
       </p:nvGrpSpPr>
-      <p:grpSpPr/>
+      <p:grpSpPr>
+        <a:xfrm>
+          <a:off x="0" y="0"/>
+          <a:ext cx="0" cy="0"/>
+          <a:chOff x="0" y="0"/>
+          <a:chExt cx="0" cy="0"/>
+        </a:xfrm>
+      </p:grpSpPr>
       <p:sp>
         <p:nvSpPr>
           <p:cNvPr id="2" name="Content Placeholder 1"/>
@@ -8787,7 +13376,7 @@
           <p:nvPr/>
         </p:nvPicPr>
         <p:blipFill>
-          <a:blip r:embed="rId2"/>
+          <a:blip r:embed="rId3"/>
           <a:stretch>
             <a:fillRect/>
           </a:stretch>
@@ -8819,7 +13408,7 @@
           <a:noFill/>
         </p:spPr>
         <p:txBody>
-          <a:bodyPr wrap="square" anchor="ctr" lIns="36000" rIns="36000" tIns="18000" bIns="18000">
+          <a:bodyPr wrap="square" lIns="36000" tIns="18000" rIns="36000" bIns="18000" anchor="ctr">
             <a:spAutoFit/>
           </a:bodyPr>
           <a:lstStyle/>
@@ -8853,7 +13442,7 @@
           <a:noFill/>
         </p:spPr>
         <p:txBody>
-          <a:bodyPr wrap="square" anchor="ctr" lIns="36000" rIns="36000" tIns="18000" bIns="18000">
+          <a:bodyPr wrap="square" lIns="36000" tIns="18000" rIns="36000" bIns="18000" anchor="ctr">
             <a:spAutoFit/>
           </a:bodyPr>
           <a:lstStyle/>
@@ -8879,7 +13468,7 @@
 </file>
 
 <file path=ppt/slides/slide5.xml><?xml version="1.0" encoding="utf-8"?>
-<p:sld xmlns:a="http://schemas.openxmlformats.org/drawingml/2006/main" xmlns:p="http://schemas.openxmlformats.org/presentationml/2006/main" xmlns:r="http://schemas.openxmlformats.org/officeDocument/2006/relationships">
+<p:sld xmlns:a="http://schemas.openxmlformats.org/drawingml/2006/main" xmlns:r="http://schemas.openxmlformats.org/officeDocument/2006/relationships" xmlns:p="http://schemas.openxmlformats.org/presentationml/2006/main">
   <p:cSld>
     <p:spTree>
       <p:nvGrpSpPr>
@@ -8887,7 +13476,14 @@
         <p:cNvGrpSpPr/>
         <p:nvPr/>
       </p:nvGrpSpPr>
-      <p:grpSpPr/>
+      <p:grpSpPr>
+        <a:xfrm>
+          <a:off x="0" y="0"/>
+          <a:ext cx="0" cy="0"/>
+          <a:chOff x="0" y="0"/>
+          <a:chExt cx="0" cy="0"/>
+        </a:xfrm>
+      </p:grpSpPr>
       <p:sp>
         <p:nvSpPr>
           <p:cNvPr id="2" name="Content Placeholder 1"/>
@@ -9058,10 +13654,34 @@
                 <a:tableStyleId>{5C22544A-7EE6-4342-B048-85BDC9FD1C3A}</a:tableStyleId>
               </a:tblPr>
               <a:tblGrid>
-                <a:gridCol w="720000"/>
-                <a:gridCol w="1500000"/>
-                <a:gridCol w="1180000"/>
-                <a:gridCol w="2530000"/>
+                <a:gridCol w="720000">
+                  <a:extLst>
+                    <a:ext uri="{9D8B030D-6E8A-4147-A177-3AD203B41FA5}">
+                      <a16:colId xmlns:a16="http://schemas.microsoft.com/office/drawing/2014/main" val="20000"/>
+                    </a:ext>
+                  </a:extLst>
+                </a:gridCol>
+                <a:gridCol w="1500000">
+                  <a:extLst>
+                    <a:ext uri="{9D8B030D-6E8A-4147-A177-3AD203B41FA5}">
+                      <a16:colId xmlns:a16="http://schemas.microsoft.com/office/drawing/2014/main" val="20001"/>
+                    </a:ext>
+                  </a:extLst>
+                </a:gridCol>
+                <a:gridCol w="1180000">
+                  <a:extLst>
+                    <a:ext uri="{9D8B030D-6E8A-4147-A177-3AD203B41FA5}">
+                      <a16:colId xmlns:a16="http://schemas.microsoft.com/office/drawing/2014/main" val="20002"/>
+                    </a:ext>
+                  </a:extLst>
+                </a:gridCol>
+                <a:gridCol w="2530000">
+                  <a:extLst>
+                    <a:ext uri="{9D8B030D-6E8A-4147-A177-3AD203B41FA5}">
+                      <a16:colId xmlns:a16="http://schemas.microsoft.com/office/drawing/2014/main" val="20003"/>
+                    </a:ext>
+                  </a:extLst>
+                </a:gridCol>
               </a:tblGrid>
               <a:tr h="437500">
                 <a:tc>
@@ -9080,7 +13700,7 @@
                       </a:r>
                     </a:p>
                   </a:txBody>
-                  <a:tcPr anchor="ctr" marL="90000" marR="60000" marT="20000" marB="20000">
+                  <a:tcPr marL="90000" marR="60000" marT="20000" marB="20000" anchor="ctr">
                     <a:solidFill>
                       <a:srgbClr val="1D8DB0"/>
                     </a:solidFill>
@@ -9102,7 +13722,7 @@
                       </a:r>
                     </a:p>
                   </a:txBody>
-                  <a:tcPr anchor="ctr" marL="90000" marR="60000" marT="20000" marB="20000">
+                  <a:tcPr marL="90000" marR="60000" marT="20000" marB="20000" anchor="ctr">
                     <a:solidFill>
                       <a:srgbClr val="1D8DB0"/>
                     </a:solidFill>
@@ -9124,7 +13744,7 @@
                       </a:r>
                     </a:p>
                   </a:txBody>
-                  <a:tcPr anchor="ctr" marL="90000" marR="60000" marT="20000" marB="20000">
+                  <a:tcPr marL="90000" marR="60000" marT="20000" marB="20000" anchor="ctr">
                     <a:solidFill>
                       <a:srgbClr val="1D8DB0"/>
                     </a:solidFill>
@@ -9146,12 +13766,17 @@
                       </a:r>
                     </a:p>
                   </a:txBody>
-                  <a:tcPr anchor="ctr" marL="90000" marR="60000" marT="20000" marB="20000">
+                  <a:tcPr marL="90000" marR="60000" marT="20000" marB="20000" anchor="ctr">
                     <a:solidFill>
                       <a:srgbClr val="1D8DB0"/>
                     </a:solidFill>
                   </a:tcPr>
                 </a:tc>
+                <a:extLst>
+                  <a:ext uri="{0D108BD9-81ED-4DB2-BD59-A6C34878D82A}">
+                    <a16:rowId xmlns:a16="http://schemas.microsoft.com/office/drawing/2014/main" val="10000"/>
+                  </a:ext>
+                </a:extLst>
               </a:tr>
               <a:tr h="437500">
                 <a:tc>
@@ -9170,7 +13795,7 @@
                       </a:r>
                     </a:p>
                   </a:txBody>
-                  <a:tcPr anchor="ctr" marL="90000" marR="60000" marT="20000" marB="20000">
+                  <a:tcPr marL="90000" marR="60000" marT="20000" marB="20000" anchor="ctr">
                     <a:solidFill>
                       <a:srgbClr val="FFFFFF"/>
                     </a:solidFill>
@@ -9192,7 +13817,7 @@
                       </a:r>
                     </a:p>
                   </a:txBody>
-                  <a:tcPr anchor="ctr" marL="90000" marR="60000" marT="20000" marB="20000">
+                  <a:tcPr marL="90000" marR="60000" marT="20000" marB="20000" anchor="ctr">
                     <a:solidFill>
                       <a:srgbClr val="FFFFFF"/>
                     </a:solidFill>
@@ -9214,7 +13839,7 @@
                       </a:r>
                     </a:p>
                   </a:txBody>
-                  <a:tcPr anchor="ctr" marL="90000" marR="60000" marT="20000" marB="20000">
+                  <a:tcPr marL="90000" marR="60000" marT="20000" marB="20000" anchor="ctr">
                     <a:solidFill>
                       <a:srgbClr val="FFFFFF"/>
                     </a:solidFill>
@@ -9236,12 +13861,17 @@
                       </a:r>
                     </a:p>
                   </a:txBody>
-                  <a:tcPr anchor="ctr" marL="90000" marR="60000" marT="20000" marB="20000">
+                  <a:tcPr marL="90000" marR="60000" marT="20000" marB="20000" anchor="ctr">
                     <a:solidFill>
                       <a:srgbClr val="FFFFFF"/>
                     </a:solidFill>
                   </a:tcPr>
                 </a:tc>
+                <a:extLst>
+                  <a:ext uri="{0D108BD9-81ED-4DB2-BD59-A6C34878D82A}">
+                    <a16:rowId xmlns:a16="http://schemas.microsoft.com/office/drawing/2014/main" val="10001"/>
+                  </a:ext>
+                </a:extLst>
               </a:tr>
               <a:tr h="437500">
                 <a:tc>
@@ -9260,7 +13890,7 @@
                       </a:r>
                     </a:p>
                   </a:txBody>
-                  <a:tcPr anchor="ctr" marL="90000" marR="60000" marT="20000" marB="20000">
+                  <a:tcPr marL="90000" marR="60000" marT="20000" marB="20000" anchor="ctr">
                     <a:solidFill>
                       <a:srgbClr val="FFFFFF"/>
                     </a:solidFill>
@@ -9282,7 +13912,7 @@
                       </a:r>
                     </a:p>
                   </a:txBody>
-                  <a:tcPr anchor="ctr" marL="90000" marR="60000" marT="20000" marB="20000">
+                  <a:tcPr marL="90000" marR="60000" marT="20000" marB="20000" anchor="ctr">
                     <a:solidFill>
                       <a:srgbClr val="FFFFFF"/>
                     </a:solidFill>
@@ -9304,7 +13934,7 @@
                       </a:r>
                     </a:p>
                   </a:txBody>
-                  <a:tcPr anchor="ctr" marL="90000" marR="60000" marT="20000" marB="20000">
+                  <a:tcPr marL="90000" marR="60000" marT="20000" marB="20000" anchor="ctr">
                     <a:solidFill>
                       <a:srgbClr val="FFFFFF"/>
                     </a:solidFill>
@@ -9326,12 +13956,17 @@
                       </a:r>
                     </a:p>
                   </a:txBody>
-                  <a:tcPr anchor="ctr" marL="90000" marR="60000" marT="20000" marB="20000">
+                  <a:tcPr marL="90000" marR="60000" marT="20000" marB="20000" anchor="ctr">
                     <a:solidFill>
                       <a:srgbClr val="FFFFFF"/>
                     </a:solidFill>
                   </a:tcPr>
                 </a:tc>
+                <a:extLst>
+                  <a:ext uri="{0D108BD9-81ED-4DB2-BD59-A6C34878D82A}">
+                    <a16:rowId xmlns:a16="http://schemas.microsoft.com/office/drawing/2014/main" val="10002"/>
+                  </a:ext>
+                </a:extLst>
               </a:tr>
               <a:tr h="437500">
                 <a:tc>
@@ -9350,7 +13985,7 @@
                       </a:r>
                     </a:p>
                   </a:txBody>
-                  <a:tcPr anchor="ctr" marL="90000" marR="60000" marT="20000" marB="20000">
+                  <a:tcPr marL="90000" marR="60000" marT="20000" marB="20000" anchor="ctr">
                     <a:solidFill>
                       <a:srgbClr val="FFFFFF"/>
                     </a:solidFill>
@@ -9372,7 +14007,7 @@
                       </a:r>
                     </a:p>
                   </a:txBody>
-                  <a:tcPr anchor="ctr" marL="90000" marR="60000" marT="20000" marB="20000">
+                  <a:tcPr marL="90000" marR="60000" marT="20000" marB="20000" anchor="ctr">
                     <a:solidFill>
                       <a:srgbClr val="FFFFFF"/>
                     </a:solidFill>
@@ -9394,7 +14029,7 @@
                       </a:r>
                     </a:p>
                   </a:txBody>
-                  <a:tcPr anchor="ctr" marL="90000" marR="60000" marT="20000" marB="20000">
+                  <a:tcPr marL="90000" marR="60000" marT="20000" marB="20000" anchor="ctr">
                     <a:solidFill>
                       <a:srgbClr val="FFFFFF"/>
                     </a:solidFill>
@@ -9416,12 +14051,17 @@
                       </a:r>
                     </a:p>
                   </a:txBody>
-                  <a:tcPr anchor="ctr" marL="90000" marR="60000" marT="20000" marB="20000">
+                  <a:tcPr marL="90000" marR="60000" marT="20000" marB="20000" anchor="ctr">
                     <a:solidFill>
                       <a:srgbClr val="FFFFFF"/>
                     </a:solidFill>
                   </a:tcPr>
                 </a:tc>
+                <a:extLst>
+                  <a:ext uri="{0D108BD9-81ED-4DB2-BD59-A6C34878D82A}">
+                    <a16:rowId xmlns:a16="http://schemas.microsoft.com/office/drawing/2014/main" val="10003"/>
+                  </a:ext>
+                </a:extLst>
               </a:tr>
               <a:tr h="437500">
                 <a:tc>
@@ -9440,7 +14080,7 @@
                       </a:r>
                     </a:p>
                   </a:txBody>
-                  <a:tcPr anchor="ctr" marL="90000" marR="60000" marT="20000" marB="20000">
+                  <a:tcPr marL="90000" marR="60000" marT="20000" marB="20000" anchor="ctr">
                     <a:solidFill>
                       <a:srgbClr val="FFFFFF"/>
                     </a:solidFill>
@@ -9462,7 +14102,7 @@
                       </a:r>
                     </a:p>
                   </a:txBody>
-                  <a:tcPr anchor="ctr" marL="90000" marR="60000" marT="20000" marB="20000">
+                  <a:tcPr marL="90000" marR="60000" marT="20000" marB="20000" anchor="ctr">
                     <a:solidFill>
                       <a:srgbClr val="FFFFFF"/>
                     </a:solidFill>
@@ -9484,7 +14124,7 @@
                       </a:r>
                     </a:p>
                   </a:txBody>
-                  <a:tcPr anchor="ctr" marL="90000" marR="60000" marT="20000" marB="20000">
+                  <a:tcPr marL="90000" marR="60000" marT="20000" marB="20000" anchor="ctr">
                     <a:solidFill>
                       <a:srgbClr val="FFFFFF"/>
                     </a:solidFill>
@@ -9506,12 +14146,17 @@
                       </a:r>
                     </a:p>
                   </a:txBody>
-                  <a:tcPr anchor="ctr" marL="90000" marR="60000" marT="20000" marB="20000">
+                  <a:tcPr marL="90000" marR="60000" marT="20000" marB="20000" anchor="ctr">
                     <a:solidFill>
                       <a:srgbClr val="FFFFFF"/>
                     </a:solidFill>
                   </a:tcPr>
                 </a:tc>
+                <a:extLst>
+                  <a:ext uri="{0D108BD9-81ED-4DB2-BD59-A6C34878D82A}">
+                    <a16:rowId xmlns:a16="http://schemas.microsoft.com/office/drawing/2014/main" val="10004"/>
+                  </a:ext>
+                </a:extLst>
               </a:tr>
               <a:tr h="437500">
                 <a:tc>
@@ -9530,7 +14175,7 @@
                       </a:r>
                     </a:p>
                   </a:txBody>
-                  <a:tcPr anchor="ctr" marL="90000" marR="60000" marT="20000" marB="20000">
+                  <a:tcPr marL="90000" marR="60000" marT="20000" marB="20000" anchor="ctr">
                     <a:solidFill>
                       <a:srgbClr val="FFFFFF"/>
                     </a:solidFill>
@@ -9552,7 +14197,7 @@
                       </a:r>
                     </a:p>
                   </a:txBody>
-                  <a:tcPr anchor="ctr" marL="90000" marR="60000" marT="20000" marB="20000">
+                  <a:tcPr marL="90000" marR="60000" marT="20000" marB="20000" anchor="ctr">
                     <a:solidFill>
                       <a:srgbClr val="FFFFFF"/>
                     </a:solidFill>
@@ -9574,7 +14219,7 @@
                       </a:r>
                     </a:p>
                   </a:txBody>
-                  <a:tcPr anchor="ctr" marL="90000" marR="60000" marT="20000" marB="20000">
+                  <a:tcPr marL="90000" marR="60000" marT="20000" marB="20000" anchor="ctr">
                     <a:solidFill>
                       <a:srgbClr val="FFFFFF"/>
                     </a:solidFill>
@@ -9596,12 +14241,17 @@
                       </a:r>
                     </a:p>
                   </a:txBody>
-                  <a:tcPr anchor="ctr" marL="90000" marR="60000" marT="20000" marB="20000">
+                  <a:tcPr marL="90000" marR="60000" marT="20000" marB="20000" anchor="ctr">
                     <a:solidFill>
                       <a:srgbClr val="FFFFFF"/>
                     </a:solidFill>
                   </a:tcPr>
                 </a:tc>
+                <a:extLst>
+                  <a:ext uri="{0D108BD9-81ED-4DB2-BD59-A6C34878D82A}">
+                    <a16:rowId xmlns:a16="http://schemas.microsoft.com/office/drawing/2014/main" val="10005"/>
+                  </a:ext>
+                </a:extLst>
               </a:tr>
               <a:tr h="437500">
                 <a:tc>
@@ -9620,7 +14270,7 @@
                       </a:r>
                     </a:p>
                   </a:txBody>
-                  <a:tcPr anchor="ctr" marL="90000" marR="60000" marT="20000" marB="20000">
+                  <a:tcPr marL="90000" marR="60000" marT="20000" marB="20000" anchor="ctr">
                     <a:solidFill>
                       <a:srgbClr val="FFFFFF"/>
                     </a:solidFill>
@@ -9642,7 +14292,7 @@
                       </a:r>
                     </a:p>
                   </a:txBody>
-                  <a:tcPr anchor="ctr" marL="90000" marR="60000" marT="20000" marB="20000">
+                  <a:tcPr marL="90000" marR="60000" marT="20000" marB="20000" anchor="ctr">
                     <a:solidFill>
                       <a:srgbClr val="FFFFFF"/>
                     </a:solidFill>
@@ -9664,7 +14314,7 @@
                       </a:r>
                     </a:p>
                   </a:txBody>
-                  <a:tcPr anchor="ctr" marL="90000" marR="60000" marT="20000" marB="20000">
+                  <a:tcPr marL="90000" marR="60000" marT="20000" marB="20000" anchor="ctr">
                     <a:solidFill>
                       <a:srgbClr val="FFFFFF"/>
                     </a:solidFill>
@@ -9686,12 +14336,17 @@
                       </a:r>
                     </a:p>
                   </a:txBody>
-                  <a:tcPr anchor="ctr" marL="90000" marR="60000" marT="20000" marB="20000">
+                  <a:tcPr marL="90000" marR="60000" marT="20000" marB="20000" anchor="ctr">
                     <a:solidFill>
                       <a:srgbClr val="FFFFFF"/>
                     </a:solidFill>
                   </a:tcPr>
                 </a:tc>
+                <a:extLst>
+                  <a:ext uri="{0D108BD9-81ED-4DB2-BD59-A6C34878D82A}">
+                    <a16:rowId xmlns:a16="http://schemas.microsoft.com/office/drawing/2014/main" val="10006"/>
+                  </a:ext>
+                </a:extLst>
               </a:tr>
               <a:tr h="437500">
                 <a:tc>
@@ -9710,7 +14365,7 @@
                       </a:r>
                     </a:p>
                   </a:txBody>
-                  <a:tcPr anchor="ctr" marL="90000" marR="60000" marT="20000" marB="20000">
+                  <a:tcPr marL="90000" marR="60000" marT="20000" marB="20000" anchor="ctr">
                     <a:solidFill>
                       <a:srgbClr val="FFFFFF"/>
                     </a:solidFill>
@@ -9732,7 +14387,7 @@
                       </a:r>
                     </a:p>
                   </a:txBody>
-                  <a:tcPr anchor="ctr" marL="90000" marR="60000" marT="20000" marB="20000">
+                  <a:tcPr marL="90000" marR="60000" marT="20000" marB="20000" anchor="ctr">
                     <a:solidFill>
                       <a:srgbClr val="FFFFFF"/>
                     </a:solidFill>
@@ -9754,7 +14409,7 @@
                       </a:r>
                     </a:p>
                   </a:txBody>
-                  <a:tcPr anchor="ctr" marL="90000" marR="60000" marT="20000" marB="20000">
+                  <a:tcPr marL="90000" marR="60000" marT="20000" marB="20000" anchor="ctr">
                     <a:solidFill>
                       <a:srgbClr val="FFFFFF"/>
                     </a:solidFill>
@@ -9776,12 +14431,17 @@
                       </a:r>
                     </a:p>
                   </a:txBody>
-                  <a:tcPr anchor="ctr" marL="90000" marR="60000" marT="20000" marB="20000">
+                  <a:tcPr marL="90000" marR="60000" marT="20000" marB="20000" anchor="ctr">
                     <a:solidFill>
                       <a:srgbClr val="FFFFFF"/>
                     </a:solidFill>
                   </a:tcPr>
                 </a:tc>
+                <a:extLst>
+                  <a:ext uri="{0D108BD9-81ED-4DB2-BD59-A6C34878D82A}">
+                    <a16:rowId xmlns:a16="http://schemas.microsoft.com/office/drawing/2014/main" val="10007"/>
+                  </a:ext>
+                </a:extLst>
               </a:tr>
             </a:tbl>
           </a:graphicData>
@@ -9804,7 +14464,7 @@
           <a:noFill/>
         </p:spPr>
         <p:txBody>
-          <a:bodyPr wrap="square" anchor="ctr" lIns="36000" rIns="36000" tIns="18000" bIns="18000">
+          <a:bodyPr wrap="square" lIns="36000" tIns="18000" rIns="36000" bIns="18000" anchor="ctr">
             <a:spAutoFit/>
           </a:bodyPr>
           <a:lstStyle/>
@@ -9838,7 +14498,7 @@
           <a:noFill/>
         </p:spPr>
         <p:txBody>
-          <a:bodyPr wrap="square" anchor="ctr" lIns="36000" rIns="36000" tIns="18000" bIns="18000">
+          <a:bodyPr wrap="square" lIns="36000" tIns="18000" rIns="36000" bIns="18000" anchor="ctr">
             <a:spAutoFit/>
           </a:bodyPr>
           <a:lstStyle/>
@@ -9864,7 +14524,7 @@
 </file>
 
 <file path=ppt/slides/slide6.xml><?xml version="1.0" encoding="utf-8"?>
-<p:sld xmlns:a="http://schemas.openxmlformats.org/drawingml/2006/main" xmlns:p="http://schemas.openxmlformats.org/presentationml/2006/main" xmlns:r="http://schemas.openxmlformats.org/officeDocument/2006/relationships">
+<p:sld xmlns:a="http://schemas.openxmlformats.org/drawingml/2006/main" xmlns:r="http://schemas.openxmlformats.org/officeDocument/2006/relationships" xmlns:p="http://schemas.openxmlformats.org/presentationml/2006/main">
   <p:cSld>
     <p:spTree>
       <p:nvGrpSpPr>
@@ -9872,7 +14532,14 @@
         <p:cNvGrpSpPr/>
         <p:nvPr/>
       </p:nvGrpSpPr>
-      <p:grpSpPr/>
+      <p:grpSpPr>
+        <a:xfrm>
+          <a:off x="0" y="0"/>
+          <a:ext cx="0" cy="0"/>
+          <a:chOff x="0" y="0"/>
+          <a:chExt cx="0" cy="0"/>
+        </a:xfrm>
+      </p:grpSpPr>
       <p:sp>
         <p:nvSpPr>
           <p:cNvPr id="2" name="Content Placeholder 1"/>
@@ -9961,7 +14628,7 @@
           <p:nvPr/>
         </p:nvPicPr>
         <p:blipFill>
-          <a:blip r:embed="rId2"/>
+          <a:blip r:embed="rId3"/>
           <a:stretch>
             <a:fillRect/>
           </a:stretch>
@@ -9993,7 +14660,7 @@
           <a:noFill/>
         </p:spPr>
         <p:txBody>
-          <a:bodyPr wrap="square" anchor="ctr" lIns="36000" rIns="36000" tIns="18000" bIns="18000">
+          <a:bodyPr wrap="square" lIns="36000" tIns="18000" rIns="36000" bIns="18000" anchor="ctr">
             <a:spAutoFit/>
           </a:bodyPr>
           <a:lstStyle/>
@@ -10027,7 +14694,7 @@
           <a:noFill/>
         </p:spPr>
         <p:txBody>
-          <a:bodyPr wrap="square" anchor="ctr" lIns="36000" rIns="36000" tIns="18000" bIns="18000">
+          <a:bodyPr wrap="square" lIns="36000" tIns="18000" rIns="36000" bIns="18000" anchor="ctr">
             <a:spAutoFit/>
           </a:bodyPr>
           <a:lstStyle/>
@@ -10053,7 +14720,7 @@
 </file>
 
 <file path=ppt/slides/slide7.xml><?xml version="1.0" encoding="utf-8"?>
-<p:sld xmlns:a="http://schemas.openxmlformats.org/drawingml/2006/main" xmlns:p="http://schemas.openxmlformats.org/presentationml/2006/main" xmlns:r="http://schemas.openxmlformats.org/officeDocument/2006/relationships">
+<p:sld xmlns:a="http://schemas.openxmlformats.org/drawingml/2006/main" xmlns:r="http://schemas.openxmlformats.org/officeDocument/2006/relationships" xmlns:p="http://schemas.openxmlformats.org/presentationml/2006/main">
   <p:cSld>
     <p:spTree>
       <p:nvGrpSpPr>
@@ -10061,7 +14728,14 @@
         <p:cNvGrpSpPr/>
         <p:nvPr/>
       </p:nvGrpSpPr>
-      <p:grpSpPr/>
+      <p:grpSpPr>
+        <a:xfrm>
+          <a:off x="0" y="0"/>
+          <a:ext cx="0" cy="0"/>
+          <a:chOff x="0" y="0"/>
+          <a:chExt cx="0" cy="0"/>
+        </a:xfrm>
+      </p:grpSpPr>
       <p:sp>
         <p:nvSpPr>
           <p:cNvPr id="2" name="Content Placeholder 1"/>
@@ -10204,7 +14878,7 @@
           <p:nvPr/>
         </p:nvPicPr>
         <p:blipFill>
-          <a:blip r:embed="rId2"/>
+          <a:blip r:embed="rId3"/>
           <a:stretch>
             <a:fillRect/>
           </a:stretch>
@@ -10236,7 +14910,7 @@
           <a:noFill/>
         </p:spPr>
         <p:txBody>
-          <a:bodyPr wrap="square" anchor="ctr" lIns="36000" rIns="36000" tIns="18000" bIns="18000">
+          <a:bodyPr wrap="square" lIns="36000" tIns="18000" rIns="36000" bIns="18000" anchor="ctr">
             <a:spAutoFit/>
           </a:bodyPr>
           <a:lstStyle/>
@@ -10270,7 +14944,7 @@
           <a:noFill/>
         </p:spPr>
         <p:txBody>
-          <a:bodyPr wrap="square" anchor="ctr" lIns="36000" rIns="36000" tIns="18000" bIns="18000">
+          <a:bodyPr wrap="square" lIns="36000" tIns="18000" rIns="36000" bIns="18000" anchor="ctr">
             <a:spAutoFit/>
           </a:bodyPr>
           <a:lstStyle/>
@@ -10296,7 +14970,7 @@
 </file>
 
 <file path=ppt/slides/slide8.xml><?xml version="1.0" encoding="utf-8"?>
-<p:sld xmlns:a="http://schemas.openxmlformats.org/drawingml/2006/main" xmlns:p="http://schemas.openxmlformats.org/presentationml/2006/main" xmlns:r="http://schemas.openxmlformats.org/officeDocument/2006/relationships">
+<p:sld xmlns:a="http://schemas.openxmlformats.org/drawingml/2006/main" xmlns:r="http://schemas.openxmlformats.org/officeDocument/2006/relationships" xmlns:p="http://schemas.openxmlformats.org/presentationml/2006/main">
   <p:cSld>
     <p:spTree>
       <p:nvGrpSpPr>
@@ -10304,7 +14978,14 @@
         <p:cNvGrpSpPr/>
         <p:nvPr/>
       </p:nvGrpSpPr>
-      <p:grpSpPr/>
+      <p:grpSpPr>
+        <a:xfrm>
+          <a:off x="0" y="0"/>
+          <a:ext cx="0" cy="0"/>
+          <a:chOff x="0" y="0"/>
+          <a:chExt cx="0" cy="0"/>
+        </a:xfrm>
+      </p:grpSpPr>
       <p:sp>
         <p:nvSpPr>
           <p:cNvPr id="2" name="Content Placeholder 1"/>
@@ -10447,7 +15128,7 @@
           <p:nvPr/>
         </p:nvPicPr>
         <p:blipFill>
-          <a:blip r:embed="rId2"/>
+          <a:blip r:embed="rId3"/>
           <a:stretch>
             <a:fillRect/>
           </a:stretch>
@@ -10479,7 +15160,7 @@
           <a:noFill/>
         </p:spPr>
         <p:txBody>
-          <a:bodyPr wrap="square" anchor="ctr" lIns="36000" rIns="36000" tIns="18000" bIns="18000">
+          <a:bodyPr wrap="square" lIns="36000" tIns="18000" rIns="36000" bIns="18000" anchor="ctr">
             <a:spAutoFit/>
           </a:bodyPr>
           <a:lstStyle/>
@@ -10513,7 +15194,7 @@
           <a:noFill/>
         </p:spPr>
         <p:txBody>
-          <a:bodyPr wrap="square" anchor="ctr" lIns="36000" rIns="36000" tIns="18000" bIns="18000">
+          <a:bodyPr wrap="square" lIns="36000" tIns="18000" rIns="36000" bIns="18000" anchor="ctr">
             <a:spAutoFit/>
           </a:bodyPr>
           <a:lstStyle/>
@@ -10539,7 +15220,7 @@
 </file>
 
 <file path=ppt/slides/slide9.xml><?xml version="1.0" encoding="utf-8"?>
-<p:sld xmlns:a="http://schemas.openxmlformats.org/drawingml/2006/main" xmlns:p="http://schemas.openxmlformats.org/presentationml/2006/main" xmlns:r="http://schemas.openxmlformats.org/officeDocument/2006/relationships">
+<p:sld xmlns:a="http://schemas.openxmlformats.org/drawingml/2006/main" xmlns:r="http://schemas.openxmlformats.org/officeDocument/2006/relationships" xmlns:p="http://schemas.openxmlformats.org/presentationml/2006/main">
   <p:cSld>
     <p:spTree>
       <p:nvGrpSpPr>
@@ -10547,7 +15228,14 @@
         <p:cNvGrpSpPr/>
         <p:nvPr/>
       </p:nvGrpSpPr>
-      <p:grpSpPr/>
+      <p:grpSpPr>
+        <a:xfrm>
+          <a:off x="0" y="0"/>
+          <a:ext cx="0" cy="0"/>
+          <a:chOff x="0" y="0"/>
+          <a:chExt cx="0" cy="0"/>
+        </a:xfrm>
+      </p:grpSpPr>
       <p:sp>
         <p:nvSpPr>
           <p:cNvPr id="2" name="Content Placeholder 1"/>
@@ -10690,7 +15378,7 @@
           <p:nvPr/>
         </p:nvPicPr>
         <p:blipFill>
-          <a:blip r:embed="rId2"/>
+          <a:blip r:embed="rId3"/>
           <a:stretch>
             <a:fillRect/>
           </a:stretch>
@@ -10722,7 +15410,7 @@
           <a:noFill/>
         </p:spPr>
         <p:txBody>
-          <a:bodyPr wrap="square" anchor="ctr" lIns="36000" rIns="36000" tIns="18000" bIns="18000">
+          <a:bodyPr wrap="square" lIns="36000" tIns="18000" rIns="36000" bIns="18000" anchor="ctr">
             <a:spAutoFit/>
           </a:bodyPr>
           <a:lstStyle/>
@@ -10756,7 +15444,7 @@
           <a:noFill/>
         </p:spPr>
         <p:txBody>
-          <a:bodyPr wrap="square" anchor="ctr" lIns="36000" rIns="36000" tIns="18000" bIns="18000">
+          <a:bodyPr wrap="square" lIns="36000" tIns="18000" rIns="36000" bIns="18000" anchor="ctr">
             <a:spAutoFit/>
           </a:bodyPr>
           <a:lstStyle/>
